--- a/Backend_Presentation.pptx
+++ b/Backend_Presentation.pptx
@@ -2,15 +2,23 @@
 <file path=ppt/presentation.xml><?xml version="1.0" encoding="utf-8"?>
 <p:presentation xmlns:a="http://schemas.openxmlformats.org/drawingml/2006/main" xmlns:r="http://schemas.openxmlformats.org/officeDocument/2006/relationships" xmlns:p="http://schemas.openxmlformats.org/presentationml/2006/main" saveSubsetFonts="1" autoCompressPictures="0">
   <p:sldMasterIdLst>
-    <p:sldMasterId id="2147483690" r:id="rId1"/>
+    <p:sldMasterId id="2147483768" r:id="rId1"/>
   </p:sldMasterIdLst>
   <p:sldIdLst>
     <p:sldId id="256" r:id="rId2"/>
-    <p:sldId id="257" r:id="rId3"/>
-    <p:sldId id="258" r:id="rId4"/>
-    <p:sldId id="259" r:id="rId5"/>
-    <p:sldId id="260" r:id="rId6"/>
-    <p:sldId id="261" r:id="rId7"/>
+    <p:sldId id="270" r:id="rId3"/>
+    <p:sldId id="268" r:id="rId4"/>
+    <p:sldId id="269" r:id="rId5"/>
+    <p:sldId id="257" r:id="rId6"/>
+    <p:sldId id="258" r:id="rId7"/>
+    <p:sldId id="264" r:id="rId8"/>
+    <p:sldId id="259" r:id="rId9"/>
+    <p:sldId id="265" r:id="rId10"/>
+    <p:sldId id="260" r:id="rId11"/>
+    <p:sldId id="266" r:id="rId12"/>
+    <p:sldId id="261" r:id="rId13"/>
+    <p:sldId id="262" r:id="rId14"/>
+    <p:sldId id="267" r:id="rId15"/>
   </p:sldIdLst>
   <p:sldSz cx="9144000" cy="6858000" type="screen4x3"/>
   <p:notesSz cx="6858000" cy="9144000"/>
@@ -145,6 +153,36 @@
           <a:chExt cx="0" cy="0"/>
         </a:xfrm>
       </p:grpSpPr>
+      <p:pic>
+        <p:nvPicPr>
+          <p:cNvPr id="8" name="Picture 7" descr="C2-HD-BTM.png"/>
+          <p:cNvPicPr>
+            <a:picLocks noChangeAspect="1"/>
+          </p:cNvPicPr>
+          <p:nvPr/>
+        </p:nvPicPr>
+        <p:blipFill>
+          <a:blip r:embed="rId2">
+            <a:extLst>
+              <a:ext uri="{28A0092B-C50C-407E-A947-70E740481C1C}">
+                <a14:useLocalDpi xmlns:a14="http://schemas.microsoft.com/office/drawing/2010/main" val="0"/>
+              </a:ext>
+            </a:extLst>
+          </a:blip>
+          <a:stretch>
+            <a:fillRect/>
+          </a:stretch>
+        </p:blipFill>
+        <p:spPr>
+          <a:xfrm>
+            <a:off x="0" y="4995862"/>
+            <a:ext cx="9144000" cy="1862138"/>
+          </a:xfrm>
+          <a:prstGeom prst="rect">
+            <a:avLst/>
+          </a:prstGeom>
+        </p:spPr>
+      </p:pic>
       <p:sp>
         <p:nvSpPr>
           <p:cNvPr id="2" name="Title 1"/>
@@ -157,14 +195,16 @@
         </p:nvSpPr>
         <p:spPr>
           <a:xfrm>
-            <a:off x="685800" y="1122363"/>
-            <a:ext cx="7772400" cy="2387600"/>
-          </a:xfrm>
-        </p:spPr>
-        <p:txBody>
-          <a:bodyPr anchor="b"/>
+            <a:off x="914400" y="1803405"/>
+            <a:ext cx="7315200" cy="1825096"/>
+          </a:xfrm>
+        </p:spPr>
+        <p:txBody>
+          <a:bodyPr anchor="b">
+            <a:normAutofit/>
+          </a:bodyPr>
           <a:lstStyle>
-            <a:lvl1pPr algn="ctr">
+            <a:lvl1pPr algn="l">
               <a:defRPr sz="6000"/>
             </a:lvl1pPr>
           </a:lstStyle>
@@ -189,16 +229,18 @@
         </p:nvSpPr>
         <p:spPr>
           <a:xfrm>
-            <a:off x="1143000" y="3602038"/>
-            <a:ext cx="6858000" cy="1655762"/>
-          </a:xfrm>
-        </p:spPr>
-        <p:txBody>
-          <a:bodyPr/>
+            <a:off x="914400" y="3632201"/>
+            <a:ext cx="7315200" cy="685800"/>
+          </a:xfrm>
+        </p:spPr>
+        <p:txBody>
+          <a:bodyPr>
+            <a:normAutofit/>
+          </a:bodyPr>
           <a:lstStyle>
-            <a:lvl1pPr marL="0" indent="0" algn="ctr">
-              <a:buNone/>
-              <a:defRPr sz="2400"/>
+            <a:lvl1pPr marL="0" indent="0" algn="l">
+              <a:buNone/>
+              <a:defRPr sz="2000"/>
             </a:lvl1pPr>
             <a:lvl2pPr marL="457200" indent="0" algn="ctr">
               <a:buNone/>
@@ -252,14 +294,19 @@
             <p:ph type="dt" sz="half" idx="10"/>
           </p:nvPr>
         </p:nvSpPr>
-        <p:spPr/>
+        <p:spPr>
+          <a:xfrm>
+            <a:off x="5932170" y="4323845"/>
+            <a:ext cx="2297429" cy="365125"/>
+          </a:xfrm>
+        </p:spPr>
         <p:txBody>
           <a:bodyPr/>
           <a:lstStyle/>
           <a:p>
             <a:fld id="{5BCAD085-E8A6-8845-BD4E-CB4CCA059FC4}" type="datetimeFigureOut">
               <a:rPr lang="en-US" smtClean="0"/>
-              <a:t>4/29/2026</a:t>
+              <a:t>5/11/2026</a:t>
             </a:fld>
             <a:endParaRPr lang="en-US"/>
           </a:p>
@@ -275,7 +322,12 @@
             <p:ph type="ftr" sz="quarter" idx="11"/>
           </p:nvPr>
         </p:nvSpPr>
-        <p:spPr/>
+        <p:spPr>
+          <a:xfrm>
+            <a:off x="914400" y="4323846"/>
+            <a:ext cx="4880610" cy="365125"/>
+          </a:xfrm>
+        </p:spPr>
         <p:txBody>
           <a:bodyPr/>
           <a:lstStyle/>
@@ -294,7 +346,12 @@
             <p:ph type="sldNum" sz="quarter" idx="12"/>
           </p:nvPr>
         </p:nvSpPr>
-        <p:spPr/>
+        <p:spPr>
+          <a:xfrm>
+            <a:off x="6057900" y="1430867"/>
+            <a:ext cx="2171700" cy="365125"/>
+          </a:xfrm>
+        </p:spPr>
         <p:txBody>
           <a:bodyPr/>
           <a:lstStyle/>
@@ -310,7 +367,7 @@
     </p:spTree>
     <p:extLst>
       <p:ext uri="{BB962C8B-B14F-4D97-AF65-F5344CB8AC3E}">
-        <p14:creationId xmlns:p14="http://schemas.microsoft.com/office/powerpoint/2010/main" val="1237965951"/>
+        <p14:creationId xmlns:p14="http://schemas.microsoft.com/office/powerpoint/2010/main" val="417675034"/>
       </p:ext>
     </p:extLst>
   </p:cSld>
@@ -321,6 +378,2598 @@
 </file>
 
 <file path=ppt/slideLayouts/slideLayout10.xml><?xml version="1.0" encoding="utf-8"?>
+<p:sldLayout xmlns:a="http://schemas.openxmlformats.org/drawingml/2006/main" xmlns:r="http://schemas.openxmlformats.org/officeDocument/2006/relationships" xmlns:p="http://schemas.openxmlformats.org/presentationml/2006/main" preserve="1">
+  <p:cSld name="Panoramic Picture with Caption">
+    <p:spTree>
+      <p:nvGrpSpPr>
+        <p:cNvPr id="1" name=""/>
+        <p:cNvGrpSpPr/>
+        <p:nvPr/>
+      </p:nvGrpSpPr>
+      <p:grpSpPr>
+        <a:xfrm>
+          <a:off x="0" y="0"/>
+          <a:ext cx="0" cy="0"/>
+          <a:chOff x="0" y="0"/>
+          <a:chExt cx="0" cy="0"/>
+        </a:xfrm>
+      </p:grpSpPr>
+      <p:sp>
+        <p:nvSpPr>
+          <p:cNvPr id="2" name="Title 1"/>
+          <p:cNvSpPr>
+            <a:spLocks noGrp="1"/>
+          </p:cNvSpPr>
+          <p:nvPr>
+            <p:ph type="title"/>
+          </p:nvPr>
+        </p:nvSpPr>
+        <p:spPr>
+          <a:xfrm>
+            <a:off x="594355" y="4697361"/>
+            <a:ext cx="7956482" cy="819355"/>
+          </a:xfrm>
+        </p:spPr>
+        <p:txBody>
+          <a:bodyPr anchor="b"/>
+          <a:lstStyle>
+            <a:lvl1pPr algn="l">
+              <a:defRPr sz="3200"/>
+            </a:lvl1pPr>
+          </a:lstStyle>
+          <a:p>
+            <a:r>
+              <a:rPr lang="en-US"/>
+              <a:t>Click to edit Master title style</a:t>
+            </a:r>
+            <a:endParaRPr lang="en-US" dirty="0"/>
+          </a:p>
+        </p:txBody>
+      </p:sp>
+      <p:sp>
+        <p:nvSpPr>
+          <p:cNvPr id="3" name="Picture Placeholder 2"/>
+          <p:cNvSpPr>
+            <a:spLocks noGrp="1" noChangeAspect="1"/>
+          </p:cNvSpPr>
+          <p:nvPr>
+            <p:ph type="pic" idx="1"/>
+          </p:nvPr>
+        </p:nvSpPr>
+        <p:spPr>
+          <a:xfrm>
+            <a:off x="594355" y="977035"/>
+            <a:ext cx="7950260" cy="3406972"/>
+          </a:xfrm>
+        </p:spPr>
+        <p:txBody>
+          <a:bodyPr anchor="t"/>
+          <a:lstStyle>
+            <a:lvl1pPr marL="0" indent="0">
+              <a:buNone/>
+              <a:defRPr sz="3200"/>
+            </a:lvl1pPr>
+            <a:lvl2pPr marL="457200" indent="0">
+              <a:buNone/>
+              <a:defRPr sz="2800"/>
+            </a:lvl2pPr>
+            <a:lvl3pPr marL="914400" indent="0">
+              <a:buNone/>
+              <a:defRPr sz="2400"/>
+            </a:lvl3pPr>
+            <a:lvl4pPr marL="1371600" indent="0">
+              <a:buNone/>
+              <a:defRPr sz="2000"/>
+            </a:lvl4pPr>
+            <a:lvl5pPr marL="1828800" indent="0">
+              <a:buNone/>
+              <a:defRPr sz="2000"/>
+            </a:lvl5pPr>
+            <a:lvl6pPr marL="2286000" indent="0">
+              <a:buNone/>
+              <a:defRPr sz="2000"/>
+            </a:lvl6pPr>
+            <a:lvl7pPr marL="2743200" indent="0">
+              <a:buNone/>
+              <a:defRPr sz="2000"/>
+            </a:lvl7pPr>
+            <a:lvl8pPr marL="3200400" indent="0">
+              <a:buNone/>
+              <a:defRPr sz="2000"/>
+            </a:lvl8pPr>
+            <a:lvl9pPr marL="3657600" indent="0">
+              <a:buNone/>
+              <a:defRPr sz="2000"/>
+            </a:lvl9pPr>
+          </a:lstStyle>
+          <a:p>
+            <a:r>
+              <a:rPr lang="en-US"/>
+              <a:t>Click icon to add picture</a:t>
+            </a:r>
+            <a:endParaRPr lang="en-US" dirty="0"/>
+          </a:p>
+        </p:txBody>
+      </p:sp>
+      <p:sp>
+        <p:nvSpPr>
+          <p:cNvPr id="4" name="Text Placeholder 3"/>
+          <p:cNvSpPr>
+            <a:spLocks noGrp="1"/>
+          </p:cNvSpPr>
+          <p:nvPr>
+            <p:ph type="body" sz="half" idx="2"/>
+          </p:nvPr>
+        </p:nvSpPr>
+        <p:spPr>
+          <a:xfrm>
+            <a:off x="594360" y="5516716"/>
+            <a:ext cx="7955280" cy="746924"/>
+          </a:xfrm>
+        </p:spPr>
+        <p:txBody>
+          <a:bodyPr/>
+          <a:lstStyle>
+            <a:lvl1pPr marL="0" indent="0" algn="l">
+              <a:buNone/>
+              <a:defRPr sz="1600"/>
+            </a:lvl1pPr>
+            <a:lvl2pPr marL="457200" indent="0">
+              <a:buNone/>
+              <a:defRPr sz="1400"/>
+            </a:lvl2pPr>
+            <a:lvl3pPr marL="914400" indent="0">
+              <a:buNone/>
+              <a:defRPr sz="1200"/>
+            </a:lvl3pPr>
+            <a:lvl4pPr marL="1371600" indent="0">
+              <a:buNone/>
+              <a:defRPr sz="1000"/>
+            </a:lvl4pPr>
+            <a:lvl5pPr marL="1828800" indent="0">
+              <a:buNone/>
+              <a:defRPr sz="1000"/>
+            </a:lvl5pPr>
+            <a:lvl6pPr marL="2286000" indent="0">
+              <a:buNone/>
+              <a:defRPr sz="1000"/>
+            </a:lvl6pPr>
+            <a:lvl7pPr marL="2743200" indent="0">
+              <a:buNone/>
+              <a:defRPr sz="1000"/>
+            </a:lvl7pPr>
+            <a:lvl8pPr marL="3200400" indent="0">
+              <a:buNone/>
+              <a:defRPr sz="1000"/>
+            </a:lvl8pPr>
+            <a:lvl9pPr marL="3657600" indent="0">
+              <a:buNone/>
+              <a:defRPr sz="1000"/>
+            </a:lvl9pPr>
+          </a:lstStyle>
+          <a:p>
+            <a:pPr lvl="0"/>
+            <a:r>
+              <a:rPr lang="en-US"/>
+              <a:t>Click to edit Master text styles</a:t>
+            </a:r>
+          </a:p>
+        </p:txBody>
+      </p:sp>
+      <p:sp>
+        <p:nvSpPr>
+          <p:cNvPr id="5" name="Date Placeholder 4"/>
+          <p:cNvSpPr>
+            <a:spLocks noGrp="1"/>
+          </p:cNvSpPr>
+          <p:nvPr>
+            <p:ph type="dt" sz="half" idx="10"/>
+          </p:nvPr>
+        </p:nvSpPr>
+        <p:spPr/>
+        <p:txBody>
+          <a:bodyPr/>
+          <a:lstStyle/>
+          <a:p>
+            <a:fld id="{5BCAD085-E8A6-8845-BD4E-CB4CCA059FC4}" type="datetimeFigureOut">
+              <a:rPr lang="en-US" smtClean="0"/>
+              <a:t>5/11/2026</a:t>
+            </a:fld>
+            <a:endParaRPr lang="en-US"/>
+          </a:p>
+        </p:txBody>
+      </p:sp>
+      <p:sp>
+        <p:nvSpPr>
+          <p:cNvPr id="6" name="Footer Placeholder 5"/>
+          <p:cNvSpPr>
+            <a:spLocks noGrp="1"/>
+          </p:cNvSpPr>
+          <p:nvPr>
+            <p:ph type="ftr" sz="quarter" idx="11"/>
+          </p:nvPr>
+        </p:nvSpPr>
+        <p:spPr/>
+        <p:txBody>
+          <a:bodyPr/>
+          <a:lstStyle/>
+          <a:p>
+            <a:endParaRPr lang="en-US"/>
+          </a:p>
+        </p:txBody>
+      </p:sp>
+      <p:sp>
+        <p:nvSpPr>
+          <p:cNvPr id="7" name="Slide Number Placeholder 6"/>
+          <p:cNvSpPr>
+            <a:spLocks noGrp="1"/>
+          </p:cNvSpPr>
+          <p:nvPr>
+            <p:ph type="sldNum" sz="quarter" idx="12"/>
+          </p:nvPr>
+        </p:nvSpPr>
+        <p:spPr/>
+        <p:txBody>
+          <a:bodyPr/>
+          <a:lstStyle/>
+          <a:p>
+            <a:fld id="{C1FF6DA9-008F-8B48-92A6-B652298478BF}" type="slidenum">
+              <a:rPr lang="en-US" smtClean="0"/>
+              <a:t>‹#›</a:t>
+            </a:fld>
+            <a:endParaRPr lang="en-US"/>
+          </a:p>
+        </p:txBody>
+      </p:sp>
+    </p:spTree>
+    <p:extLst>
+      <p:ext uri="{BB962C8B-B14F-4D97-AF65-F5344CB8AC3E}">
+        <p14:creationId xmlns:p14="http://schemas.microsoft.com/office/powerpoint/2010/main" val="881007935"/>
+      </p:ext>
+    </p:extLst>
+  </p:cSld>
+  <p:clrMapOvr>
+    <a:masterClrMapping/>
+  </p:clrMapOvr>
+</p:sldLayout>
+</file>
+
+<file path=ppt/slideLayouts/slideLayout11.xml><?xml version="1.0" encoding="utf-8"?>
+<p:sldLayout xmlns:a="http://schemas.openxmlformats.org/drawingml/2006/main" xmlns:r="http://schemas.openxmlformats.org/officeDocument/2006/relationships" xmlns:p="http://schemas.openxmlformats.org/presentationml/2006/main" showMasterSp="0" preserve="1">
+  <p:cSld name="Title and Caption">
+    <p:spTree>
+      <p:nvGrpSpPr>
+        <p:cNvPr id="1" name=""/>
+        <p:cNvGrpSpPr/>
+        <p:nvPr/>
+      </p:nvGrpSpPr>
+      <p:grpSpPr>
+        <a:xfrm>
+          <a:off x="0" y="0"/>
+          <a:ext cx="0" cy="0"/>
+          <a:chOff x="0" y="0"/>
+          <a:chExt cx="0" cy="0"/>
+        </a:xfrm>
+      </p:grpSpPr>
+      <p:pic>
+        <p:nvPicPr>
+          <p:cNvPr id="8" name="Picture 7" descr="C2-HD-BTM.png"/>
+          <p:cNvPicPr>
+            <a:picLocks noChangeAspect="1"/>
+          </p:cNvPicPr>
+          <p:nvPr/>
+        </p:nvPicPr>
+        <p:blipFill>
+          <a:blip r:embed="rId2">
+            <a:extLst>
+              <a:ext uri="{28A0092B-C50C-407E-A947-70E740481C1C}">
+                <a14:useLocalDpi xmlns:a14="http://schemas.microsoft.com/office/drawing/2010/main" val="0"/>
+              </a:ext>
+            </a:extLst>
+          </a:blip>
+          <a:stretch>
+            <a:fillRect/>
+          </a:stretch>
+        </p:blipFill>
+        <p:spPr>
+          <a:xfrm>
+            <a:off x="0" y="4995862"/>
+            <a:ext cx="9144000" cy="1862138"/>
+          </a:xfrm>
+          <a:prstGeom prst="rect">
+            <a:avLst/>
+          </a:prstGeom>
+        </p:spPr>
+      </p:pic>
+      <p:sp>
+        <p:nvSpPr>
+          <p:cNvPr id="2" name="Title 1"/>
+          <p:cNvSpPr>
+            <a:spLocks noGrp="1"/>
+          </p:cNvSpPr>
+          <p:nvPr>
+            <p:ph type="title"/>
+          </p:nvPr>
+        </p:nvSpPr>
+        <p:spPr>
+          <a:xfrm>
+            <a:off x="594360" y="753533"/>
+            <a:ext cx="7955280" cy="2802467"/>
+          </a:xfrm>
+        </p:spPr>
+        <p:txBody>
+          <a:bodyPr anchor="ctr"/>
+          <a:lstStyle>
+            <a:lvl1pPr algn="l">
+              <a:defRPr sz="3200"/>
+            </a:lvl1pPr>
+          </a:lstStyle>
+          <a:p>
+            <a:r>
+              <a:rPr lang="en-US"/>
+              <a:t>Click to edit Master title style</a:t>
+            </a:r>
+            <a:endParaRPr lang="en-US" dirty="0"/>
+          </a:p>
+        </p:txBody>
+      </p:sp>
+      <p:sp>
+        <p:nvSpPr>
+          <p:cNvPr id="4" name="Text Placeholder 3"/>
+          <p:cNvSpPr>
+            <a:spLocks noGrp="1"/>
+          </p:cNvSpPr>
+          <p:nvPr>
+            <p:ph type="body" sz="half" idx="2"/>
+          </p:nvPr>
+        </p:nvSpPr>
+        <p:spPr>
+          <a:xfrm>
+            <a:off x="685800" y="3649134"/>
+            <a:ext cx="7772400" cy="1330852"/>
+          </a:xfrm>
+        </p:spPr>
+        <p:txBody>
+          <a:bodyPr anchor="ctr"/>
+          <a:lstStyle>
+            <a:lvl1pPr marL="0" indent="0">
+              <a:buNone/>
+              <a:defRPr sz="1600"/>
+            </a:lvl1pPr>
+            <a:lvl2pPr marL="457200" indent="0">
+              <a:buNone/>
+              <a:defRPr sz="1400"/>
+            </a:lvl2pPr>
+            <a:lvl3pPr marL="914400" indent="0">
+              <a:buNone/>
+              <a:defRPr sz="1200"/>
+            </a:lvl3pPr>
+            <a:lvl4pPr marL="1371600" indent="0">
+              <a:buNone/>
+              <a:defRPr sz="1000"/>
+            </a:lvl4pPr>
+            <a:lvl5pPr marL="1828800" indent="0">
+              <a:buNone/>
+              <a:defRPr sz="1000"/>
+            </a:lvl5pPr>
+            <a:lvl6pPr marL="2286000" indent="0">
+              <a:buNone/>
+              <a:defRPr sz="1000"/>
+            </a:lvl6pPr>
+            <a:lvl7pPr marL="2743200" indent="0">
+              <a:buNone/>
+              <a:defRPr sz="1000"/>
+            </a:lvl7pPr>
+            <a:lvl8pPr marL="3200400" indent="0">
+              <a:buNone/>
+              <a:defRPr sz="1000"/>
+            </a:lvl8pPr>
+            <a:lvl9pPr marL="3657600" indent="0">
+              <a:buNone/>
+              <a:defRPr sz="1000"/>
+            </a:lvl9pPr>
+          </a:lstStyle>
+          <a:p>
+            <a:pPr lvl="0"/>
+            <a:r>
+              <a:rPr lang="en-US"/>
+              <a:t>Click to edit Master text styles</a:t>
+            </a:r>
+          </a:p>
+        </p:txBody>
+      </p:sp>
+      <p:sp>
+        <p:nvSpPr>
+          <p:cNvPr id="5" name="Date Placeholder 4"/>
+          <p:cNvSpPr>
+            <a:spLocks noGrp="1"/>
+          </p:cNvSpPr>
+          <p:nvPr>
+            <p:ph type="dt" sz="half" idx="10"/>
+          </p:nvPr>
+        </p:nvSpPr>
+        <p:spPr>
+          <a:xfrm>
+            <a:off x="5562176" y="381001"/>
+            <a:ext cx="2183130" cy="365125"/>
+          </a:xfrm>
+        </p:spPr>
+        <p:txBody>
+          <a:bodyPr/>
+          <a:lstStyle>
+            <a:lvl1pPr algn="r">
+              <a:defRPr/>
+            </a:lvl1pPr>
+          </a:lstStyle>
+          <a:p>
+            <a:fld id="{5BCAD085-E8A6-8845-BD4E-CB4CCA059FC4}" type="datetimeFigureOut">
+              <a:rPr lang="en-US" smtClean="0"/>
+              <a:t>5/11/2026</a:t>
+            </a:fld>
+            <a:endParaRPr lang="en-US"/>
+          </a:p>
+        </p:txBody>
+      </p:sp>
+      <p:sp>
+        <p:nvSpPr>
+          <p:cNvPr id="6" name="Footer Placeholder 5"/>
+          <p:cNvSpPr>
+            <a:spLocks noGrp="1"/>
+          </p:cNvSpPr>
+          <p:nvPr>
+            <p:ph type="ftr" sz="quarter" idx="11"/>
+          </p:nvPr>
+        </p:nvSpPr>
+        <p:spPr>
+          <a:xfrm>
+            <a:off x="594360" y="381001"/>
+            <a:ext cx="4830656" cy="365125"/>
+          </a:xfrm>
+        </p:spPr>
+        <p:txBody>
+          <a:bodyPr/>
+          <a:lstStyle/>
+          <a:p>
+            <a:endParaRPr lang="en-US"/>
+          </a:p>
+        </p:txBody>
+      </p:sp>
+      <p:sp>
+        <p:nvSpPr>
+          <p:cNvPr id="7" name="Slide Number Placeholder 6"/>
+          <p:cNvSpPr>
+            <a:spLocks noGrp="1"/>
+          </p:cNvSpPr>
+          <p:nvPr>
+            <p:ph type="sldNum" sz="quarter" idx="12"/>
+          </p:nvPr>
+        </p:nvSpPr>
+        <p:spPr>
+          <a:xfrm>
+            <a:off x="7882466" y="381001"/>
+            <a:ext cx="667174" cy="365125"/>
+          </a:xfrm>
+        </p:spPr>
+        <p:txBody>
+          <a:bodyPr/>
+          <a:lstStyle/>
+          <a:p>
+            <a:fld id="{C1FF6DA9-008F-8B48-92A6-B652298478BF}" type="slidenum">
+              <a:rPr lang="en-US" smtClean="0"/>
+              <a:t>‹#›</a:t>
+            </a:fld>
+            <a:endParaRPr lang="en-US"/>
+          </a:p>
+        </p:txBody>
+      </p:sp>
+    </p:spTree>
+    <p:extLst>
+      <p:ext uri="{BB962C8B-B14F-4D97-AF65-F5344CB8AC3E}">
+        <p14:creationId xmlns:p14="http://schemas.microsoft.com/office/powerpoint/2010/main" val="2543006328"/>
+      </p:ext>
+    </p:extLst>
+  </p:cSld>
+  <p:clrMapOvr>
+    <a:masterClrMapping/>
+  </p:clrMapOvr>
+</p:sldLayout>
+</file>
+
+<file path=ppt/slideLayouts/slideLayout12.xml><?xml version="1.0" encoding="utf-8"?>
+<p:sldLayout xmlns:a="http://schemas.openxmlformats.org/drawingml/2006/main" xmlns:r="http://schemas.openxmlformats.org/officeDocument/2006/relationships" xmlns:p="http://schemas.openxmlformats.org/presentationml/2006/main" showMasterSp="0" preserve="1">
+  <p:cSld name="Quote with Caption">
+    <p:spTree>
+      <p:nvGrpSpPr>
+        <p:cNvPr id="1" name=""/>
+        <p:cNvGrpSpPr/>
+        <p:nvPr/>
+      </p:nvGrpSpPr>
+      <p:grpSpPr>
+        <a:xfrm>
+          <a:off x="0" y="0"/>
+          <a:ext cx="0" cy="0"/>
+          <a:chOff x="0" y="0"/>
+          <a:chExt cx="0" cy="0"/>
+        </a:xfrm>
+      </p:grpSpPr>
+      <p:pic>
+        <p:nvPicPr>
+          <p:cNvPr id="15" name="Picture 14" descr="C2-HD-BTM.png"/>
+          <p:cNvPicPr>
+            <a:picLocks noChangeAspect="1"/>
+          </p:cNvPicPr>
+          <p:nvPr/>
+        </p:nvPicPr>
+        <p:blipFill>
+          <a:blip r:embed="rId2">
+            <a:extLst>
+              <a:ext uri="{28A0092B-C50C-407E-A947-70E740481C1C}">
+                <a14:useLocalDpi xmlns:a14="http://schemas.microsoft.com/office/drawing/2010/main" val="0"/>
+              </a:ext>
+            </a:extLst>
+          </a:blip>
+          <a:stretch>
+            <a:fillRect/>
+          </a:stretch>
+        </p:blipFill>
+        <p:spPr>
+          <a:xfrm>
+            <a:off x="0" y="4995862"/>
+            <a:ext cx="9144000" cy="1862138"/>
+          </a:xfrm>
+          <a:prstGeom prst="rect">
+            <a:avLst/>
+          </a:prstGeom>
+        </p:spPr>
+      </p:pic>
+      <p:sp>
+        <p:nvSpPr>
+          <p:cNvPr id="2" name="Title 1"/>
+          <p:cNvSpPr>
+            <a:spLocks noGrp="1"/>
+          </p:cNvSpPr>
+          <p:nvPr>
+            <p:ph type="title"/>
+          </p:nvPr>
+        </p:nvSpPr>
+        <p:spPr>
+          <a:xfrm>
+            <a:off x="768351" y="753534"/>
+            <a:ext cx="7613650" cy="2756234"/>
+          </a:xfrm>
+        </p:spPr>
+        <p:txBody>
+          <a:bodyPr anchor="ctr"/>
+          <a:lstStyle>
+            <a:lvl1pPr algn="l">
+              <a:defRPr sz="3200"/>
+            </a:lvl1pPr>
+          </a:lstStyle>
+          <a:p>
+            <a:r>
+              <a:rPr lang="en-US"/>
+              <a:t>Click to edit Master title style</a:t>
+            </a:r>
+            <a:endParaRPr lang="en-US" dirty="0"/>
+          </a:p>
+        </p:txBody>
+      </p:sp>
+      <p:sp>
+        <p:nvSpPr>
+          <p:cNvPr id="12" name="Text Placeholder 3"/>
+          <p:cNvSpPr>
+            <a:spLocks noGrp="1"/>
+          </p:cNvSpPr>
+          <p:nvPr>
+            <p:ph type="body" sz="half" idx="13"/>
+          </p:nvPr>
+        </p:nvSpPr>
+        <p:spPr>
+          <a:xfrm>
+            <a:off x="977899" y="3509768"/>
+            <a:ext cx="7194552" cy="444443"/>
+          </a:xfrm>
+        </p:spPr>
+        <p:txBody>
+          <a:bodyPr anchor="t">
+            <a:normAutofit/>
+          </a:bodyPr>
+          <a:lstStyle>
+            <a:lvl1pPr marL="0" indent="0">
+              <a:buNone/>
+              <a:defRPr sz="1400"/>
+            </a:lvl1pPr>
+            <a:lvl2pPr marL="457200" indent="0">
+              <a:buNone/>
+              <a:defRPr sz="1400"/>
+            </a:lvl2pPr>
+            <a:lvl3pPr marL="914400" indent="0">
+              <a:buNone/>
+              <a:defRPr sz="1200"/>
+            </a:lvl3pPr>
+            <a:lvl4pPr marL="1371600" indent="0">
+              <a:buNone/>
+              <a:defRPr sz="1000"/>
+            </a:lvl4pPr>
+            <a:lvl5pPr marL="1828800" indent="0">
+              <a:buNone/>
+              <a:defRPr sz="1000"/>
+            </a:lvl5pPr>
+            <a:lvl6pPr marL="2286000" indent="0">
+              <a:buNone/>
+              <a:defRPr sz="1000"/>
+            </a:lvl6pPr>
+            <a:lvl7pPr marL="2743200" indent="0">
+              <a:buNone/>
+              <a:defRPr sz="1000"/>
+            </a:lvl7pPr>
+            <a:lvl8pPr marL="3200400" indent="0">
+              <a:buNone/>
+              <a:defRPr sz="1000"/>
+            </a:lvl8pPr>
+            <a:lvl9pPr marL="3657600" indent="0">
+              <a:buNone/>
+              <a:defRPr sz="1000"/>
+            </a:lvl9pPr>
+          </a:lstStyle>
+          <a:p>
+            <a:pPr lvl="0"/>
+            <a:r>
+              <a:rPr lang="en-US"/>
+              <a:t>Click to edit Master text styles</a:t>
+            </a:r>
+          </a:p>
+        </p:txBody>
+      </p:sp>
+      <p:sp>
+        <p:nvSpPr>
+          <p:cNvPr id="4" name="Text Placeholder 3"/>
+          <p:cNvSpPr>
+            <a:spLocks noGrp="1"/>
+          </p:cNvSpPr>
+          <p:nvPr>
+            <p:ph type="body" sz="half" idx="2"/>
+          </p:nvPr>
+        </p:nvSpPr>
+        <p:spPr>
+          <a:xfrm>
+            <a:off x="685800" y="4174597"/>
+            <a:ext cx="7778752" cy="821265"/>
+          </a:xfrm>
+        </p:spPr>
+        <p:txBody>
+          <a:bodyPr anchor="ctr">
+            <a:normAutofit/>
+          </a:bodyPr>
+          <a:lstStyle>
+            <a:lvl1pPr marL="0" indent="0">
+              <a:buNone/>
+              <a:defRPr sz="1600"/>
+            </a:lvl1pPr>
+            <a:lvl2pPr marL="457200" indent="0">
+              <a:buNone/>
+              <a:defRPr sz="1400"/>
+            </a:lvl2pPr>
+            <a:lvl3pPr marL="914400" indent="0">
+              <a:buNone/>
+              <a:defRPr sz="1200"/>
+            </a:lvl3pPr>
+            <a:lvl4pPr marL="1371600" indent="0">
+              <a:buNone/>
+              <a:defRPr sz="1000"/>
+            </a:lvl4pPr>
+            <a:lvl5pPr marL="1828800" indent="0">
+              <a:buNone/>
+              <a:defRPr sz="1000"/>
+            </a:lvl5pPr>
+            <a:lvl6pPr marL="2286000" indent="0">
+              <a:buNone/>
+              <a:defRPr sz="1000"/>
+            </a:lvl6pPr>
+            <a:lvl7pPr marL="2743200" indent="0">
+              <a:buNone/>
+              <a:defRPr sz="1000"/>
+            </a:lvl7pPr>
+            <a:lvl8pPr marL="3200400" indent="0">
+              <a:buNone/>
+              <a:defRPr sz="1000"/>
+            </a:lvl8pPr>
+            <a:lvl9pPr marL="3657600" indent="0">
+              <a:buNone/>
+              <a:defRPr sz="1000"/>
+            </a:lvl9pPr>
+          </a:lstStyle>
+          <a:p>
+            <a:pPr lvl="0"/>
+            <a:r>
+              <a:rPr lang="en-US"/>
+              <a:t>Click to edit Master text styles</a:t>
+            </a:r>
+          </a:p>
+        </p:txBody>
+      </p:sp>
+      <p:sp>
+        <p:nvSpPr>
+          <p:cNvPr id="5" name="Date Placeholder 4"/>
+          <p:cNvSpPr>
+            <a:spLocks noGrp="1"/>
+          </p:cNvSpPr>
+          <p:nvPr>
+            <p:ph type="dt" sz="half" idx="10"/>
+          </p:nvPr>
+        </p:nvSpPr>
+        <p:spPr>
+          <a:xfrm>
+            <a:off x="5562176" y="381001"/>
+            <a:ext cx="2183130" cy="365125"/>
+          </a:xfrm>
+        </p:spPr>
+        <p:txBody>
+          <a:bodyPr/>
+          <a:lstStyle>
+            <a:lvl1pPr algn="r">
+              <a:defRPr/>
+            </a:lvl1pPr>
+          </a:lstStyle>
+          <a:p>
+            <a:fld id="{5BCAD085-E8A6-8845-BD4E-CB4CCA059FC4}" type="datetimeFigureOut">
+              <a:rPr lang="en-US" smtClean="0"/>
+              <a:t>5/11/2026</a:t>
+            </a:fld>
+            <a:endParaRPr lang="en-US"/>
+          </a:p>
+        </p:txBody>
+      </p:sp>
+      <p:sp>
+        <p:nvSpPr>
+          <p:cNvPr id="6" name="Footer Placeholder 5"/>
+          <p:cNvSpPr>
+            <a:spLocks noGrp="1"/>
+          </p:cNvSpPr>
+          <p:nvPr>
+            <p:ph type="ftr" sz="quarter" idx="11"/>
+          </p:nvPr>
+        </p:nvSpPr>
+        <p:spPr>
+          <a:xfrm>
+            <a:off x="594360" y="379438"/>
+            <a:ext cx="4830656" cy="365125"/>
+          </a:xfrm>
+        </p:spPr>
+        <p:txBody>
+          <a:bodyPr/>
+          <a:lstStyle/>
+          <a:p>
+            <a:endParaRPr lang="en-US"/>
+          </a:p>
+        </p:txBody>
+      </p:sp>
+      <p:sp>
+        <p:nvSpPr>
+          <p:cNvPr id="7" name="Slide Number Placeholder 6"/>
+          <p:cNvSpPr>
+            <a:spLocks noGrp="1"/>
+          </p:cNvSpPr>
+          <p:nvPr>
+            <p:ph type="sldNum" sz="quarter" idx="12"/>
+          </p:nvPr>
+        </p:nvSpPr>
+        <p:spPr>
+          <a:xfrm>
+            <a:off x="7882466" y="381001"/>
+            <a:ext cx="667174" cy="365125"/>
+          </a:xfrm>
+        </p:spPr>
+        <p:txBody>
+          <a:bodyPr/>
+          <a:lstStyle/>
+          <a:p>
+            <a:fld id="{C1FF6DA9-008F-8B48-92A6-B652298478BF}" type="slidenum">
+              <a:rPr lang="en-US" smtClean="0"/>
+              <a:t>‹#›</a:t>
+            </a:fld>
+            <a:endParaRPr lang="en-US"/>
+          </a:p>
+        </p:txBody>
+      </p:sp>
+      <p:sp>
+        <p:nvSpPr>
+          <p:cNvPr id="13" name="TextBox 12"/>
+          <p:cNvSpPr txBox="1"/>
+          <p:nvPr/>
+        </p:nvSpPr>
+        <p:spPr>
+          <a:xfrm>
+            <a:off x="231458" y="807720"/>
+            <a:ext cx="457200" cy="584776"/>
+          </a:xfrm>
+          <a:prstGeom prst="rect">
+            <a:avLst/>
+          </a:prstGeom>
+        </p:spPr>
+        <p:txBody>
+          <a:bodyPr vert="horz" lIns="91440" tIns="45720" rIns="91440" bIns="45720" rtlCol="0" anchor="ctr">
+            <a:noAutofit/>
+          </a:bodyPr>
+          <a:lstStyle>
+            <a:lvl1pPr>
+              <a:spcBef>
+                <a:spcPct val="0"/>
+              </a:spcBef>
+              <a:buNone/>
+              <a:defRPr sz="3200" b="0" cap="all">
+                <a:ln w="3175" cmpd="sng">
+                  <a:noFill/>
+                </a:ln>
+                <a:effectLst>
+                  <a:glow rad="38100">
+                    <a:schemeClr val="bg1">
+                      <a:lumMod val="65000"/>
+                      <a:lumOff val="35000"/>
+                      <a:alpha val="40000"/>
+                    </a:schemeClr>
+                  </a:glow>
+                  <a:outerShdw blurRad="28575" dist="38100" dir="14040000" algn="tl" rotWithShape="0">
+                    <a:srgbClr val="000000">
+                      <a:alpha val="25000"/>
+                    </a:srgbClr>
+                  </a:outerShdw>
+                </a:effectLst>
+              </a:defRPr>
+            </a:lvl1pPr>
+            <a:lvl2pPr>
+              <a:defRPr>
+                <a:solidFill>
+                  <a:schemeClr val="tx2"/>
+                </a:solidFill>
+              </a:defRPr>
+            </a:lvl2pPr>
+            <a:lvl3pPr>
+              <a:defRPr>
+                <a:solidFill>
+                  <a:schemeClr val="tx2"/>
+                </a:solidFill>
+              </a:defRPr>
+            </a:lvl3pPr>
+            <a:lvl4pPr>
+              <a:defRPr>
+                <a:solidFill>
+                  <a:schemeClr val="tx2"/>
+                </a:solidFill>
+              </a:defRPr>
+            </a:lvl4pPr>
+            <a:lvl5pPr>
+              <a:defRPr>
+                <a:solidFill>
+                  <a:schemeClr val="tx2"/>
+                </a:solidFill>
+              </a:defRPr>
+            </a:lvl5pPr>
+            <a:lvl6pPr>
+              <a:defRPr>
+                <a:solidFill>
+                  <a:schemeClr val="tx2"/>
+                </a:solidFill>
+              </a:defRPr>
+            </a:lvl6pPr>
+            <a:lvl7pPr>
+              <a:defRPr>
+                <a:solidFill>
+                  <a:schemeClr val="tx2"/>
+                </a:solidFill>
+              </a:defRPr>
+            </a:lvl7pPr>
+            <a:lvl8pPr>
+              <a:defRPr>
+                <a:solidFill>
+                  <a:schemeClr val="tx2"/>
+                </a:solidFill>
+              </a:defRPr>
+            </a:lvl8pPr>
+            <a:lvl9pPr>
+              <a:defRPr>
+                <a:solidFill>
+                  <a:schemeClr val="tx2"/>
+                </a:solidFill>
+              </a:defRPr>
+            </a:lvl9pPr>
+          </a:lstStyle>
+          <a:p>
+            <a:pPr lvl="0"/>
+            <a:r>
+              <a:rPr lang="en-US" sz="8000" dirty="0">
+                <a:solidFill>
+                  <a:schemeClr val="tx1"/>
+                </a:solidFill>
+                <a:effectLst/>
+              </a:rPr>
+              <a:t>“</a:t>
+            </a:r>
+          </a:p>
+        </p:txBody>
+      </p:sp>
+      <p:sp>
+        <p:nvSpPr>
+          <p:cNvPr id="14" name="TextBox 13"/>
+          <p:cNvSpPr txBox="1"/>
+          <p:nvPr/>
+        </p:nvSpPr>
+        <p:spPr>
+          <a:xfrm>
+            <a:off x="8146733" y="3021330"/>
+            <a:ext cx="457200" cy="584776"/>
+          </a:xfrm>
+          <a:prstGeom prst="rect">
+            <a:avLst/>
+          </a:prstGeom>
+        </p:spPr>
+        <p:txBody>
+          <a:bodyPr vert="horz" lIns="91440" tIns="45720" rIns="91440" bIns="45720" rtlCol="0" anchor="ctr">
+            <a:noAutofit/>
+          </a:bodyPr>
+          <a:lstStyle>
+            <a:lvl1pPr>
+              <a:spcBef>
+                <a:spcPct val="0"/>
+              </a:spcBef>
+              <a:buNone/>
+              <a:defRPr sz="3200" b="0" cap="all">
+                <a:ln w="3175" cmpd="sng">
+                  <a:noFill/>
+                </a:ln>
+                <a:effectLst>
+                  <a:glow rad="38100">
+                    <a:schemeClr val="bg1">
+                      <a:lumMod val="65000"/>
+                      <a:lumOff val="35000"/>
+                      <a:alpha val="40000"/>
+                    </a:schemeClr>
+                  </a:glow>
+                  <a:outerShdw blurRad="28575" dist="38100" dir="14040000" algn="tl" rotWithShape="0">
+                    <a:srgbClr val="000000">
+                      <a:alpha val="25000"/>
+                    </a:srgbClr>
+                  </a:outerShdw>
+                </a:effectLst>
+              </a:defRPr>
+            </a:lvl1pPr>
+            <a:lvl2pPr>
+              <a:defRPr>
+                <a:solidFill>
+                  <a:schemeClr val="tx2"/>
+                </a:solidFill>
+              </a:defRPr>
+            </a:lvl2pPr>
+            <a:lvl3pPr>
+              <a:defRPr>
+                <a:solidFill>
+                  <a:schemeClr val="tx2"/>
+                </a:solidFill>
+              </a:defRPr>
+            </a:lvl3pPr>
+            <a:lvl4pPr>
+              <a:defRPr>
+                <a:solidFill>
+                  <a:schemeClr val="tx2"/>
+                </a:solidFill>
+              </a:defRPr>
+            </a:lvl4pPr>
+            <a:lvl5pPr>
+              <a:defRPr>
+                <a:solidFill>
+                  <a:schemeClr val="tx2"/>
+                </a:solidFill>
+              </a:defRPr>
+            </a:lvl5pPr>
+            <a:lvl6pPr>
+              <a:defRPr>
+                <a:solidFill>
+                  <a:schemeClr val="tx2"/>
+                </a:solidFill>
+              </a:defRPr>
+            </a:lvl6pPr>
+            <a:lvl7pPr>
+              <a:defRPr>
+                <a:solidFill>
+                  <a:schemeClr val="tx2"/>
+                </a:solidFill>
+              </a:defRPr>
+            </a:lvl7pPr>
+            <a:lvl8pPr>
+              <a:defRPr>
+                <a:solidFill>
+                  <a:schemeClr val="tx2"/>
+                </a:solidFill>
+              </a:defRPr>
+            </a:lvl8pPr>
+            <a:lvl9pPr>
+              <a:defRPr>
+                <a:solidFill>
+                  <a:schemeClr val="tx2"/>
+                </a:solidFill>
+              </a:defRPr>
+            </a:lvl9pPr>
+          </a:lstStyle>
+          <a:p>
+            <a:pPr lvl="0" algn="r"/>
+            <a:r>
+              <a:rPr lang="en-US" sz="8000" dirty="0">
+                <a:solidFill>
+                  <a:schemeClr val="tx1"/>
+                </a:solidFill>
+                <a:effectLst/>
+              </a:rPr>
+              <a:t>”</a:t>
+            </a:r>
+          </a:p>
+        </p:txBody>
+      </p:sp>
+    </p:spTree>
+    <p:extLst>
+      <p:ext uri="{BB962C8B-B14F-4D97-AF65-F5344CB8AC3E}">
+        <p14:creationId xmlns:p14="http://schemas.microsoft.com/office/powerpoint/2010/main" val="2053452315"/>
+      </p:ext>
+    </p:extLst>
+  </p:cSld>
+  <p:clrMapOvr>
+    <a:masterClrMapping/>
+  </p:clrMapOvr>
+</p:sldLayout>
+</file>
+
+<file path=ppt/slideLayouts/slideLayout13.xml><?xml version="1.0" encoding="utf-8"?>
+<p:sldLayout xmlns:a="http://schemas.openxmlformats.org/drawingml/2006/main" xmlns:r="http://schemas.openxmlformats.org/officeDocument/2006/relationships" xmlns:p="http://schemas.openxmlformats.org/presentationml/2006/main" showMasterSp="0" preserve="1">
+  <p:cSld name="Name Card">
+    <p:spTree>
+      <p:nvGrpSpPr>
+        <p:cNvPr id="1" name=""/>
+        <p:cNvGrpSpPr/>
+        <p:nvPr/>
+      </p:nvGrpSpPr>
+      <p:grpSpPr>
+        <a:xfrm>
+          <a:off x="0" y="0"/>
+          <a:ext cx="0" cy="0"/>
+          <a:chOff x="0" y="0"/>
+          <a:chExt cx="0" cy="0"/>
+        </a:xfrm>
+      </p:grpSpPr>
+      <p:pic>
+        <p:nvPicPr>
+          <p:cNvPr id="9" name="Picture 8" descr="C2-HD-BTM.png"/>
+          <p:cNvPicPr>
+            <a:picLocks noChangeAspect="1"/>
+          </p:cNvPicPr>
+          <p:nvPr/>
+        </p:nvPicPr>
+        <p:blipFill>
+          <a:blip r:embed="rId2">
+            <a:extLst>
+              <a:ext uri="{28A0092B-C50C-407E-A947-70E740481C1C}">
+                <a14:useLocalDpi xmlns:a14="http://schemas.microsoft.com/office/drawing/2010/main" val="0"/>
+              </a:ext>
+            </a:extLst>
+          </a:blip>
+          <a:stretch>
+            <a:fillRect/>
+          </a:stretch>
+        </p:blipFill>
+        <p:spPr>
+          <a:xfrm>
+            <a:off x="0" y="4995862"/>
+            <a:ext cx="9144000" cy="1862138"/>
+          </a:xfrm>
+          <a:prstGeom prst="rect">
+            <a:avLst/>
+          </a:prstGeom>
+        </p:spPr>
+      </p:pic>
+      <p:sp>
+        <p:nvSpPr>
+          <p:cNvPr id="2" name="Title 1"/>
+          <p:cNvSpPr>
+            <a:spLocks noGrp="1"/>
+          </p:cNvSpPr>
+          <p:nvPr>
+            <p:ph type="title"/>
+          </p:nvPr>
+        </p:nvSpPr>
+        <p:spPr>
+          <a:xfrm>
+            <a:off x="685800" y="1124702"/>
+            <a:ext cx="7774782" cy="2511835"/>
+          </a:xfrm>
+        </p:spPr>
+        <p:txBody>
+          <a:bodyPr anchor="b"/>
+          <a:lstStyle>
+            <a:lvl1pPr algn="l">
+              <a:defRPr sz="3200"/>
+            </a:lvl1pPr>
+          </a:lstStyle>
+          <a:p>
+            <a:r>
+              <a:rPr lang="en-US"/>
+              <a:t>Click to edit Master title style</a:t>
+            </a:r>
+            <a:endParaRPr lang="en-US" dirty="0"/>
+          </a:p>
+        </p:txBody>
+      </p:sp>
+      <p:sp>
+        <p:nvSpPr>
+          <p:cNvPr id="4" name="Text Placeholder 3"/>
+          <p:cNvSpPr>
+            <a:spLocks noGrp="1"/>
+          </p:cNvSpPr>
+          <p:nvPr>
+            <p:ph type="body" sz="half" idx="2"/>
+          </p:nvPr>
+        </p:nvSpPr>
+        <p:spPr>
+          <a:xfrm>
+            <a:off x="685792" y="3648316"/>
+            <a:ext cx="7773608" cy="999885"/>
+          </a:xfrm>
+        </p:spPr>
+        <p:txBody>
+          <a:bodyPr anchor="t"/>
+          <a:lstStyle>
+            <a:lvl1pPr marL="0" indent="0">
+              <a:buNone/>
+              <a:defRPr sz="1600"/>
+            </a:lvl1pPr>
+            <a:lvl2pPr marL="457200" indent="0">
+              <a:buNone/>
+              <a:defRPr sz="1400"/>
+            </a:lvl2pPr>
+            <a:lvl3pPr marL="914400" indent="0">
+              <a:buNone/>
+              <a:defRPr sz="1200"/>
+            </a:lvl3pPr>
+            <a:lvl4pPr marL="1371600" indent="0">
+              <a:buNone/>
+              <a:defRPr sz="1000"/>
+            </a:lvl4pPr>
+            <a:lvl5pPr marL="1828800" indent="0">
+              <a:buNone/>
+              <a:defRPr sz="1000"/>
+            </a:lvl5pPr>
+            <a:lvl6pPr marL="2286000" indent="0">
+              <a:buNone/>
+              <a:defRPr sz="1000"/>
+            </a:lvl6pPr>
+            <a:lvl7pPr marL="2743200" indent="0">
+              <a:buNone/>
+              <a:defRPr sz="1000"/>
+            </a:lvl7pPr>
+            <a:lvl8pPr marL="3200400" indent="0">
+              <a:buNone/>
+              <a:defRPr sz="1000"/>
+            </a:lvl8pPr>
+            <a:lvl9pPr marL="3657600" indent="0">
+              <a:buNone/>
+              <a:defRPr sz="1000"/>
+            </a:lvl9pPr>
+          </a:lstStyle>
+          <a:p>
+            <a:pPr lvl="0"/>
+            <a:r>
+              <a:rPr lang="en-US"/>
+              <a:t>Click to edit Master text styles</a:t>
+            </a:r>
+          </a:p>
+        </p:txBody>
+      </p:sp>
+      <p:sp>
+        <p:nvSpPr>
+          <p:cNvPr id="5" name="Date Placeholder 4"/>
+          <p:cNvSpPr>
+            <a:spLocks noGrp="1"/>
+          </p:cNvSpPr>
+          <p:nvPr>
+            <p:ph type="dt" sz="half" idx="10"/>
+          </p:nvPr>
+        </p:nvSpPr>
+        <p:spPr>
+          <a:xfrm>
+            <a:off x="5562176" y="378884"/>
+            <a:ext cx="2183130" cy="365125"/>
+          </a:xfrm>
+        </p:spPr>
+        <p:txBody>
+          <a:bodyPr/>
+          <a:lstStyle>
+            <a:lvl1pPr algn="r">
+              <a:defRPr/>
+            </a:lvl1pPr>
+          </a:lstStyle>
+          <a:p>
+            <a:fld id="{5BCAD085-E8A6-8845-BD4E-CB4CCA059FC4}" type="datetimeFigureOut">
+              <a:rPr lang="en-US" smtClean="0"/>
+              <a:t>5/11/2026</a:t>
+            </a:fld>
+            <a:endParaRPr lang="en-US"/>
+          </a:p>
+        </p:txBody>
+      </p:sp>
+      <p:sp>
+        <p:nvSpPr>
+          <p:cNvPr id="6" name="Footer Placeholder 5"/>
+          <p:cNvSpPr>
+            <a:spLocks noGrp="1"/>
+          </p:cNvSpPr>
+          <p:nvPr>
+            <p:ph type="ftr" sz="quarter" idx="11"/>
+          </p:nvPr>
+        </p:nvSpPr>
+        <p:spPr>
+          <a:xfrm>
+            <a:off x="594360" y="378884"/>
+            <a:ext cx="4830656" cy="365125"/>
+          </a:xfrm>
+        </p:spPr>
+        <p:txBody>
+          <a:bodyPr/>
+          <a:lstStyle/>
+          <a:p>
+            <a:endParaRPr lang="en-US"/>
+          </a:p>
+        </p:txBody>
+      </p:sp>
+      <p:sp>
+        <p:nvSpPr>
+          <p:cNvPr id="7" name="Slide Number Placeholder 6"/>
+          <p:cNvSpPr>
+            <a:spLocks noGrp="1"/>
+          </p:cNvSpPr>
+          <p:nvPr>
+            <p:ph type="sldNum" sz="quarter" idx="12"/>
+          </p:nvPr>
+        </p:nvSpPr>
+        <p:spPr>
+          <a:xfrm>
+            <a:off x="7882466" y="381001"/>
+            <a:ext cx="667174" cy="365125"/>
+          </a:xfrm>
+        </p:spPr>
+        <p:txBody>
+          <a:bodyPr/>
+          <a:lstStyle/>
+          <a:p>
+            <a:fld id="{C1FF6DA9-008F-8B48-92A6-B652298478BF}" type="slidenum">
+              <a:rPr lang="en-US" smtClean="0"/>
+              <a:t>‹#›</a:t>
+            </a:fld>
+            <a:endParaRPr lang="en-US"/>
+          </a:p>
+        </p:txBody>
+      </p:sp>
+    </p:spTree>
+    <p:extLst>
+      <p:ext uri="{BB962C8B-B14F-4D97-AF65-F5344CB8AC3E}">
+        <p14:creationId xmlns:p14="http://schemas.microsoft.com/office/powerpoint/2010/main" val="453242015"/>
+      </p:ext>
+    </p:extLst>
+  </p:cSld>
+  <p:clrMapOvr>
+    <a:masterClrMapping/>
+  </p:clrMapOvr>
+</p:sldLayout>
+</file>
+
+<file path=ppt/slideLayouts/slideLayout14.xml><?xml version="1.0" encoding="utf-8"?>
+<p:sldLayout xmlns:a="http://schemas.openxmlformats.org/drawingml/2006/main" xmlns:r="http://schemas.openxmlformats.org/officeDocument/2006/relationships" xmlns:p="http://schemas.openxmlformats.org/presentationml/2006/main" preserve="1">
+  <p:cSld name="3 Column">
+    <p:spTree>
+      <p:nvGrpSpPr>
+        <p:cNvPr id="1" name=""/>
+        <p:cNvGrpSpPr/>
+        <p:nvPr/>
+      </p:nvGrpSpPr>
+      <p:grpSpPr>
+        <a:xfrm>
+          <a:off x="0" y="0"/>
+          <a:ext cx="0" cy="0"/>
+          <a:chOff x="0" y="0"/>
+          <a:chExt cx="0" cy="0"/>
+        </a:xfrm>
+      </p:grpSpPr>
+      <p:sp>
+        <p:nvSpPr>
+          <p:cNvPr id="15" name="Title 1"/>
+          <p:cNvSpPr>
+            <a:spLocks noGrp="1"/>
+          </p:cNvSpPr>
+          <p:nvPr>
+            <p:ph type="title"/>
+          </p:nvPr>
+        </p:nvSpPr>
+        <p:spPr>
+          <a:xfrm>
+            <a:off x="2171701" y="762000"/>
+            <a:ext cx="6377939" cy="1303867"/>
+          </a:xfrm>
+        </p:spPr>
+        <p:txBody>
+          <a:bodyPr/>
+          <a:lstStyle/>
+          <a:p>
+            <a:r>
+              <a:rPr lang="en-US"/>
+              <a:t>Click to edit Master title style</a:t>
+            </a:r>
+            <a:endParaRPr lang="en-US" dirty="0"/>
+          </a:p>
+        </p:txBody>
+      </p:sp>
+      <p:sp>
+        <p:nvSpPr>
+          <p:cNvPr id="7" name="Text Placeholder 2"/>
+          <p:cNvSpPr>
+            <a:spLocks noGrp="1"/>
+          </p:cNvSpPr>
+          <p:nvPr>
+            <p:ph type="body" idx="1"/>
+          </p:nvPr>
+        </p:nvSpPr>
+        <p:spPr>
+          <a:xfrm>
+            <a:off x="594361" y="2202080"/>
+            <a:ext cx="2560320" cy="617320"/>
+          </a:xfrm>
+        </p:spPr>
+        <p:txBody>
+          <a:bodyPr anchor="b">
+            <a:noAutofit/>
+          </a:bodyPr>
+          <a:lstStyle>
+            <a:lvl1pPr marL="0" indent="0">
+              <a:buNone/>
+              <a:defRPr sz="2400" b="0">
+                <a:solidFill>
+                  <a:schemeClr val="tx1"/>
+                </a:solidFill>
+              </a:defRPr>
+            </a:lvl1pPr>
+            <a:lvl2pPr marL="457200" indent="0">
+              <a:buNone/>
+              <a:defRPr sz="2000" b="1"/>
+            </a:lvl2pPr>
+            <a:lvl3pPr marL="914400" indent="0">
+              <a:buNone/>
+              <a:defRPr sz="1800" b="1"/>
+            </a:lvl3pPr>
+            <a:lvl4pPr marL="1371600" indent="0">
+              <a:buNone/>
+              <a:defRPr sz="1600" b="1"/>
+            </a:lvl4pPr>
+            <a:lvl5pPr marL="1828800" indent="0">
+              <a:buNone/>
+              <a:defRPr sz="1600" b="1"/>
+            </a:lvl5pPr>
+            <a:lvl6pPr marL="2286000" indent="0">
+              <a:buNone/>
+              <a:defRPr sz="1600" b="1"/>
+            </a:lvl6pPr>
+            <a:lvl7pPr marL="2743200" indent="0">
+              <a:buNone/>
+              <a:defRPr sz="1600" b="1"/>
+            </a:lvl7pPr>
+            <a:lvl8pPr marL="3200400" indent="0">
+              <a:buNone/>
+              <a:defRPr sz="1600" b="1"/>
+            </a:lvl8pPr>
+            <a:lvl9pPr marL="3657600" indent="0">
+              <a:buNone/>
+              <a:defRPr sz="1600" b="1"/>
+            </a:lvl9pPr>
+          </a:lstStyle>
+          <a:p>
+            <a:pPr lvl="0"/>
+            <a:r>
+              <a:rPr lang="en-US"/>
+              <a:t>Click to edit Master text styles</a:t>
+            </a:r>
+          </a:p>
+        </p:txBody>
+      </p:sp>
+      <p:sp>
+        <p:nvSpPr>
+          <p:cNvPr id="8" name="Text Placeholder 3"/>
+          <p:cNvSpPr>
+            <a:spLocks noGrp="1"/>
+          </p:cNvSpPr>
+          <p:nvPr>
+            <p:ph type="body" sz="half" idx="15"/>
+          </p:nvPr>
+        </p:nvSpPr>
+        <p:spPr>
+          <a:xfrm>
+            <a:off x="594360" y="2904564"/>
+            <a:ext cx="2560320" cy="3359079"/>
+          </a:xfrm>
+        </p:spPr>
+        <p:txBody>
+          <a:bodyPr anchor="t">
+            <a:normAutofit/>
+          </a:bodyPr>
+          <a:lstStyle>
+            <a:lvl1pPr marL="0" indent="0">
+              <a:buNone/>
+              <a:defRPr sz="1400"/>
+            </a:lvl1pPr>
+            <a:lvl2pPr marL="457200" indent="0">
+              <a:buNone/>
+              <a:defRPr sz="1200"/>
+            </a:lvl2pPr>
+            <a:lvl3pPr marL="914400" indent="0">
+              <a:buNone/>
+              <a:defRPr sz="1000"/>
+            </a:lvl3pPr>
+            <a:lvl4pPr marL="1371600" indent="0">
+              <a:buNone/>
+              <a:defRPr sz="900"/>
+            </a:lvl4pPr>
+            <a:lvl5pPr marL="1828800" indent="0">
+              <a:buNone/>
+              <a:defRPr sz="900"/>
+            </a:lvl5pPr>
+            <a:lvl6pPr marL="2286000" indent="0">
+              <a:buNone/>
+              <a:defRPr sz="900"/>
+            </a:lvl6pPr>
+            <a:lvl7pPr marL="2743200" indent="0">
+              <a:buNone/>
+              <a:defRPr sz="900"/>
+            </a:lvl7pPr>
+            <a:lvl8pPr marL="3200400" indent="0">
+              <a:buNone/>
+              <a:defRPr sz="900"/>
+            </a:lvl8pPr>
+            <a:lvl9pPr marL="3657600" indent="0">
+              <a:buNone/>
+              <a:defRPr sz="900"/>
+            </a:lvl9pPr>
+          </a:lstStyle>
+          <a:p>
+            <a:pPr lvl="0"/>
+            <a:r>
+              <a:rPr lang="en-US"/>
+              <a:t>Click to edit Master text styles</a:t>
+            </a:r>
+          </a:p>
+        </p:txBody>
+      </p:sp>
+      <p:sp>
+        <p:nvSpPr>
+          <p:cNvPr id="9" name="Text Placeholder 4"/>
+          <p:cNvSpPr>
+            <a:spLocks noGrp="1"/>
+          </p:cNvSpPr>
+          <p:nvPr>
+            <p:ph type="body" sz="quarter" idx="3"/>
+          </p:nvPr>
+        </p:nvSpPr>
+        <p:spPr>
+          <a:xfrm>
+            <a:off x="3302237" y="2201333"/>
+            <a:ext cx="2560320" cy="626534"/>
+          </a:xfrm>
+        </p:spPr>
+        <p:txBody>
+          <a:bodyPr anchor="b">
+            <a:noAutofit/>
+          </a:bodyPr>
+          <a:lstStyle>
+            <a:lvl1pPr marL="0" indent="0">
+              <a:buNone/>
+              <a:defRPr sz="2400" b="0">
+                <a:solidFill>
+                  <a:schemeClr val="tx1"/>
+                </a:solidFill>
+              </a:defRPr>
+            </a:lvl1pPr>
+            <a:lvl2pPr marL="457200" indent="0">
+              <a:buNone/>
+              <a:defRPr sz="2000" b="1"/>
+            </a:lvl2pPr>
+            <a:lvl3pPr marL="914400" indent="0">
+              <a:buNone/>
+              <a:defRPr sz="1800" b="1"/>
+            </a:lvl3pPr>
+            <a:lvl4pPr marL="1371600" indent="0">
+              <a:buNone/>
+              <a:defRPr sz="1600" b="1"/>
+            </a:lvl4pPr>
+            <a:lvl5pPr marL="1828800" indent="0">
+              <a:buNone/>
+              <a:defRPr sz="1600" b="1"/>
+            </a:lvl5pPr>
+            <a:lvl6pPr marL="2286000" indent="0">
+              <a:buNone/>
+              <a:defRPr sz="1600" b="1"/>
+            </a:lvl6pPr>
+            <a:lvl7pPr marL="2743200" indent="0">
+              <a:buNone/>
+              <a:defRPr sz="1600" b="1"/>
+            </a:lvl7pPr>
+            <a:lvl8pPr marL="3200400" indent="0">
+              <a:buNone/>
+              <a:defRPr sz="1600" b="1"/>
+            </a:lvl8pPr>
+            <a:lvl9pPr marL="3657600" indent="0">
+              <a:buNone/>
+              <a:defRPr sz="1600" b="1"/>
+            </a:lvl9pPr>
+          </a:lstStyle>
+          <a:p>
+            <a:pPr lvl="0"/>
+            <a:r>
+              <a:rPr lang="en-US"/>
+              <a:t>Click to edit Master text styles</a:t>
+            </a:r>
+          </a:p>
+        </p:txBody>
+      </p:sp>
+      <p:sp>
+        <p:nvSpPr>
+          <p:cNvPr id="10" name="Text Placeholder 3"/>
+          <p:cNvSpPr>
+            <a:spLocks noGrp="1"/>
+          </p:cNvSpPr>
+          <p:nvPr>
+            <p:ph type="body" sz="half" idx="16"/>
+          </p:nvPr>
+        </p:nvSpPr>
+        <p:spPr>
+          <a:xfrm>
+            <a:off x="3300781" y="2904068"/>
+            <a:ext cx="2560320" cy="3359572"/>
+          </a:xfrm>
+        </p:spPr>
+        <p:txBody>
+          <a:bodyPr anchor="t">
+            <a:normAutofit/>
+          </a:bodyPr>
+          <a:lstStyle>
+            <a:lvl1pPr marL="0" indent="0">
+              <a:buNone/>
+              <a:defRPr sz="1400"/>
+            </a:lvl1pPr>
+            <a:lvl2pPr marL="457200" indent="0">
+              <a:buNone/>
+              <a:defRPr sz="1200"/>
+            </a:lvl2pPr>
+            <a:lvl3pPr marL="914400" indent="0">
+              <a:buNone/>
+              <a:defRPr sz="1000"/>
+            </a:lvl3pPr>
+            <a:lvl4pPr marL="1371600" indent="0">
+              <a:buNone/>
+              <a:defRPr sz="900"/>
+            </a:lvl4pPr>
+            <a:lvl5pPr marL="1828800" indent="0">
+              <a:buNone/>
+              <a:defRPr sz="900"/>
+            </a:lvl5pPr>
+            <a:lvl6pPr marL="2286000" indent="0">
+              <a:buNone/>
+              <a:defRPr sz="900"/>
+            </a:lvl6pPr>
+            <a:lvl7pPr marL="2743200" indent="0">
+              <a:buNone/>
+              <a:defRPr sz="900"/>
+            </a:lvl7pPr>
+            <a:lvl8pPr marL="3200400" indent="0">
+              <a:buNone/>
+              <a:defRPr sz="900"/>
+            </a:lvl8pPr>
+            <a:lvl9pPr marL="3657600" indent="0">
+              <a:buNone/>
+              <a:defRPr sz="900"/>
+            </a:lvl9pPr>
+          </a:lstStyle>
+          <a:p>
+            <a:pPr lvl="0"/>
+            <a:r>
+              <a:rPr lang="en-US"/>
+              <a:t>Click to edit Master text styles</a:t>
+            </a:r>
+          </a:p>
+        </p:txBody>
+      </p:sp>
+      <p:sp>
+        <p:nvSpPr>
+          <p:cNvPr id="11" name="Text Placeholder 4"/>
+          <p:cNvSpPr>
+            <a:spLocks noGrp="1"/>
+          </p:cNvSpPr>
+          <p:nvPr>
+            <p:ph type="body" sz="quarter" idx="13"/>
+          </p:nvPr>
+        </p:nvSpPr>
+        <p:spPr>
+          <a:xfrm>
+            <a:off x="5989319" y="2192866"/>
+            <a:ext cx="2560320" cy="626534"/>
+          </a:xfrm>
+        </p:spPr>
+        <p:txBody>
+          <a:bodyPr anchor="b">
+            <a:noAutofit/>
+          </a:bodyPr>
+          <a:lstStyle>
+            <a:lvl1pPr marL="0" indent="0">
+              <a:buNone/>
+              <a:defRPr sz="2400" b="0">
+                <a:solidFill>
+                  <a:schemeClr val="tx1"/>
+                </a:solidFill>
+              </a:defRPr>
+            </a:lvl1pPr>
+            <a:lvl2pPr marL="457200" indent="0">
+              <a:buNone/>
+              <a:defRPr sz="2000" b="1"/>
+            </a:lvl2pPr>
+            <a:lvl3pPr marL="914400" indent="0">
+              <a:buNone/>
+              <a:defRPr sz="1800" b="1"/>
+            </a:lvl3pPr>
+            <a:lvl4pPr marL="1371600" indent="0">
+              <a:buNone/>
+              <a:defRPr sz="1600" b="1"/>
+            </a:lvl4pPr>
+            <a:lvl5pPr marL="1828800" indent="0">
+              <a:buNone/>
+              <a:defRPr sz="1600" b="1"/>
+            </a:lvl5pPr>
+            <a:lvl6pPr marL="2286000" indent="0">
+              <a:buNone/>
+              <a:defRPr sz="1600" b="1"/>
+            </a:lvl6pPr>
+            <a:lvl7pPr marL="2743200" indent="0">
+              <a:buNone/>
+              <a:defRPr sz="1600" b="1"/>
+            </a:lvl7pPr>
+            <a:lvl8pPr marL="3200400" indent="0">
+              <a:buNone/>
+              <a:defRPr sz="1600" b="1"/>
+            </a:lvl8pPr>
+            <a:lvl9pPr marL="3657600" indent="0">
+              <a:buNone/>
+              <a:defRPr sz="1600" b="1"/>
+            </a:lvl9pPr>
+          </a:lstStyle>
+          <a:p>
+            <a:pPr lvl="0"/>
+            <a:r>
+              <a:rPr lang="en-US"/>
+              <a:t>Click to edit Master text styles</a:t>
+            </a:r>
+          </a:p>
+        </p:txBody>
+      </p:sp>
+      <p:sp>
+        <p:nvSpPr>
+          <p:cNvPr id="12" name="Text Placeholder 3"/>
+          <p:cNvSpPr>
+            <a:spLocks noGrp="1"/>
+          </p:cNvSpPr>
+          <p:nvPr>
+            <p:ph type="body" sz="half" idx="17"/>
+          </p:nvPr>
+        </p:nvSpPr>
+        <p:spPr>
+          <a:xfrm>
+            <a:off x="5989320" y="2904564"/>
+            <a:ext cx="2560320" cy="3359079"/>
+          </a:xfrm>
+        </p:spPr>
+        <p:txBody>
+          <a:bodyPr anchor="t">
+            <a:normAutofit/>
+          </a:bodyPr>
+          <a:lstStyle>
+            <a:lvl1pPr marL="0" indent="0">
+              <a:buNone/>
+              <a:defRPr sz="1400"/>
+            </a:lvl1pPr>
+            <a:lvl2pPr marL="457200" indent="0">
+              <a:buNone/>
+              <a:defRPr sz="1200"/>
+            </a:lvl2pPr>
+            <a:lvl3pPr marL="914400" indent="0">
+              <a:buNone/>
+              <a:defRPr sz="1000"/>
+            </a:lvl3pPr>
+            <a:lvl4pPr marL="1371600" indent="0">
+              <a:buNone/>
+              <a:defRPr sz="900"/>
+            </a:lvl4pPr>
+            <a:lvl5pPr marL="1828800" indent="0">
+              <a:buNone/>
+              <a:defRPr sz="900"/>
+            </a:lvl5pPr>
+            <a:lvl6pPr marL="2286000" indent="0">
+              <a:buNone/>
+              <a:defRPr sz="900"/>
+            </a:lvl6pPr>
+            <a:lvl7pPr marL="2743200" indent="0">
+              <a:buNone/>
+              <a:defRPr sz="900"/>
+            </a:lvl7pPr>
+            <a:lvl8pPr marL="3200400" indent="0">
+              <a:buNone/>
+              <a:defRPr sz="900"/>
+            </a:lvl8pPr>
+            <a:lvl9pPr marL="3657600" indent="0">
+              <a:buNone/>
+              <a:defRPr sz="900"/>
+            </a:lvl9pPr>
+          </a:lstStyle>
+          <a:p>
+            <a:pPr lvl="0"/>
+            <a:r>
+              <a:rPr lang="en-US"/>
+              <a:t>Click to edit Master text styles</a:t>
+            </a:r>
+          </a:p>
+        </p:txBody>
+      </p:sp>
+      <p:sp>
+        <p:nvSpPr>
+          <p:cNvPr id="3" name="Date Placeholder 2"/>
+          <p:cNvSpPr>
+            <a:spLocks noGrp="1"/>
+          </p:cNvSpPr>
+          <p:nvPr>
+            <p:ph type="dt" sz="half" idx="10"/>
+          </p:nvPr>
+        </p:nvSpPr>
+        <p:spPr/>
+        <p:txBody>
+          <a:bodyPr/>
+          <a:lstStyle/>
+          <a:p>
+            <a:fld id="{5BCAD085-E8A6-8845-BD4E-CB4CCA059FC4}" type="datetimeFigureOut">
+              <a:rPr lang="en-US" smtClean="0"/>
+              <a:t>5/11/2026</a:t>
+            </a:fld>
+            <a:endParaRPr lang="en-US"/>
+          </a:p>
+        </p:txBody>
+      </p:sp>
+      <p:sp>
+        <p:nvSpPr>
+          <p:cNvPr id="4" name="Footer Placeholder 3"/>
+          <p:cNvSpPr>
+            <a:spLocks noGrp="1"/>
+          </p:cNvSpPr>
+          <p:nvPr>
+            <p:ph type="ftr" sz="quarter" idx="11"/>
+          </p:nvPr>
+        </p:nvSpPr>
+        <p:spPr/>
+        <p:txBody>
+          <a:bodyPr/>
+          <a:lstStyle/>
+          <a:p>
+            <a:endParaRPr lang="en-US"/>
+          </a:p>
+        </p:txBody>
+      </p:sp>
+      <p:sp>
+        <p:nvSpPr>
+          <p:cNvPr id="5" name="Slide Number Placeholder 4"/>
+          <p:cNvSpPr>
+            <a:spLocks noGrp="1"/>
+          </p:cNvSpPr>
+          <p:nvPr>
+            <p:ph type="sldNum" sz="quarter" idx="12"/>
+          </p:nvPr>
+        </p:nvSpPr>
+        <p:spPr/>
+        <p:txBody>
+          <a:bodyPr/>
+          <a:lstStyle/>
+          <a:p>
+            <a:fld id="{C1FF6DA9-008F-8B48-92A6-B652298478BF}" type="slidenum">
+              <a:rPr lang="en-US" smtClean="0"/>
+              <a:t>‹#›</a:t>
+            </a:fld>
+            <a:endParaRPr lang="en-US"/>
+          </a:p>
+        </p:txBody>
+      </p:sp>
+    </p:spTree>
+    <p:extLst>
+      <p:ext uri="{BB962C8B-B14F-4D97-AF65-F5344CB8AC3E}">
+        <p14:creationId xmlns:p14="http://schemas.microsoft.com/office/powerpoint/2010/main" val="177745304"/>
+      </p:ext>
+    </p:extLst>
+  </p:cSld>
+  <p:clrMapOvr>
+    <a:masterClrMapping/>
+  </p:clrMapOvr>
+</p:sldLayout>
+</file>
+
+<file path=ppt/slideLayouts/slideLayout15.xml><?xml version="1.0" encoding="utf-8"?>
+<p:sldLayout xmlns:a="http://schemas.openxmlformats.org/drawingml/2006/main" xmlns:r="http://schemas.openxmlformats.org/officeDocument/2006/relationships" xmlns:p="http://schemas.openxmlformats.org/presentationml/2006/main" preserve="1">
+  <p:cSld name="3 Picture Column">
+    <p:spTree>
+      <p:nvGrpSpPr>
+        <p:cNvPr id="1" name=""/>
+        <p:cNvGrpSpPr/>
+        <p:nvPr/>
+      </p:nvGrpSpPr>
+      <p:grpSpPr>
+        <a:xfrm>
+          <a:off x="0" y="0"/>
+          <a:ext cx="0" cy="0"/>
+          <a:chOff x="0" y="0"/>
+          <a:chExt cx="0" cy="0"/>
+        </a:xfrm>
+      </p:grpSpPr>
+      <p:sp>
+        <p:nvSpPr>
+          <p:cNvPr id="30" name="Title 1"/>
+          <p:cNvSpPr>
+            <a:spLocks noGrp="1"/>
+          </p:cNvSpPr>
+          <p:nvPr>
+            <p:ph type="title"/>
+          </p:nvPr>
+        </p:nvSpPr>
+        <p:spPr>
+          <a:xfrm>
+            <a:off x="2171702" y="762000"/>
+            <a:ext cx="6381984" cy="1295400"/>
+          </a:xfrm>
+        </p:spPr>
+        <p:txBody>
+          <a:bodyPr/>
+          <a:lstStyle/>
+          <a:p>
+            <a:r>
+              <a:rPr lang="en-US"/>
+              <a:t>Click to edit Master title style</a:t>
+            </a:r>
+            <a:endParaRPr lang="en-US" dirty="0"/>
+          </a:p>
+        </p:txBody>
+      </p:sp>
+      <p:sp>
+        <p:nvSpPr>
+          <p:cNvPr id="19" name="Text Placeholder 2"/>
+          <p:cNvSpPr>
+            <a:spLocks noGrp="1"/>
+          </p:cNvSpPr>
+          <p:nvPr>
+            <p:ph type="body" idx="1"/>
+          </p:nvPr>
+        </p:nvSpPr>
+        <p:spPr>
+          <a:xfrm>
+            <a:off x="594360" y="4113340"/>
+            <a:ext cx="2560320" cy="682765"/>
+          </a:xfrm>
+        </p:spPr>
+        <p:txBody>
+          <a:bodyPr anchor="b">
+            <a:noAutofit/>
+          </a:bodyPr>
+          <a:lstStyle>
+            <a:lvl1pPr marL="0" indent="0">
+              <a:buNone/>
+              <a:defRPr sz="2400" b="0">
+                <a:solidFill>
+                  <a:schemeClr val="tx1"/>
+                </a:solidFill>
+              </a:defRPr>
+            </a:lvl1pPr>
+            <a:lvl2pPr marL="457200" indent="0">
+              <a:buNone/>
+              <a:defRPr sz="2000" b="1"/>
+            </a:lvl2pPr>
+            <a:lvl3pPr marL="914400" indent="0">
+              <a:buNone/>
+              <a:defRPr sz="1800" b="1"/>
+            </a:lvl3pPr>
+            <a:lvl4pPr marL="1371600" indent="0">
+              <a:buNone/>
+              <a:defRPr sz="1600" b="1"/>
+            </a:lvl4pPr>
+            <a:lvl5pPr marL="1828800" indent="0">
+              <a:buNone/>
+              <a:defRPr sz="1600" b="1"/>
+            </a:lvl5pPr>
+            <a:lvl6pPr marL="2286000" indent="0">
+              <a:buNone/>
+              <a:defRPr sz="1600" b="1"/>
+            </a:lvl6pPr>
+            <a:lvl7pPr marL="2743200" indent="0">
+              <a:buNone/>
+              <a:defRPr sz="1600" b="1"/>
+            </a:lvl7pPr>
+            <a:lvl8pPr marL="3200400" indent="0">
+              <a:buNone/>
+              <a:defRPr sz="1600" b="1"/>
+            </a:lvl8pPr>
+            <a:lvl9pPr marL="3657600" indent="0">
+              <a:buNone/>
+              <a:defRPr sz="1600" b="1"/>
+            </a:lvl9pPr>
+          </a:lstStyle>
+          <a:p>
+            <a:pPr lvl="0"/>
+            <a:r>
+              <a:rPr lang="en-US"/>
+              <a:t>Click to edit Master text styles</a:t>
+            </a:r>
+          </a:p>
+        </p:txBody>
+      </p:sp>
+      <p:sp>
+        <p:nvSpPr>
+          <p:cNvPr id="20" name="Picture Placeholder 2"/>
+          <p:cNvSpPr>
+            <a:spLocks noGrp="1" noChangeAspect="1"/>
+          </p:cNvSpPr>
+          <p:nvPr>
+            <p:ph type="pic" idx="15"/>
+          </p:nvPr>
+        </p:nvSpPr>
+        <p:spPr>
+          <a:xfrm>
+            <a:off x="594360" y="2331720"/>
+            <a:ext cx="2560320" cy="1507300"/>
+          </a:xfrm>
+          <a:prstGeom prst="roundRect">
+            <a:avLst>
+              <a:gd name="adj" fmla="val 0"/>
+            </a:avLst>
+          </a:prstGeom>
+          <a:effectLst>
+            <a:outerShdw blurRad="50800" dist="50800" dir="5400000" algn="tl" rotWithShape="0">
+              <a:srgbClr val="000000">
+                <a:alpha val="43000"/>
+              </a:srgbClr>
+            </a:outerShdw>
+          </a:effectLst>
+        </p:spPr>
+        <p:txBody>
+          <a:bodyPr anchor="t">
+            <a:normAutofit/>
+          </a:bodyPr>
+          <a:lstStyle>
+            <a:lvl1pPr marL="0" indent="0" algn="ctr">
+              <a:buNone/>
+              <a:defRPr sz="1600"/>
+            </a:lvl1pPr>
+            <a:lvl2pPr marL="457200" indent="0">
+              <a:buNone/>
+              <a:defRPr sz="1600"/>
+            </a:lvl2pPr>
+            <a:lvl3pPr marL="914400" indent="0">
+              <a:buNone/>
+              <a:defRPr sz="1600"/>
+            </a:lvl3pPr>
+            <a:lvl4pPr marL="1371600" indent="0">
+              <a:buNone/>
+              <a:defRPr sz="1600"/>
+            </a:lvl4pPr>
+            <a:lvl5pPr marL="1828800" indent="0">
+              <a:buNone/>
+              <a:defRPr sz="1600"/>
+            </a:lvl5pPr>
+            <a:lvl6pPr marL="2286000" indent="0">
+              <a:buNone/>
+              <a:defRPr sz="1600"/>
+            </a:lvl6pPr>
+            <a:lvl7pPr marL="2743200" indent="0">
+              <a:buNone/>
+              <a:defRPr sz="1600"/>
+            </a:lvl7pPr>
+            <a:lvl8pPr marL="3200400" indent="0">
+              <a:buNone/>
+              <a:defRPr sz="1600"/>
+            </a:lvl8pPr>
+            <a:lvl9pPr marL="3657600" indent="0">
+              <a:buNone/>
+              <a:defRPr sz="1600"/>
+            </a:lvl9pPr>
+          </a:lstStyle>
+          <a:p>
+            <a:r>
+              <a:rPr lang="en-US"/>
+              <a:t>Click icon to add picture</a:t>
+            </a:r>
+            <a:endParaRPr lang="en-US" dirty="0"/>
+          </a:p>
+        </p:txBody>
+      </p:sp>
+      <p:sp>
+        <p:nvSpPr>
+          <p:cNvPr id="21" name="Text Placeholder 3"/>
+          <p:cNvSpPr>
+            <a:spLocks noGrp="1"/>
+          </p:cNvSpPr>
+          <p:nvPr>
+            <p:ph type="body" sz="half" idx="18"/>
+          </p:nvPr>
+        </p:nvSpPr>
+        <p:spPr>
+          <a:xfrm>
+            <a:off x="594360" y="4796103"/>
+            <a:ext cx="2560320" cy="1467537"/>
+          </a:xfrm>
+        </p:spPr>
+        <p:txBody>
+          <a:bodyPr anchor="t">
+            <a:normAutofit/>
+          </a:bodyPr>
+          <a:lstStyle>
+            <a:lvl1pPr marL="0" indent="0">
+              <a:buNone/>
+              <a:defRPr sz="1400"/>
+            </a:lvl1pPr>
+            <a:lvl2pPr marL="457200" indent="0">
+              <a:buNone/>
+              <a:defRPr sz="1200"/>
+            </a:lvl2pPr>
+            <a:lvl3pPr marL="914400" indent="0">
+              <a:buNone/>
+              <a:defRPr sz="1000"/>
+            </a:lvl3pPr>
+            <a:lvl4pPr marL="1371600" indent="0">
+              <a:buNone/>
+              <a:defRPr sz="900"/>
+            </a:lvl4pPr>
+            <a:lvl5pPr marL="1828800" indent="0">
+              <a:buNone/>
+              <a:defRPr sz="900"/>
+            </a:lvl5pPr>
+            <a:lvl6pPr marL="2286000" indent="0">
+              <a:buNone/>
+              <a:defRPr sz="900"/>
+            </a:lvl6pPr>
+            <a:lvl7pPr marL="2743200" indent="0">
+              <a:buNone/>
+              <a:defRPr sz="900"/>
+            </a:lvl7pPr>
+            <a:lvl8pPr marL="3200400" indent="0">
+              <a:buNone/>
+              <a:defRPr sz="900"/>
+            </a:lvl8pPr>
+            <a:lvl9pPr marL="3657600" indent="0">
+              <a:buNone/>
+              <a:defRPr sz="900"/>
+            </a:lvl9pPr>
+          </a:lstStyle>
+          <a:p>
+            <a:pPr lvl="0"/>
+            <a:r>
+              <a:rPr lang="en-US"/>
+              <a:t>Click to edit Master text styles</a:t>
+            </a:r>
+          </a:p>
+        </p:txBody>
+      </p:sp>
+      <p:sp>
+        <p:nvSpPr>
+          <p:cNvPr id="22" name="Text Placeholder 4"/>
+          <p:cNvSpPr>
+            <a:spLocks noGrp="1"/>
+          </p:cNvSpPr>
+          <p:nvPr>
+            <p:ph type="body" sz="quarter" idx="3"/>
+          </p:nvPr>
+        </p:nvSpPr>
+        <p:spPr>
+          <a:xfrm>
+            <a:off x="3291873" y="4113340"/>
+            <a:ext cx="2560320" cy="682765"/>
+          </a:xfrm>
+        </p:spPr>
+        <p:txBody>
+          <a:bodyPr anchor="b">
+            <a:noAutofit/>
+          </a:bodyPr>
+          <a:lstStyle>
+            <a:lvl1pPr marL="0" indent="0">
+              <a:buNone/>
+              <a:defRPr sz="2400" b="0">
+                <a:solidFill>
+                  <a:schemeClr val="tx1"/>
+                </a:solidFill>
+              </a:defRPr>
+            </a:lvl1pPr>
+            <a:lvl2pPr marL="457200" indent="0">
+              <a:buNone/>
+              <a:defRPr sz="2000" b="1"/>
+            </a:lvl2pPr>
+            <a:lvl3pPr marL="914400" indent="0">
+              <a:buNone/>
+              <a:defRPr sz="1800" b="1"/>
+            </a:lvl3pPr>
+            <a:lvl4pPr marL="1371600" indent="0">
+              <a:buNone/>
+              <a:defRPr sz="1600" b="1"/>
+            </a:lvl4pPr>
+            <a:lvl5pPr marL="1828800" indent="0">
+              <a:buNone/>
+              <a:defRPr sz="1600" b="1"/>
+            </a:lvl5pPr>
+            <a:lvl6pPr marL="2286000" indent="0">
+              <a:buNone/>
+              <a:defRPr sz="1600" b="1"/>
+            </a:lvl6pPr>
+            <a:lvl7pPr marL="2743200" indent="0">
+              <a:buNone/>
+              <a:defRPr sz="1600" b="1"/>
+            </a:lvl7pPr>
+            <a:lvl8pPr marL="3200400" indent="0">
+              <a:buNone/>
+              <a:defRPr sz="1600" b="1"/>
+            </a:lvl8pPr>
+            <a:lvl9pPr marL="3657600" indent="0">
+              <a:buNone/>
+              <a:defRPr sz="1600" b="1"/>
+            </a:lvl9pPr>
+          </a:lstStyle>
+          <a:p>
+            <a:pPr lvl="0"/>
+            <a:r>
+              <a:rPr lang="en-US"/>
+              <a:t>Click to edit Master text styles</a:t>
+            </a:r>
+          </a:p>
+        </p:txBody>
+      </p:sp>
+      <p:sp>
+        <p:nvSpPr>
+          <p:cNvPr id="23" name="Picture Placeholder 2"/>
+          <p:cNvSpPr>
+            <a:spLocks noGrp="1" noChangeAspect="1"/>
+          </p:cNvSpPr>
+          <p:nvPr>
+            <p:ph type="pic" idx="21"/>
+          </p:nvPr>
+        </p:nvSpPr>
+        <p:spPr>
+          <a:xfrm>
+            <a:off x="3291872" y="2331720"/>
+            <a:ext cx="2560320" cy="1509862"/>
+          </a:xfrm>
+          <a:prstGeom prst="roundRect">
+            <a:avLst>
+              <a:gd name="adj" fmla="val 0"/>
+            </a:avLst>
+          </a:prstGeom>
+          <a:effectLst>
+            <a:outerShdw blurRad="50800" dist="50800" dir="5400000" algn="tl" rotWithShape="0">
+              <a:srgbClr val="000000">
+                <a:alpha val="43000"/>
+              </a:srgbClr>
+            </a:outerShdw>
+          </a:effectLst>
+        </p:spPr>
+        <p:txBody>
+          <a:bodyPr anchor="t">
+            <a:normAutofit/>
+          </a:bodyPr>
+          <a:lstStyle>
+            <a:lvl1pPr marL="0" indent="0" algn="ctr">
+              <a:buNone/>
+              <a:defRPr sz="1600"/>
+            </a:lvl1pPr>
+            <a:lvl2pPr marL="457200" indent="0">
+              <a:buNone/>
+              <a:defRPr sz="1600"/>
+            </a:lvl2pPr>
+            <a:lvl3pPr marL="914400" indent="0">
+              <a:buNone/>
+              <a:defRPr sz="1600"/>
+            </a:lvl3pPr>
+            <a:lvl4pPr marL="1371600" indent="0">
+              <a:buNone/>
+              <a:defRPr sz="1600"/>
+            </a:lvl4pPr>
+            <a:lvl5pPr marL="1828800" indent="0">
+              <a:buNone/>
+              <a:defRPr sz="1600"/>
+            </a:lvl5pPr>
+            <a:lvl6pPr marL="2286000" indent="0">
+              <a:buNone/>
+              <a:defRPr sz="1600"/>
+            </a:lvl6pPr>
+            <a:lvl7pPr marL="2743200" indent="0">
+              <a:buNone/>
+              <a:defRPr sz="1600"/>
+            </a:lvl7pPr>
+            <a:lvl8pPr marL="3200400" indent="0">
+              <a:buNone/>
+              <a:defRPr sz="1600"/>
+            </a:lvl8pPr>
+            <a:lvl9pPr marL="3657600" indent="0">
+              <a:buNone/>
+              <a:defRPr sz="1600"/>
+            </a:lvl9pPr>
+          </a:lstStyle>
+          <a:p>
+            <a:r>
+              <a:rPr lang="en-US"/>
+              <a:t>Click icon to add picture</a:t>
+            </a:r>
+            <a:endParaRPr lang="en-US" dirty="0"/>
+          </a:p>
+        </p:txBody>
+      </p:sp>
+      <p:sp>
+        <p:nvSpPr>
+          <p:cNvPr id="24" name="Text Placeholder 3"/>
+          <p:cNvSpPr>
+            <a:spLocks noGrp="1"/>
+          </p:cNvSpPr>
+          <p:nvPr>
+            <p:ph type="body" sz="half" idx="19"/>
+          </p:nvPr>
+        </p:nvSpPr>
+        <p:spPr>
+          <a:xfrm>
+            <a:off x="3290858" y="4796102"/>
+            <a:ext cx="2560320" cy="1467537"/>
+          </a:xfrm>
+        </p:spPr>
+        <p:txBody>
+          <a:bodyPr anchor="t">
+            <a:normAutofit/>
+          </a:bodyPr>
+          <a:lstStyle>
+            <a:lvl1pPr marL="0" indent="0">
+              <a:buNone/>
+              <a:defRPr sz="1400"/>
+            </a:lvl1pPr>
+            <a:lvl2pPr marL="457200" indent="0">
+              <a:buNone/>
+              <a:defRPr sz="1200"/>
+            </a:lvl2pPr>
+            <a:lvl3pPr marL="914400" indent="0">
+              <a:buNone/>
+              <a:defRPr sz="1000"/>
+            </a:lvl3pPr>
+            <a:lvl4pPr marL="1371600" indent="0">
+              <a:buNone/>
+              <a:defRPr sz="900"/>
+            </a:lvl4pPr>
+            <a:lvl5pPr marL="1828800" indent="0">
+              <a:buNone/>
+              <a:defRPr sz="900"/>
+            </a:lvl5pPr>
+            <a:lvl6pPr marL="2286000" indent="0">
+              <a:buNone/>
+              <a:defRPr sz="900"/>
+            </a:lvl6pPr>
+            <a:lvl7pPr marL="2743200" indent="0">
+              <a:buNone/>
+              <a:defRPr sz="900"/>
+            </a:lvl7pPr>
+            <a:lvl8pPr marL="3200400" indent="0">
+              <a:buNone/>
+              <a:defRPr sz="900"/>
+            </a:lvl8pPr>
+            <a:lvl9pPr marL="3657600" indent="0">
+              <a:buNone/>
+              <a:defRPr sz="900"/>
+            </a:lvl9pPr>
+          </a:lstStyle>
+          <a:p>
+            <a:pPr lvl="0"/>
+            <a:r>
+              <a:rPr lang="en-US"/>
+              <a:t>Click to edit Master text styles</a:t>
+            </a:r>
+          </a:p>
+        </p:txBody>
+      </p:sp>
+      <p:sp>
+        <p:nvSpPr>
+          <p:cNvPr id="25" name="Text Placeholder 4"/>
+          <p:cNvSpPr>
+            <a:spLocks noGrp="1"/>
+          </p:cNvSpPr>
+          <p:nvPr>
+            <p:ph type="body" sz="quarter" idx="13"/>
+          </p:nvPr>
+        </p:nvSpPr>
+        <p:spPr>
+          <a:xfrm>
+            <a:off x="5993365" y="4113340"/>
+            <a:ext cx="2560320" cy="682765"/>
+          </a:xfrm>
+        </p:spPr>
+        <p:txBody>
+          <a:bodyPr anchor="b">
+            <a:noAutofit/>
+          </a:bodyPr>
+          <a:lstStyle>
+            <a:lvl1pPr marL="0" indent="0">
+              <a:buNone/>
+              <a:defRPr sz="2400" b="0">
+                <a:solidFill>
+                  <a:schemeClr val="tx1"/>
+                </a:solidFill>
+              </a:defRPr>
+            </a:lvl1pPr>
+            <a:lvl2pPr marL="457200" indent="0">
+              <a:buNone/>
+              <a:defRPr sz="2000" b="1"/>
+            </a:lvl2pPr>
+            <a:lvl3pPr marL="914400" indent="0">
+              <a:buNone/>
+              <a:defRPr sz="1800" b="1"/>
+            </a:lvl3pPr>
+            <a:lvl4pPr marL="1371600" indent="0">
+              <a:buNone/>
+              <a:defRPr sz="1600" b="1"/>
+            </a:lvl4pPr>
+            <a:lvl5pPr marL="1828800" indent="0">
+              <a:buNone/>
+              <a:defRPr sz="1600" b="1"/>
+            </a:lvl5pPr>
+            <a:lvl6pPr marL="2286000" indent="0">
+              <a:buNone/>
+              <a:defRPr sz="1600" b="1"/>
+            </a:lvl6pPr>
+            <a:lvl7pPr marL="2743200" indent="0">
+              <a:buNone/>
+              <a:defRPr sz="1600" b="1"/>
+            </a:lvl7pPr>
+            <a:lvl8pPr marL="3200400" indent="0">
+              <a:buNone/>
+              <a:defRPr sz="1600" b="1"/>
+            </a:lvl8pPr>
+            <a:lvl9pPr marL="3657600" indent="0">
+              <a:buNone/>
+              <a:defRPr sz="1600" b="1"/>
+            </a:lvl9pPr>
+          </a:lstStyle>
+          <a:p>
+            <a:pPr lvl="0"/>
+            <a:r>
+              <a:rPr lang="en-US"/>
+              <a:t>Click to edit Master text styles</a:t>
+            </a:r>
+          </a:p>
+        </p:txBody>
+      </p:sp>
+      <p:sp>
+        <p:nvSpPr>
+          <p:cNvPr id="26" name="Picture Placeholder 2"/>
+          <p:cNvSpPr>
+            <a:spLocks noGrp="1" noChangeAspect="1"/>
+          </p:cNvSpPr>
+          <p:nvPr>
+            <p:ph type="pic" idx="22"/>
+          </p:nvPr>
+        </p:nvSpPr>
+        <p:spPr>
+          <a:xfrm>
+            <a:off x="5993364" y="2331721"/>
+            <a:ext cx="2560320" cy="1508919"/>
+          </a:xfrm>
+          <a:prstGeom prst="roundRect">
+            <a:avLst>
+              <a:gd name="adj" fmla="val 0"/>
+            </a:avLst>
+          </a:prstGeom>
+          <a:effectLst>
+            <a:outerShdw blurRad="50800" dist="50800" dir="5400000" algn="tl" rotWithShape="0">
+              <a:srgbClr val="000000">
+                <a:alpha val="43000"/>
+              </a:srgbClr>
+            </a:outerShdw>
+          </a:effectLst>
+        </p:spPr>
+        <p:txBody>
+          <a:bodyPr anchor="t">
+            <a:normAutofit/>
+          </a:bodyPr>
+          <a:lstStyle>
+            <a:lvl1pPr marL="0" indent="0" algn="ctr">
+              <a:buNone/>
+              <a:defRPr sz="1600"/>
+            </a:lvl1pPr>
+            <a:lvl2pPr marL="457200" indent="0">
+              <a:buNone/>
+              <a:defRPr sz="1600"/>
+            </a:lvl2pPr>
+            <a:lvl3pPr marL="914400" indent="0">
+              <a:buNone/>
+              <a:defRPr sz="1600"/>
+            </a:lvl3pPr>
+            <a:lvl4pPr marL="1371600" indent="0">
+              <a:buNone/>
+              <a:defRPr sz="1600"/>
+            </a:lvl4pPr>
+            <a:lvl5pPr marL="1828800" indent="0">
+              <a:buNone/>
+              <a:defRPr sz="1600"/>
+            </a:lvl5pPr>
+            <a:lvl6pPr marL="2286000" indent="0">
+              <a:buNone/>
+              <a:defRPr sz="1600"/>
+            </a:lvl6pPr>
+            <a:lvl7pPr marL="2743200" indent="0">
+              <a:buNone/>
+              <a:defRPr sz="1600"/>
+            </a:lvl7pPr>
+            <a:lvl8pPr marL="3200400" indent="0">
+              <a:buNone/>
+              <a:defRPr sz="1600"/>
+            </a:lvl8pPr>
+            <a:lvl9pPr marL="3657600" indent="0">
+              <a:buNone/>
+              <a:defRPr sz="1600"/>
+            </a:lvl9pPr>
+          </a:lstStyle>
+          <a:p>
+            <a:r>
+              <a:rPr lang="en-US"/>
+              <a:t>Click icon to add picture</a:t>
+            </a:r>
+            <a:endParaRPr lang="en-US" dirty="0"/>
+          </a:p>
+        </p:txBody>
+      </p:sp>
+      <p:sp>
+        <p:nvSpPr>
+          <p:cNvPr id="27" name="Text Placeholder 3"/>
+          <p:cNvSpPr>
+            <a:spLocks noGrp="1"/>
+          </p:cNvSpPr>
+          <p:nvPr>
+            <p:ph type="body" sz="half" idx="20"/>
+          </p:nvPr>
+        </p:nvSpPr>
+        <p:spPr>
+          <a:xfrm>
+            <a:off x="5993272" y="4796100"/>
+            <a:ext cx="2560320" cy="1467537"/>
+          </a:xfrm>
+        </p:spPr>
+        <p:txBody>
+          <a:bodyPr anchor="t">
+            <a:normAutofit/>
+          </a:bodyPr>
+          <a:lstStyle>
+            <a:lvl1pPr marL="0" indent="0">
+              <a:buNone/>
+              <a:defRPr sz="1400"/>
+            </a:lvl1pPr>
+            <a:lvl2pPr marL="457200" indent="0">
+              <a:buNone/>
+              <a:defRPr sz="1200"/>
+            </a:lvl2pPr>
+            <a:lvl3pPr marL="914400" indent="0">
+              <a:buNone/>
+              <a:defRPr sz="1000"/>
+            </a:lvl3pPr>
+            <a:lvl4pPr marL="1371600" indent="0">
+              <a:buNone/>
+              <a:defRPr sz="900"/>
+            </a:lvl4pPr>
+            <a:lvl5pPr marL="1828800" indent="0">
+              <a:buNone/>
+              <a:defRPr sz="900"/>
+            </a:lvl5pPr>
+            <a:lvl6pPr marL="2286000" indent="0">
+              <a:buNone/>
+              <a:defRPr sz="900"/>
+            </a:lvl6pPr>
+            <a:lvl7pPr marL="2743200" indent="0">
+              <a:buNone/>
+              <a:defRPr sz="900"/>
+            </a:lvl7pPr>
+            <a:lvl8pPr marL="3200400" indent="0">
+              <a:buNone/>
+              <a:defRPr sz="900"/>
+            </a:lvl8pPr>
+            <a:lvl9pPr marL="3657600" indent="0">
+              <a:buNone/>
+              <a:defRPr sz="900"/>
+            </a:lvl9pPr>
+          </a:lstStyle>
+          <a:p>
+            <a:pPr lvl="0"/>
+            <a:r>
+              <a:rPr lang="en-US"/>
+              <a:t>Click to edit Master text styles</a:t>
+            </a:r>
+          </a:p>
+        </p:txBody>
+      </p:sp>
+      <p:sp>
+        <p:nvSpPr>
+          <p:cNvPr id="3" name="Date Placeholder 2"/>
+          <p:cNvSpPr>
+            <a:spLocks noGrp="1"/>
+          </p:cNvSpPr>
+          <p:nvPr>
+            <p:ph type="dt" sz="half" idx="10"/>
+          </p:nvPr>
+        </p:nvSpPr>
+        <p:spPr/>
+        <p:txBody>
+          <a:bodyPr/>
+          <a:lstStyle/>
+          <a:p>
+            <a:fld id="{5BCAD085-E8A6-8845-BD4E-CB4CCA059FC4}" type="datetimeFigureOut">
+              <a:rPr lang="en-US" smtClean="0"/>
+              <a:t>5/11/2026</a:t>
+            </a:fld>
+            <a:endParaRPr lang="en-US"/>
+          </a:p>
+        </p:txBody>
+      </p:sp>
+      <p:sp>
+        <p:nvSpPr>
+          <p:cNvPr id="4" name="Footer Placeholder 3"/>
+          <p:cNvSpPr>
+            <a:spLocks noGrp="1"/>
+          </p:cNvSpPr>
+          <p:nvPr>
+            <p:ph type="ftr" sz="quarter" idx="11"/>
+          </p:nvPr>
+        </p:nvSpPr>
+        <p:spPr/>
+        <p:txBody>
+          <a:bodyPr/>
+          <a:lstStyle/>
+          <a:p>
+            <a:endParaRPr lang="en-US"/>
+          </a:p>
+        </p:txBody>
+      </p:sp>
+      <p:sp>
+        <p:nvSpPr>
+          <p:cNvPr id="5" name="Slide Number Placeholder 4"/>
+          <p:cNvSpPr>
+            <a:spLocks noGrp="1"/>
+          </p:cNvSpPr>
+          <p:nvPr>
+            <p:ph type="sldNum" sz="quarter" idx="12"/>
+          </p:nvPr>
+        </p:nvSpPr>
+        <p:spPr/>
+        <p:txBody>
+          <a:bodyPr/>
+          <a:lstStyle/>
+          <a:p>
+            <a:fld id="{C1FF6DA9-008F-8B48-92A6-B652298478BF}" type="slidenum">
+              <a:rPr lang="en-US" smtClean="0"/>
+              <a:t>‹#›</a:t>
+            </a:fld>
+            <a:endParaRPr lang="en-US"/>
+          </a:p>
+        </p:txBody>
+      </p:sp>
+    </p:spTree>
+    <p:extLst>
+      <p:ext uri="{BB962C8B-B14F-4D97-AF65-F5344CB8AC3E}">
+        <p14:creationId xmlns:p14="http://schemas.microsoft.com/office/powerpoint/2010/main" val="3497052192"/>
+      </p:ext>
+    </p:extLst>
+  </p:cSld>
+  <p:clrMapOvr>
+    <a:masterClrMapping/>
+  </p:clrMapOvr>
+</p:sldLayout>
+</file>
+
+<file path=ppt/slideLayouts/slideLayout16.xml><?xml version="1.0" encoding="utf-8"?>
 <p:sldLayout xmlns:a="http://schemas.openxmlformats.org/drawingml/2006/main" xmlns:r="http://schemas.openxmlformats.org/officeDocument/2006/relationships" xmlns:p="http://schemas.openxmlformats.org/presentationml/2006/main" type="vertTx" preserve="1">
   <p:cSld name="Title and Vertical Text">
     <p:spTree>
@@ -370,7 +3019,12 @@
             <p:ph type="body" orient="vert" idx="1"/>
           </p:nvPr>
         </p:nvSpPr>
-        <p:spPr/>
+        <p:spPr>
+          <a:xfrm>
+            <a:off x="594360" y="2194560"/>
+            <a:ext cx="7955280" cy="4069080"/>
+          </a:xfrm>
+        </p:spPr>
         <p:txBody>
           <a:bodyPr vert="eaVert"/>
           <a:lstStyle/>
@@ -429,7 +3083,7 @@
           <a:p>
             <a:fld id="{5BCAD085-E8A6-8845-BD4E-CB4CCA059FC4}" type="datetimeFigureOut">
               <a:rPr lang="en-US" smtClean="0"/>
-              <a:t>4/29/2026</a:t>
+              <a:t>5/11/2026</a:t>
             </a:fld>
             <a:endParaRPr lang="en-US"/>
           </a:p>
@@ -480,7 +3134,7 @@
     </p:spTree>
     <p:extLst>
       <p:ext uri="{BB962C8B-B14F-4D97-AF65-F5344CB8AC3E}">
-        <p14:creationId xmlns:p14="http://schemas.microsoft.com/office/powerpoint/2010/main" val="1349218513"/>
+        <p14:creationId xmlns:p14="http://schemas.microsoft.com/office/powerpoint/2010/main" val="4246631822"/>
       </p:ext>
     </p:extLst>
   </p:cSld>
@@ -490,8 +3144,8 @@
 </p:sldLayout>
 </file>
 
-<file path=ppt/slideLayouts/slideLayout11.xml><?xml version="1.0" encoding="utf-8"?>
-<p:sldLayout xmlns:a="http://schemas.openxmlformats.org/drawingml/2006/main" xmlns:r="http://schemas.openxmlformats.org/officeDocument/2006/relationships" xmlns:p="http://schemas.openxmlformats.org/presentationml/2006/main" type="vertTitleAndTx" preserve="1">
+<file path=ppt/slideLayouts/slideLayout17.xml><?xml version="1.0" encoding="utf-8"?>
+<p:sldLayout xmlns:a="http://schemas.openxmlformats.org/drawingml/2006/main" xmlns:r="http://schemas.openxmlformats.org/officeDocument/2006/relationships" xmlns:p="http://schemas.openxmlformats.org/presentationml/2006/main" showMasterSp="0" type="vertTitleAndTx" preserve="1">
   <p:cSld name="Vertical Title and Text">
     <p:spTree>
       <p:nvGrpSpPr>
@@ -507,6 +3161,36 @@
           <a:chExt cx="0" cy="0"/>
         </a:xfrm>
       </p:grpSpPr>
+      <p:pic>
+        <p:nvPicPr>
+          <p:cNvPr id="8" name="Picture 7" descr="C2-HD-BTM.png"/>
+          <p:cNvPicPr>
+            <a:picLocks noChangeAspect="1"/>
+          </p:cNvPicPr>
+          <p:nvPr/>
+        </p:nvPicPr>
+        <p:blipFill>
+          <a:blip r:embed="rId2">
+            <a:extLst>
+              <a:ext uri="{28A0092B-C50C-407E-A947-70E740481C1C}">
+                <a14:useLocalDpi xmlns:a14="http://schemas.microsoft.com/office/drawing/2010/main" val="0"/>
+              </a:ext>
+            </a:extLst>
+          </a:blip>
+          <a:stretch>
+            <a:fillRect/>
+          </a:stretch>
+        </p:blipFill>
+        <p:spPr>
+          <a:xfrm>
+            <a:off x="0" y="4995862"/>
+            <a:ext cx="9144000" cy="1862138"/>
+          </a:xfrm>
+          <a:prstGeom prst="rect">
+            <a:avLst/>
+          </a:prstGeom>
+        </p:spPr>
+      </p:pic>
       <p:sp>
         <p:nvSpPr>
           <p:cNvPr id="2" name="Vertical Title 1"/>
@@ -519,13 +3203,17 @@
         </p:nvSpPr>
         <p:spPr>
           <a:xfrm>
-            <a:off x="6543675" y="365125"/>
-            <a:ext cx="1971675" cy="5811838"/>
+            <a:off x="7006590" y="747183"/>
+            <a:ext cx="1543050" cy="4248675"/>
           </a:xfrm>
         </p:spPr>
         <p:txBody>
           <a:bodyPr vert="eaVert"/>
-          <a:lstStyle/>
+          <a:lstStyle>
+            <a:lvl1pPr algn="l">
+              <a:defRPr/>
+            </a:lvl1pPr>
+          </a:lstStyle>
           <a:p>
             <a:r>
               <a:rPr lang="en-US"/>
@@ -547,8 +3235,8 @@
         </p:nvSpPr>
         <p:spPr>
           <a:xfrm>
-            <a:off x="628650" y="365125"/>
-            <a:ext cx="5800725" cy="5811838"/>
+            <a:off x="594360" y="746126"/>
+            <a:ext cx="6278035" cy="4249732"/>
           </a:xfrm>
         </p:spPr>
         <p:txBody>
@@ -602,14 +3290,23 @@
             <p:ph type="dt" sz="half" idx="10"/>
           </p:nvPr>
         </p:nvSpPr>
-        <p:spPr/>
-        <p:txBody>
-          <a:bodyPr/>
-          <a:lstStyle/>
+        <p:spPr>
+          <a:xfrm>
+            <a:off x="5562176" y="381001"/>
+            <a:ext cx="2183130" cy="365125"/>
+          </a:xfrm>
+        </p:spPr>
+        <p:txBody>
+          <a:bodyPr/>
+          <a:lstStyle>
+            <a:lvl1pPr algn="r">
+              <a:defRPr/>
+            </a:lvl1pPr>
+          </a:lstStyle>
           <a:p>
             <a:fld id="{5BCAD085-E8A6-8845-BD4E-CB4CCA059FC4}" type="datetimeFigureOut">
               <a:rPr lang="en-US" smtClean="0"/>
-              <a:t>4/29/2026</a:t>
+              <a:t>5/11/2026</a:t>
             </a:fld>
             <a:endParaRPr lang="en-US"/>
           </a:p>
@@ -625,7 +3322,12 @@
             <p:ph type="ftr" sz="quarter" idx="11"/>
           </p:nvPr>
         </p:nvSpPr>
-        <p:spPr/>
+        <p:spPr>
+          <a:xfrm>
+            <a:off x="594360" y="381001"/>
+            <a:ext cx="4830656" cy="365125"/>
+          </a:xfrm>
+        </p:spPr>
         <p:txBody>
           <a:bodyPr/>
           <a:lstStyle/>
@@ -644,7 +3346,12 @@
             <p:ph type="sldNum" sz="quarter" idx="12"/>
           </p:nvPr>
         </p:nvSpPr>
-        <p:spPr/>
+        <p:spPr>
+          <a:xfrm>
+            <a:off x="7882466" y="381001"/>
+            <a:ext cx="667174" cy="365125"/>
+          </a:xfrm>
+        </p:spPr>
         <p:txBody>
           <a:bodyPr/>
           <a:lstStyle/>
@@ -660,7 +3367,7 @@
     </p:spTree>
     <p:extLst>
       <p:ext uri="{BB962C8B-B14F-4D97-AF65-F5344CB8AC3E}">
-        <p14:creationId xmlns:p14="http://schemas.microsoft.com/office/powerpoint/2010/main" val="3708987109"/>
+        <p14:creationId xmlns:p14="http://schemas.microsoft.com/office/powerpoint/2010/main" val="3228103321"/>
       </p:ext>
     </p:extLst>
   </p:cSld>
@@ -779,7 +3486,7 @@
           <a:p>
             <a:fld id="{5BCAD085-E8A6-8845-BD4E-CB4CCA059FC4}" type="datetimeFigureOut">
               <a:rPr lang="en-US" smtClean="0"/>
-              <a:t>4/29/2026</a:t>
+              <a:t>5/11/2026</a:t>
             </a:fld>
             <a:endParaRPr lang="en-US"/>
           </a:p>
@@ -830,7 +3537,7 @@
     </p:spTree>
     <p:extLst>
       <p:ext uri="{BB962C8B-B14F-4D97-AF65-F5344CB8AC3E}">
-        <p14:creationId xmlns:p14="http://schemas.microsoft.com/office/powerpoint/2010/main" val="2089547102"/>
+        <p14:creationId xmlns:p14="http://schemas.microsoft.com/office/powerpoint/2010/main" val="1007295398"/>
       </p:ext>
     </p:extLst>
   </p:cSld>
@@ -841,7 +3548,7 @@
 </file>
 
 <file path=ppt/slideLayouts/slideLayout3.xml><?xml version="1.0" encoding="utf-8"?>
-<p:sldLayout xmlns:a="http://schemas.openxmlformats.org/drawingml/2006/main" xmlns:r="http://schemas.openxmlformats.org/officeDocument/2006/relationships" xmlns:p="http://schemas.openxmlformats.org/presentationml/2006/main" type="secHead" preserve="1">
+<p:sldLayout xmlns:a="http://schemas.openxmlformats.org/drawingml/2006/main" xmlns:r="http://schemas.openxmlformats.org/officeDocument/2006/relationships" xmlns:p="http://schemas.openxmlformats.org/presentationml/2006/main" showMasterSp="0" type="secHead" preserve="1">
   <p:cSld name="Section Header">
     <p:spTree>
       <p:nvGrpSpPr>
@@ -857,6 +3564,36 @@
           <a:chExt cx="0" cy="0"/>
         </a:xfrm>
       </p:grpSpPr>
+      <p:pic>
+        <p:nvPicPr>
+          <p:cNvPr id="9" name="Picture 8" descr="C2-HD-BTM.png"/>
+          <p:cNvPicPr>
+            <a:picLocks noChangeAspect="1"/>
+          </p:cNvPicPr>
+          <p:nvPr/>
+        </p:nvPicPr>
+        <p:blipFill>
+          <a:blip r:embed="rId2">
+            <a:extLst>
+              <a:ext uri="{28A0092B-C50C-407E-A947-70E740481C1C}">
+                <a14:useLocalDpi xmlns:a14="http://schemas.microsoft.com/office/drawing/2010/main" val="0"/>
+              </a:ext>
+            </a:extLst>
+          </a:blip>
+          <a:stretch>
+            <a:fillRect/>
+          </a:stretch>
+        </p:blipFill>
+        <p:spPr>
+          <a:xfrm>
+            <a:off x="0" y="4995862"/>
+            <a:ext cx="9144000" cy="1862138"/>
+          </a:xfrm>
+          <a:prstGeom prst="rect">
+            <a:avLst/>
+          </a:prstGeom>
+        </p:spPr>
+      </p:pic>
       <p:sp>
         <p:nvSpPr>
           <p:cNvPr id="2" name="Title 1"/>
@@ -869,15 +3606,17 @@
         </p:nvSpPr>
         <p:spPr>
           <a:xfrm>
-            <a:off x="623888" y="1709739"/>
-            <a:ext cx="7886700" cy="2852737"/>
-          </a:xfrm>
-        </p:spPr>
-        <p:txBody>
-          <a:bodyPr anchor="b"/>
+            <a:off x="594360" y="753534"/>
+            <a:ext cx="7955280" cy="2801935"/>
+          </a:xfrm>
+        </p:spPr>
+        <p:txBody>
+          <a:bodyPr anchor="b">
+            <a:normAutofit/>
+          </a:bodyPr>
           <a:lstStyle>
-            <a:lvl1pPr>
-              <a:defRPr sz="6000"/>
+            <a:lvl1pPr algn="r">
+              <a:defRPr sz="4000"/>
             </a:lvl1pPr>
           </a:lstStyle>
           <a:p>
@@ -901,18 +3640,22 @@
         </p:nvSpPr>
         <p:spPr>
           <a:xfrm>
-            <a:off x="623888" y="4589464"/>
-            <a:ext cx="7886700" cy="1500187"/>
-          </a:xfrm>
-        </p:spPr>
-        <p:txBody>
-          <a:bodyPr/>
+            <a:off x="594360" y="3641726"/>
+            <a:ext cx="7955281" cy="1354134"/>
+          </a:xfrm>
+        </p:spPr>
+        <p:txBody>
+          <a:bodyPr>
+            <a:normAutofit/>
+          </a:bodyPr>
           <a:lstStyle>
-            <a:lvl1pPr marL="0" indent="0">
-              <a:buNone/>
-              <a:defRPr sz="2400">
+            <a:lvl1pPr marL="0" indent="0" algn="r">
+              <a:buNone/>
+              <a:defRPr sz="2200">
                 <a:solidFill>
-                  <a:schemeClr val="tx1"/>
+                  <a:schemeClr val="tx1">
+                    <a:tint val="75000"/>
+                  </a:schemeClr>
                 </a:solidFill>
               </a:defRPr>
             </a:lvl1pPr>
@@ -1016,14 +3759,23 @@
             <p:ph type="dt" sz="half" idx="10"/>
           </p:nvPr>
         </p:nvSpPr>
-        <p:spPr/>
-        <p:txBody>
-          <a:bodyPr/>
-          <a:lstStyle/>
+        <p:spPr>
+          <a:xfrm>
+            <a:off x="5562176" y="381001"/>
+            <a:ext cx="2183130" cy="365125"/>
+          </a:xfrm>
+        </p:spPr>
+        <p:txBody>
+          <a:bodyPr/>
+          <a:lstStyle>
+            <a:lvl1pPr algn="r">
+              <a:defRPr/>
+            </a:lvl1pPr>
+          </a:lstStyle>
           <a:p>
             <a:fld id="{5BCAD085-E8A6-8845-BD4E-CB4CCA059FC4}" type="datetimeFigureOut">
               <a:rPr lang="en-US" smtClean="0"/>
-              <a:t>4/29/2026</a:t>
+              <a:t>5/11/2026</a:t>
             </a:fld>
             <a:endParaRPr lang="en-US"/>
           </a:p>
@@ -1039,7 +3791,12 @@
             <p:ph type="ftr" sz="quarter" idx="11"/>
           </p:nvPr>
         </p:nvSpPr>
-        <p:spPr/>
+        <p:spPr>
+          <a:xfrm>
+            <a:off x="594360" y="381001"/>
+            <a:ext cx="4830656" cy="365125"/>
+          </a:xfrm>
+        </p:spPr>
         <p:txBody>
           <a:bodyPr/>
           <a:lstStyle/>
@@ -1058,7 +3815,12 @@
             <p:ph type="sldNum" sz="quarter" idx="12"/>
           </p:nvPr>
         </p:nvSpPr>
-        <p:spPr/>
+        <p:spPr>
+          <a:xfrm>
+            <a:off x="7882466" y="381001"/>
+            <a:ext cx="667173" cy="365125"/>
+          </a:xfrm>
+        </p:spPr>
         <p:txBody>
           <a:bodyPr/>
           <a:lstStyle/>
@@ -1074,7 +3836,7 @@
     </p:spTree>
     <p:extLst>
       <p:ext uri="{BB962C8B-B14F-4D97-AF65-F5344CB8AC3E}">
-        <p14:creationId xmlns:p14="http://schemas.microsoft.com/office/powerpoint/2010/main" val="2450823910"/>
+        <p14:creationId xmlns:p14="http://schemas.microsoft.com/office/powerpoint/2010/main" val="2170931507"/>
       </p:ext>
     </p:extLst>
   </p:cSld>
@@ -1136,8 +3898,8 @@
         </p:nvSpPr>
         <p:spPr>
           <a:xfrm>
-            <a:off x="628650" y="1825625"/>
-            <a:ext cx="3886200" cy="4351338"/>
+            <a:off x="594360" y="2194560"/>
+            <a:ext cx="3910579" cy="4069080"/>
           </a:xfrm>
         </p:spPr>
         <p:txBody>
@@ -1193,8 +3955,8 @@
         </p:nvSpPr>
         <p:spPr>
           <a:xfrm>
-            <a:off x="4629150" y="1825625"/>
-            <a:ext cx="3886200" cy="4351338"/>
+            <a:off x="4642099" y="2194560"/>
+            <a:ext cx="3907540" cy="4069080"/>
           </a:xfrm>
         </p:spPr>
         <p:txBody>
@@ -1255,7 +4017,7 @@
           <a:p>
             <a:fld id="{5BCAD085-E8A6-8845-BD4E-CB4CCA059FC4}" type="datetimeFigureOut">
               <a:rPr lang="en-US" smtClean="0"/>
-              <a:t>4/29/2026</a:t>
+              <a:t>5/11/2026</a:t>
             </a:fld>
             <a:endParaRPr lang="en-US"/>
           </a:p>
@@ -1306,7 +4068,7 @@
     </p:spTree>
     <p:extLst>
       <p:ext uri="{BB962C8B-B14F-4D97-AF65-F5344CB8AC3E}">
-        <p14:creationId xmlns:p14="http://schemas.microsoft.com/office/powerpoint/2010/main" val="275177693"/>
+        <p14:creationId xmlns:p14="http://schemas.microsoft.com/office/powerpoint/2010/main" val="2336980435"/>
       </p:ext>
     </p:extLst>
   </p:cSld>
@@ -1345,8 +4107,8 @@
         </p:nvSpPr>
         <p:spPr>
           <a:xfrm>
-            <a:off x="629841" y="365126"/>
-            <a:ext cx="7886700" cy="1325563"/>
+            <a:off x="2171700" y="762000"/>
+            <a:ext cx="6377940" cy="1295400"/>
           </a:xfrm>
         </p:spPr>
         <p:txBody>
@@ -1373,16 +4135,22 @@
         </p:nvSpPr>
         <p:spPr>
           <a:xfrm>
-            <a:off x="629842" y="1681163"/>
-            <a:ext cx="3868340" cy="823912"/>
-          </a:xfrm>
-        </p:spPr>
-        <p:txBody>
-          <a:bodyPr anchor="b"/>
+            <a:off x="821279" y="2183802"/>
+            <a:ext cx="3683659" cy="823912"/>
+          </a:xfrm>
+        </p:spPr>
+        <p:txBody>
+          <a:bodyPr anchor="b">
+            <a:normAutofit/>
+          </a:bodyPr>
           <a:lstStyle>
             <a:lvl1pPr marL="0" indent="0">
               <a:buNone/>
-              <a:defRPr sz="2400" b="1"/>
+              <a:defRPr sz="2800" b="0">
+                <a:solidFill>
+                  <a:schemeClr val="tx1"/>
+                </a:solidFill>
+              </a:defRPr>
             </a:lvl1pPr>
             <a:lvl2pPr marL="457200" indent="0">
               <a:buNone/>
@@ -1438,8 +4206,8 @@
         </p:nvSpPr>
         <p:spPr>
           <a:xfrm>
-            <a:off x="629842" y="2505075"/>
-            <a:ext cx="3868340" cy="3684588"/>
+            <a:off x="594359" y="3132667"/>
+            <a:ext cx="3910579" cy="3130973"/>
           </a:xfrm>
         </p:spPr>
         <p:txBody>
@@ -1495,16 +4263,22 @@
         </p:nvSpPr>
         <p:spPr>
           <a:xfrm>
-            <a:off x="4629150" y="1681163"/>
-            <a:ext cx="3887391" cy="823912"/>
-          </a:xfrm>
-        </p:spPr>
-        <p:txBody>
-          <a:bodyPr anchor="b"/>
+            <a:off x="4869018" y="2183802"/>
+            <a:ext cx="3680621" cy="823912"/>
+          </a:xfrm>
+        </p:spPr>
+        <p:txBody>
+          <a:bodyPr anchor="b">
+            <a:normAutofit/>
+          </a:bodyPr>
           <a:lstStyle>
             <a:lvl1pPr marL="0" indent="0">
               <a:buNone/>
-              <a:defRPr sz="2400" b="1"/>
+              <a:defRPr sz="2800" b="0">
+                <a:solidFill>
+                  <a:schemeClr val="tx1"/>
+                </a:solidFill>
+              </a:defRPr>
             </a:lvl1pPr>
             <a:lvl2pPr marL="457200" indent="0">
               <a:buNone/>
@@ -1560,8 +4334,8 @@
         </p:nvSpPr>
         <p:spPr>
           <a:xfrm>
-            <a:off x="4629150" y="2505075"/>
-            <a:ext cx="3887391" cy="3684588"/>
+            <a:off x="4642098" y="3132667"/>
+            <a:ext cx="3907541" cy="3130973"/>
           </a:xfrm>
         </p:spPr>
         <p:txBody>
@@ -1622,7 +4396,7 @@
           <a:p>
             <a:fld id="{5BCAD085-E8A6-8845-BD4E-CB4CCA059FC4}" type="datetimeFigureOut">
               <a:rPr lang="en-US" smtClean="0"/>
-              <a:t>4/29/2026</a:t>
+              <a:t>5/11/2026</a:t>
             </a:fld>
             <a:endParaRPr lang="en-US"/>
           </a:p>
@@ -1673,7 +4447,7 @@
     </p:spTree>
     <p:extLst>
       <p:ext uri="{BB962C8B-B14F-4D97-AF65-F5344CB8AC3E}">
-        <p14:creationId xmlns:p14="http://schemas.microsoft.com/office/powerpoint/2010/main" val="1573410765"/>
+        <p14:creationId xmlns:p14="http://schemas.microsoft.com/office/powerpoint/2010/main" val="561801241"/>
       </p:ext>
     </p:extLst>
   </p:cSld>
@@ -1740,7 +4514,7 @@
           <a:p>
             <a:fld id="{5BCAD085-E8A6-8845-BD4E-CB4CCA059FC4}" type="datetimeFigureOut">
               <a:rPr lang="en-US" smtClean="0"/>
-              <a:t>4/29/2026</a:t>
+              <a:t>5/11/2026</a:t>
             </a:fld>
             <a:endParaRPr lang="en-US"/>
           </a:p>
@@ -1791,7 +4565,7 @@
     </p:spTree>
     <p:extLst>
       <p:ext uri="{BB962C8B-B14F-4D97-AF65-F5344CB8AC3E}">
-        <p14:creationId xmlns:p14="http://schemas.microsoft.com/office/powerpoint/2010/main" val="4129369356"/>
+        <p14:creationId xmlns:p14="http://schemas.microsoft.com/office/powerpoint/2010/main" val="2404121203"/>
       </p:ext>
     </p:extLst>
   </p:cSld>
@@ -1835,7 +4609,7 @@
           <a:p>
             <a:fld id="{5BCAD085-E8A6-8845-BD4E-CB4CCA059FC4}" type="datetimeFigureOut">
               <a:rPr lang="en-US" smtClean="0"/>
-              <a:t>4/29/2026</a:t>
+              <a:t>5/11/2026</a:t>
             </a:fld>
             <a:endParaRPr lang="en-US"/>
           </a:p>
@@ -1886,7 +4660,7 @@
     </p:spTree>
     <p:extLst>
       <p:ext uri="{BB962C8B-B14F-4D97-AF65-F5344CB8AC3E}">
-        <p14:creationId xmlns:p14="http://schemas.microsoft.com/office/powerpoint/2010/main" val="3044212949"/>
+        <p14:creationId xmlns:p14="http://schemas.microsoft.com/office/powerpoint/2010/main" val="710143774"/>
       </p:ext>
     </p:extLst>
   </p:cSld>
@@ -1925,14 +4699,14 @@
         </p:nvSpPr>
         <p:spPr>
           <a:xfrm>
-            <a:off x="629841" y="457200"/>
-            <a:ext cx="2949178" cy="1600200"/>
+            <a:off x="594360" y="1524000"/>
+            <a:ext cx="3086100" cy="1600200"/>
           </a:xfrm>
         </p:spPr>
         <p:txBody>
           <a:bodyPr anchor="b"/>
           <a:lstStyle>
-            <a:lvl1pPr>
+            <a:lvl1pPr algn="l">
               <a:defRPr sz="3200"/>
             </a:lvl1pPr>
           </a:lstStyle>
@@ -1957,41 +4731,13 @@
         </p:nvSpPr>
         <p:spPr>
           <a:xfrm>
-            <a:off x="3887391" y="987426"/>
-            <a:ext cx="4629150" cy="4873625"/>
-          </a:xfrm>
-        </p:spPr>
-        <p:txBody>
-          <a:bodyPr/>
-          <a:lstStyle>
-            <a:lvl1pPr>
-              <a:defRPr sz="3200"/>
-            </a:lvl1pPr>
-            <a:lvl2pPr>
-              <a:defRPr sz="2800"/>
-            </a:lvl2pPr>
-            <a:lvl3pPr>
-              <a:defRPr sz="2400"/>
-            </a:lvl3pPr>
-            <a:lvl4pPr>
-              <a:defRPr sz="2000"/>
-            </a:lvl4pPr>
-            <a:lvl5pPr>
-              <a:defRPr sz="2000"/>
-            </a:lvl5pPr>
-            <a:lvl6pPr>
-              <a:defRPr sz="2000"/>
-            </a:lvl6pPr>
-            <a:lvl7pPr>
-              <a:defRPr sz="2000"/>
-            </a:lvl7pPr>
-            <a:lvl8pPr>
-              <a:defRPr sz="2000"/>
-            </a:lvl8pPr>
-            <a:lvl9pPr>
-              <a:defRPr sz="2000"/>
-            </a:lvl9pPr>
-          </a:lstStyle>
+            <a:off x="3886200" y="746760"/>
+            <a:ext cx="4663440" cy="5516880"/>
+          </a:xfrm>
+        </p:spPr>
+        <p:txBody>
+          <a:bodyPr anchor="ctr"/>
+          <a:lstStyle/>
           <a:p>
             <a:pPr lvl="0"/>
             <a:r>
@@ -2042,8 +4788,8 @@
         </p:nvSpPr>
         <p:spPr>
           <a:xfrm>
-            <a:off x="629841" y="2057400"/>
-            <a:ext cx="2949178" cy="3811588"/>
+            <a:off x="594360" y="3124200"/>
+            <a:ext cx="3086100" cy="3139440"/>
           </a:xfrm>
         </p:spPr>
         <p:txBody>
@@ -2112,7 +4858,7 @@
           <a:p>
             <a:fld id="{5BCAD085-E8A6-8845-BD4E-CB4CCA059FC4}" type="datetimeFigureOut">
               <a:rPr lang="en-US" smtClean="0"/>
-              <a:t>4/29/2026</a:t>
+              <a:t>5/11/2026</a:t>
             </a:fld>
             <a:endParaRPr lang="en-US"/>
           </a:p>
@@ -2163,7 +4909,7 @@
     </p:spTree>
     <p:extLst>
       <p:ext uri="{BB962C8B-B14F-4D97-AF65-F5344CB8AC3E}">
-        <p14:creationId xmlns:p14="http://schemas.microsoft.com/office/powerpoint/2010/main" val="1846729653"/>
+        <p14:creationId xmlns:p14="http://schemas.microsoft.com/office/powerpoint/2010/main" val="3389950044"/>
       </p:ext>
     </p:extLst>
   </p:cSld>
@@ -2202,14 +4948,14 @@
         </p:nvSpPr>
         <p:spPr>
           <a:xfrm>
-            <a:off x="629841" y="457200"/>
-            <a:ext cx="2949178" cy="1600200"/>
+            <a:off x="594360" y="1524000"/>
+            <a:ext cx="4075730" cy="1600200"/>
           </a:xfrm>
         </p:spPr>
         <p:txBody>
           <a:bodyPr anchor="b"/>
           <a:lstStyle>
-            <a:lvl1pPr>
+            <a:lvl1pPr algn="l">
               <a:defRPr sz="3200"/>
             </a:lvl1pPr>
           </a:lstStyle>
@@ -2234,8 +4980,8 @@
         </p:nvSpPr>
         <p:spPr>
           <a:xfrm>
-            <a:off x="3887391" y="987426"/>
-            <a:ext cx="4629150" cy="4873625"/>
+            <a:off x="4877524" y="751242"/>
+            <a:ext cx="3674234" cy="5512398"/>
           </a:xfrm>
         </p:spPr>
         <p:txBody>
@@ -2299,8 +5045,8 @@
         </p:nvSpPr>
         <p:spPr>
           <a:xfrm>
-            <a:off x="629841" y="2057400"/>
-            <a:ext cx="2949178" cy="3811588"/>
+            <a:off x="594360" y="3124200"/>
+            <a:ext cx="4075730" cy="3139440"/>
           </a:xfrm>
         </p:spPr>
         <p:txBody>
@@ -2369,7 +5115,7 @@
           <a:p>
             <a:fld id="{5BCAD085-E8A6-8845-BD4E-CB4CCA059FC4}" type="datetimeFigureOut">
               <a:rPr lang="en-US" smtClean="0"/>
-              <a:t>4/29/2026</a:t>
+              <a:t>5/11/2026</a:t>
             </a:fld>
             <a:endParaRPr lang="en-US"/>
           </a:p>
@@ -2420,7 +5166,7 @@
     </p:spTree>
     <p:extLst>
       <p:ext uri="{BB962C8B-B14F-4D97-AF65-F5344CB8AC3E}">
-        <p14:creationId xmlns:p14="http://schemas.microsoft.com/office/powerpoint/2010/main" val="2526148817"/>
+        <p14:creationId xmlns:p14="http://schemas.microsoft.com/office/powerpoint/2010/main" val="2649095203"/>
       </p:ext>
     </p:extLst>
   </p:cSld>
@@ -2452,25 +5198,55 @@
           <a:chExt cx="0" cy="0"/>
         </a:xfrm>
       </p:grpSpPr>
-      <p:sp>
-        <p:nvSpPr>
-          <p:cNvPr id="2" name="Title Placeholder 1"/>
-          <p:cNvSpPr>
-            <a:spLocks noGrp="1"/>
-          </p:cNvSpPr>
-          <p:nvPr>
-            <p:ph type="title"/>
-          </p:nvPr>
-        </p:nvSpPr>
-        <p:spPr>
-          <a:xfrm>
-            <a:off x="628650" y="365126"/>
-            <a:ext cx="7886700" cy="1325563"/>
+      <p:pic>
+        <p:nvPicPr>
+          <p:cNvPr id="8" name="Picture 7" descr="C2-HD-TOP.png"/>
+          <p:cNvPicPr>
+            <a:picLocks noChangeAspect="1"/>
+          </p:cNvPicPr>
+          <p:nvPr/>
+        </p:nvPicPr>
+        <p:blipFill>
+          <a:blip r:embed="rId19">
+            <a:extLst>
+              <a:ext uri="{28A0092B-C50C-407E-A947-70E740481C1C}">
+                <a14:useLocalDpi xmlns:a14="http://schemas.microsoft.com/office/drawing/2010/main" val="0"/>
+              </a:ext>
+            </a:extLst>
+          </a:blip>
+          <a:stretch>
+            <a:fillRect/>
+          </a:stretch>
+        </p:blipFill>
+        <p:spPr>
+          <a:xfrm>
+            <a:off x="0" y="0"/>
+            <a:ext cx="9144000" cy="1081088"/>
           </a:xfrm>
           <a:prstGeom prst="rect">
             <a:avLst/>
           </a:prstGeom>
         </p:spPr>
+      </p:pic>
+      <p:sp>
+        <p:nvSpPr>
+          <p:cNvPr id="2" name="Title Placeholder 1"/>
+          <p:cNvSpPr>
+            <a:spLocks noGrp="1"/>
+          </p:cNvSpPr>
+          <p:nvPr>
+            <p:ph type="title"/>
+          </p:nvPr>
+        </p:nvSpPr>
+        <p:spPr>
+          <a:xfrm>
+            <a:off x="2171700" y="764373"/>
+            <a:ext cx="6377940" cy="1293028"/>
+          </a:xfrm>
+          <a:prstGeom prst="rect">
+            <a:avLst/>
+          </a:prstGeom>
+        </p:spPr>
         <p:txBody>
           <a:bodyPr vert="horz" lIns="91440" tIns="45720" rIns="91440" bIns="45720" rtlCol="0" anchor="ctr">
             <a:normAutofit/>
@@ -2497,8 +5273,8 @@
         </p:nvSpPr>
         <p:spPr>
           <a:xfrm>
-            <a:off x="628650" y="1825625"/>
-            <a:ext cx="7886700" cy="4351338"/>
+            <a:off x="594360" y="2194560"/>
+            <a:ext cx="7955280" cy="4069080"/>
           </a:xfrm>
           <a:prstGeom prst="rect">
             <a:avLst/>
@@ -2559,8 +5335,8 @@
         </p:nvSpPr>
         <p:spPr>
           <a:xfrm>
-            <a:off x="628650" y="6356351"/>
-            <a:ext cx="2057400" cy="365125"/>
+            <a:off x="6412230" y="6356351"/>
+            <a:ext cx="2137410" cy="365125"/>
           </a:xfrm>
           <a:prstGeom prst="rect">
             <a:avLst/>
@@ -2569,8 +5345,8 @@
         <p:txBody>
           <a:bodyPr vert="horz" lIns="91440" tIns="45720" rIns="91440" bIns="45720" rtlCol="0" anchor="ctr"/>
           <a:lstStyle>
-            <a:lvl1pPr algn="l">
-              <a:defRPr sz="1200">
+            <a:lvl1pPr algn="r">
+              <a:defRPr sz="1050">
                 <a:solidFill>
                   <a:schemeClr val="tx1">
                     <a:tint val="75000"/>
@@ -2582,7 +5358,7 @@
           <a:p>
             <a:fld id="{5BCAD085-E8A6-8845-BD4E-CB4CCA059FC4}" type="datetimeFigureOut">
               <a:rPr lang="en-US" smtClean="0"/>
-              <a:t>4/29/2026</a:t>
+              <a:t>5/11/2026</a:t>
             </a:fld>
             <a:endParaRPr lang="en-US"/>
           </a:p>
@@ -2600,8 +5376,8 @@
         </p:nvSpPr>
         <p:spPr>
           <a:xfrm>
-            <a:off x="3028950" y="6356351"/>
-            <a:ext cx="3086100" cy="365125"/>
+            <a:off x="594360" y="6355846"/>
+            <a:ext cx="5680710" cy="365125"/>
           </a:xfrm>
           <a:prstGeom prst="rect">
             <a:avLst/>
@@ -2610,8 +5386,8 @@
         <p:txBody>
           <a:bodyPr vert="horz" lIns="91440" tIns="45720" rIns="91440" bIns="45720" rtlCol="0" anchor="ctr"/>
           <a:lstStyle>
-            <a:lvl1pPr algn="ctr">
-              <a:defRPr sz="1200">
+            <a:lvl1pPr algn="l">
+              <a:defRPr sz="1050">
                 <a:solidFill>
                   <a:schemeClr val="tx1">
                     <a:tint val="75000"/>
@@ -2637,8 +5413,8 @@
         </p:nvSpPr>
         <p:spPr>
           <a:xfrm>
-            <a:off x="6457950" y="6356351"/>
-            <a:ext cx="2057400" cy="365125"/>
+            <a:off x="6572250" y="381001"/>
+            <a:ext cx="1977390" cy="365125"/>
           </a:xfrm>
           <a:prstGeom prst="rect">
             <a:avLst/>
@@ -2648,7 +5424,7 @@
           <a:bodyPr vert="horz" lIns="91440" tIns="45720" rIns="91440" bIns="45720" rtlCol="0" anchor="ctr"/>
           <a:lstStyle>
             <a:lvl1pPr algn="r">
-              <a:defRPr sz="1200">
+              <a:defRPr sz="1050">
                 <a:solidFill>
                   <a:schemeClr val="tx1">
                     <a:tint val="75000"/>
@@ -2669,27 +5445,33 @@
     </p:spTree>
     <p:extLst>
       <p:ext uri="{BB962C8B-B14F-4D97-AF65-F5344CB8AC3E}">
-        <p14:creationId xmlns:p14="http://schemas.microsoft.com/office/powerpoint/2010/main" val="1482498028"/>
+        <p14:creationId xmlns:p14="http://schemas.microsoft.com/office/powerpoint/2010/main" val="2397732274"/>
       </p:ext>
     </p:extLst>
   </p:cSld>
-  <p:clrMap bg1="dk1" tx1="lt1" bg2="dk2" tx2="lt2" accent1="accent1" accent2="accent2" accent3="accent3" accent4="accent4" accent5="accent5" accent6="accent6" hlink="hlink" folHlink="folHlink"/>
+  <p:clrMap bg1="lt1" tx1="dk1" bg2="lt2" tx2="dk2" accent1="accent1" accent2="accent2" accent3="accent3" accent4="accent4" accent5="accent5" accent6="accent6" hlink="hlink" folHlink="folHlink"/>
   <p:sldLayoutIdLst>
-    <p:sldLayoutId id="2147483691" r:id="rId1"/>
-    <p:sldLayoutId id="2147483692" r:id="rId2"/>
-    <p:sldLayoutId id="2147483693" r:id="rId3"/>
-    <p:sldLayoutId id="2147483694" r:id="rId4"/>
-    <p:sldLayoutId id="2147483695" r:id="rId5"/>
-    <p:sldLayoutId id="2147483696" r:id="rId6"/>
-    <p:sldLayoutId id="2147483697" r:id="rId7"/>
-    <p:sldLayoutId id="2147483698" r:id="rId8"/>
-    <p:sldLayoutId id="2147483699" r:id="rId9"/>
-    <p:sldLayoutId id="2147483700" r:id="rId10"/>
-    <p:sldLayoutId id="2147483701" r:id="rId11"/>
+    <p:sldLayoutId id="2147483769" r:id="rId1"/>
+    <p:sldLayoutId id="2147483770" r:id="rId2"/>
+    <p:sldLayoutId id="2147483771" r:id="rId3"/>
+    <p:sldLayoutId id="2147483772" r:id="rId4"/>
+    <p:sldLayoutId id="2147483773" r:id="rId5"/>
+    <p:sldLayoutId id="2147483774" r:id="rId6"/>
+    <p:sldLayoutId id="2147483775" r:id="rId7"/>
+    <p:sldLayoutId id="2147483776" r:id="rId8"/>
+    <p:sldLayoutId id="2147483777" r:id="rId9"/>
+    <p:sldLayoutId id="2147483778" r:id="rId10"/>
+    <p:sldLayoutId id="2147483779" r:id="rId11"/>
+    <p:sldLayoutId id="2147483780" r:id="rId12"/>
+    <p:sldLayoutId id="2147483781" r:id="rId13"/>
+    <p:sldLayoutId id="2147483782" r:id="rId14"/>
+    <p:sldLayoutId id="2147483783" r:id="rId15"/>
+    <p:sldLayoutId id="2147483784" r:id="rId16"/>
+    <p:sldLayoutId id="2147483785" r:id="rId17"/>
   </p:sldLayoutIdLst>
   <p:txStyles>
     <p:titleStyle>
-      <a:lvl1pPr algn="l" defTabSz="914400" rtl="0" eaLnBrk="1" latinLnBrk="0" hangingPunct="1">
+      <a:lvl1pPr algn="r" defTabSz="914400" rtl="0" eaLnBrk="1" latinLnBrk="0" hangingPunct="1">
         <a:lnSpc>
           <a:spcPct val="90000"/>
         </a:lnSpc>
@@ -2697,7 +5479,7 @@
           <a:spcPct val="0"/>
         </a:spcBef>
         <a:buNone/>
-        <a:defRPr sz="4400" kern="1200">
+        <a:defRPr sz="4000" kern="1200" cap="all" baseline="0">
           <a:solidFill>
             <a:schemeClr val="tx1"/>
           </a:solidFill>
@@ -2717,7 +5499,7 @@
         </a:spcBef>
         <a:buFont typeface="Arial" panose="020B0604020202020204" pitchFamily="34" charset="0"/>
         <a:buChar char="•"/>
-        <a:defRPr sz="2800" kern="1200">
+        <a:defRPr sz="2200" kern="1200">
           <a:solidFill>
             <a:schemeClr val="tx1"/>
           </a:solidFill>
@@ -2735,7 +5517,7 @@
         </a:spcBef>
         <a:buFont typeface="Arial" panose="020B0604020202020204" pitchFamily="34" charset="0"/>
         <a:buChar char="•"/>
-        <a:defRPr sz="2400" kern="1200">
+        <a:defRPr sz="2000" kern="1200">
           <a:solidFill>
             <a:schemeClr val="tx1"/>
           </a:solidFill>
@@ -2753,7 +5535,7 @@
         </a:spcBef>
         <a:buFont typeface="Arial" panose="020B0604020202020204" pitchFamily="34" charset="0"/>
         <a:buChar char="•"/>
-        <a:defRPr sz="2000" kern="1200">
+        <a:defRPr sz="1800" kern="1200">
           <a:solidFill>
             <a:schemeClr val="tx1"/>
           </a:solidFill>
@@ -2771,7 +5553,7 @@
         </a:spcBef>
         <a:buFont typeface="Arial" panose="020B0604020202020204" pitchFamily="34" charset="0"/>
         <a:buChar char="•"/>
-        <a:defRPr sz="1800" kern="1200">
+        <a:defRPr sz="1600" kern="1200">
           <a:solidFill>
             <a:schemeClr val="tx1"/>
           </a:solidFill>
@@ -2789,7 +5571,7 @@
         </a:spcBef>
         <a:buFont typeface="Arial" panose="020B0604020202020204" pitchFamily="34" charset="0"/>
         <a:buChar char="•"/>
-        <a:defRPr sz="1800" kern="1200">
+        <a:defRPr sz="1600" kern="1200">
           <a:solidFill>
             <a:schemeClr val="tx1"/>
           </a:solidFill>
@@ -2807,7 +5589,7 @@
         </a:spcBef>
         <a:buFont typeface="Arial" panose="020B0604020202020204" pitchFamily="34" charset="0"/>
         <a:buChar char="•"/>
-        <a:defRPr sz="1800" kern="1200">
+        <a:defRPr sz="1600" kern="1200">
           <a:solidFill>
             <a:schemeClr val="tx1"/>
           </a:solidFill>
@@ -2825,7 +5607,7 @@
         </a:spcBef>
         <a:buFont typeface="Arial" panose="020B0604020202020204" pitchFamily="34" charset="0"/>
         <a:buChar char="•"/>
-        <a:defRPr sz="1800" kern="1200">
+        <a:defRPr sz="1600" kern="1200">
           <a:solidFill>
             <a:schemeClr val="tx1"/>
           </a:solidFill>
@@ -2843,7 +5625,7 @@
         </a:spcBef>
         <a:buFont typeface="Arial" panose="020B0604020202020204" pitchFamily="34" charset="0"/>
         <a:buChar char="•"/>
-        <a:defRPr sz="1800" kern="1200">
+        <a:defRPr sz="1600" kern="1200">
           <a:solidFill>
             <a:schemeClr val="tx1"/>
           </a:solidFill>
@@ -2861,7 +5643,7 @@
         </a:spcBef>
         <a:buFont typeface="Arial" panose="020B0604020202020204" pitchFamily="34" charset="0"/>
         <a:buChar char="•"/>
-        <a:defRPr sz="1800" kern="1200">
+        <a:defRPr sz="1600" kern="1200">
           <a:solidFill>
             <a:schemeClr val="tx1"/>
           </a:solidFill>
@@ -2994,10 +5776,15 @@
             <a:spLocks noGrp="1"/>
           </p:cNvSpPr>
           <p:nvPr>
-            <p:ph type="ctrTitle"/>
-          </p:nvPr>
-        </p:nvSpPr>
-        <p:spPr/>
+            <p:ph type="title"/>
+          </p:nvPr>
+        </p:nvSpPr>
+        <p:spPr>
+          <a:xfrm>
+            <a:off x="962025" y="648321"/>
+            <a:ext cx="7587615" cy="1293028"/>
+          </a:xfrm>
+        </p:spPr>
         <p:txBody>
           <a:bodyPr>
             <a:normAutofit fontScale="90000"/>
@@ -3005,8 +5792,14 @@
           <a:lstStyle/>
           <a:p>
             <a:r>
-              <a:t>College Website - Backend Architecture &amp; Admin Panel</a:t>
-            </a:r>
+              <a:rPr dirty="0"/>
+              <a:t>College Website - Backend </a:t>
+            </a:r>
+            <a:r>
+              <a:rPr lang="en-US" dirty="0"/>
+              <a:t>development using django</a:t>
+            </a:r>
+            <a:endParaRPr dirty="0"/>
           </a:p>
         </p:txBody>
       </p:sp>
@@ -3017,22 +5810,129 @@
             <a:spLocks noGrp="1"/>
           </p:cNvSpPr>
           <p:nvPr>
-            <p:ph type="subTitle" idx="1"/>
-          </p:nvPr>
-        </p:nvSpPr>
-        <p:spPr/>
-        <p:txBody>
-          <a:bodyPr/>
-          <a:lstStyle/>
-          <a:p>
-            <a:r>
-              <a:t>Powered by Django</a:t>
-            </a:r>
-          </a:p>
-          <a:p>
-            <a:r>
-              <a:t>Dynamic Content Management</a:t>
-            </a:r>
+            <p:ph sz="half" idx="1"/>
+          </p:nvPr>
+        </p:nvSpPr>
+        <p:spPr>
+          <a:xfrm>
+            <a:off x="818347" y="3848100"/>
+            <a:ext cx="3685073" cy="2244129"/>
+          </a:xfrm>
+        </p:spPr>
+        <p:txBody>
+          <a:bodyPr/>
+          <a:lstStyle/>
+          <a:p>
+            <a:pPr marL="0" indent="0" algn="ctr">
+              <a:buNone/>
+            </a:pPr>
+            <a:r>
+              <a:rPr lang="en-US" dirty="0"/>
+              <a:t>Guide </a:t>
+            </a:r>
+          </a:p>
+          <a:p>
+            <a:pPr marL="0" indent="0" algn="ctr">
+              <a:buNone/>
+            </a:pPr>
+            <a:r>
+              <a:rPr lang="en-US" dirty="0"/>
+              <a:t>  Mr. Shreenivas  </a:t>
+            </a:r>
+            <a:r>
+              <a:rPr lang="en-US" sz="1000" b="1" dirty="0"/>
+              <a:t>MCA</a:t>
+            </a:r>
+          </a:p>
+          <a:p>
+            <a:pPr marL="0" indent="0" algn="ctr">
+              <a:buNone/>
+            </a:pPr>
+            <a:r>
+              <a:rPr lang="en-US" sz="2000" dirty="0"/>
+              <a:t>SIGS, Tumkur </a:t>
+            </a:r>
+            <a:endParaRPr lang="en-US" sz="1000" dirty="0"/>
+          </a:p>
+          <a:p>
+            <a:pPr marL="0" indent="0" algn="r">
+              <a:buNone/>
+            </a:pPr>
+            <a:endParaRPr lang="en-US" dirty="0"/>
+          </a:p>
+          <a:p>
+            <a:pPr algn="r"/>
+            <a:endParaRPr lang="en-US" dirty="0"/>
+          </a:p>
+        </p:txBody>
+      </p:sp>
+      <p:sp>
+        <p:nvSpPr>
+          <p:cNvPr id="4" name="Content Placeholder 3">
+            <a:extLst>
+              <a:ext uri="{FF2B5EF4-FFF2-40B4-BE49-F238E27FC236}">
+                <a16:creationId xmlns:a16="http://schemas.microsoft.com/office/drawing/2014/main" id="{7403AA4A-A508-85A0-5381-B3715D2A2885}"/>
+              </a:ext>
+            </a:extLst>
+          </p:cNvPr>
+          <p:cNvSpPr>
+            <a:spLocks noGrp="1"/>
+          </p:cNvSpPr>
+          <p:nvPr>
+            <p:ph sz="half" idx="2"/>
+          </p:nvPr>
+        </p:nvSpPr>
+        <p:spPr>
+          <a:xfrm>
+            <a:off x="4612007" y="3689326"/>
+            <a:ext cx="3989070" cy="2520353"/>
+          </a:xfrm>
+        </p:spPr>
+        <p:txBody>
+          <a:bodyPr/>
+          <a:lstStyle/>
+          <a:p>
+            <a:pPr marL="0" indent="0" algn="ctr">
+              <a:buNone/>
+            </a:pPr>
+            <a:r>
+              <a:rPr lang="en-US" dirty="0"/>
+              <a:t>Presented by </a:t>
+            </a:r>
+          </a:p>
+          <a:p>
+            <a:pPr marL="0" indent="0" algn="ctr">
+              <a:buNone/>
+            </a:pPr>
+            <a:r>
+              <a:rPr lang="en-US" dirty="0"/>
+              <a:t> Jai Keerthana G</a:t>
+            </a:r>
+          </a:p>
+          <a:p>
+            <a:pPr marL="0" indent="0" algn="ctr">
+              <a:buNone/>
+            </a:pPr>
+            <a:r>
+              <a:rPr lang="en-US" dirty="0"/>
+              <a:t>Final Year BCA </a:t>
+            </a:r>
+          </a:p>
+          <a:p>
+            <a:pPr marL="0" indent="0" algn="ctr">
+              <a:buNone/>
+            </a:pPr>
+            <a:r>
+              <a:rPr lang="en-US" sz="2400" dirty="0"/>
+              <a:t>SIGS , Tumkur </a:t>
+            </a:r>
+            <a:endParaRPr lang="en-US" sz="1050" dirty="0"/>
+          </a:p>
+          <a:p>
+            <a:pPr marL="0" indent="0" algn="ctr">
+              <a:buNone/>
+            </a:pPr>
+            <a:endParaRPr lang="en-US" dirty="0"/>
           </a:p>
         </p:txBody>
       </p:sp>
@@ -3041,6 +5941,1073 @@
   <p:clrMapOvr>
     <a:masterClrMapping/>
   </p:clrMapOvr>
+  <p:timing>
+    <p:tnLst>
+      <p:par>
+        <p:cTn id="1" dur="indefinite" restart="never" nodeType="tmRoot">
+          <p:childTnLst>
+            <p:seq concurrent="1" nextAc="seek">
+              <p:cTn id="2" dur="indefinite" nodeType="mainSeq">
+                <p:childTnLst>
+                  <p:par>
+                    <p:cTn id="3" fill="hold">
+                      <p:stCondLst>
+                        <p:cond delay="indefinite"/>
+                      </p:stCondLst>
+                      <p:childTnLst>
+                        <p:par>
+                          <p:cTn id="4" fill="hold">
+                            <p:stCondLst>
+                              <p:cond delay="0"/>
+                            </p:stCondLst>
+                            <p:childTnLst>
+                              <p:par>
+                                <p:cTn id="5" presetID="26" presetClass="entr" presetSubtype="0" fill="hold" nodeType="clickEffect">
+                                  <p:stCondLst>
+                                    <p:cond delay="0"/>
+                                  </p:stCondLst>
+                                  <p:childTnLst>
+                                    <p:set>
+                                      <p:cBhvr>
+                                        <p:cTn id="6" dur="1" fill="hold">
+                                          <p:stCondLst>
+                                            <p:cond delay="0"/>
+                                          </p:stCondLst>
+                                        </p:cTn>
+                                        <p:tgtEl>
+                                          <p:spTgt spid="3">
+                                            <p:txEl>
+                                              <p:pRg st="1" end="1"/>
+                                            </p:txEl>
+                                          </p:spTgt>
+                                        </p:tgtEl>
+                                        <p:attrNameLst>
+                                          <p:attrName>style.visibility</p:attrName>
+                                        </p:attrNameLst>
+                                      </p:cBhvr>
+                                      <p:to>
+                                        <p:strVal val="visible"/>
+                                      </p:to>
+                                    </p:set>
+                                    <p:animEffect transition="in" filter="wipe(down)">
+                                      <p:cBhvr>
+                                        <p:cTn id="7" dur="580">
+                                          <p:stCondLst>
+                                            <p:cond delay="0"/>
+                                          </p:stCondLst>
+                                        </p:cTn>
+                                        <p:tgtEl>
+                                          <p:spTgt spid="3">
+                                            <p:txEl>
+                                              <p:pRg st="1" end="1"/>
+                                            </p:txEl>
+                                          </p:spTgt>
+                                        </p:tgtEl>
+                                      </p:cBhvr>
+                                    </p:animEffect>
+                                    <p:anim calcmode="lin" valueType="num">
+                                      <p:cBhvr>
+                                        <p:cTn id="8" dur="1822" tmFilter="0,0; 0.14,0.36; 0.43,0.73; 0.71,0.91; 1.0,1.0">
+                                          <p:stCondLst>
+                                            <p:cond delay="0"/>
+                                          </p:stCondLst>
+                                        </p:cTn>
+                                        <p:tgtEl>
+                                          <p:spTgt spid="3">
+                                            <p:txEl>
+                                              <p:pRg st="1" end="1"/>
+                                            </p:txEl>
+                                          </p:spTgt>
+                                        </p:tgtEl>
+                                        <p:attrNameLst>
+                                          <p:attrName>ppt_x</p:attrName>
+                                        </p:attrNameLst>
+                                      </p:cBhvr>
+                                      <p:tavLst>
+                                        <p:tav tm="0">
+                                          <p:val>
+                                            <p:strVal val="#ppt_x-0.25"/>
+                                          </p:val>
+                                        </p:tav>
+                                        <p:tav tm="100000">
+                                          <p:val>
+                                            <p:strVal val="#ppt_x"/>
+                                          </p:val>
+                                        </p:tav>
+                                      </p:tavLst>
+                                    </p:anim>
+                                    <p:anim calcmode="lin" valueType="num">
+                                      <p:cBhvr>
+                                        <p:cTn id="9" dur="664" tmFilter="0.0,0.0; 0.25,0.07; 0.50,0.2; 0.75,0.467; 1.0,1.0">
+                                          <p:stCondLst>
+                                            <p:cond delay="0"/>
+                                          </p:stCondLst>
+                                        </p:cTn>
+                                        <p:tgtEl>
+                                          <p:spTgt spid="3">
+                                            <p:txEl>
+                                              <p:pRg st="1" end="1"/>
+                                            </p:txEl>
+                                          </p:spTgt>
+                                        </p:tgtEl>
+                                        <p:attrNameLst>
+                                          <p:attrName>ppt_y</p:attrName>
+                                        </p:attrNameLst>
+                                      </p:cBhvr>
+                                      <p:tavLst>
+                                        <p:tav tm="0" fmla="#ppt_y-sin(pi*$)/3">
+                                          <p:val>
+                                            <p:fltVal val="0.5"/>
+                                          </p:val>
+                                        </p:tav>
+                                        <p:tav tm="100000">
+                                          <p:val>
+                                            <p:fltVal val="1"/>
+                                          </p:val>
+                                        </p:tav>
+                                      </p:tavLst>
+                                    </p:anim>
+                                    <p:anim calcmode="lin" valueType="num">
+                                      <p:cBhvr>
+                                        <p:cTn id="10" dur="664" tmFilter="0, 0; 0.125,0.2665; 0.25,0.4; 0.375,0.465; 0.5,0.5;  0.625,0.535; 0.75,0.6; 0.875,0.7335; 1,1">
+                                          <p:stCondLst>
+                                            <p:cond delay="664"/>
+                                          </p:stCondLst>
+                                        </p:cTn>
+                                        <p:tgtEl>
+                                          <p:spTgt spid="3">
+                                            <p:txEl>
+                                              <p:pRg st="1" end="1"/>
+                                            </p:txEl>
+                                          </p:spTgt>
+                                        </p:tgtEl>
+                                        <p:attrNameLst>
+                                          <p:attrName>ppt_y</p:attrName>
+                                        </p:attrNameLst>
+                                      </p:cBhvr>
+                                      <p:tavLst>
+                                        <p:tav tm="0" fmla="#ppt_y-sin(pi*$)/9">
+                                          <p:val>
+                                            <p:fltVal val="0"/>
+                                          </p:val>
+                                        </p:tav>
+                                        <p:tav tm="100000">
+                                          <p:val>
+                                            <p:fltVal val="1"/>
+                                          </p:val>
+                                        </p:tav>
+                                      </p:tavLst>
+                                    </p:anim>
+                                    <p:anim calcmode="lin" valueType="num">
+                                      <p:cBhvr>
+                                        <p:cTn id="11" dur="332" tmFilter="0, 0; 0.125,0.2665; 0.25,0.4; 0.375,0.465; 0.5,0.5;  0.625,0.535; 0.75,0.6; 0.875,0.7335; 1,1">
+                                          <p:stCondLst>
+                                            <p:cond delay="1324"/>
+                                          </p:stCondLst>
+                                        </p:cTn>
+                                        <p:tgtEl>
+                                          <p:spTgt spid="3">
+                                            <p:txEl>
+                                              <p:pRg st="1" end="1"/>
+                                            </p:txEl>
+                                          </p:spTgt>
+                                        </p:tgtEl>
+                                        <p:attrNameLst>
+                                          <p:attrName>ppt_y</p:attrName>
+                                        </p:attrNameLst>
+                                      </p:cBhvr>
+                                      <p:tavLst>
+                                        <p:tav tm="0" fmla="#ppt_y-sin(pi*$)/27">
+                                          <p:val>
+                                            <p:fltVal val="0"/>
+                                          </p:val>
+                                        </p:tav>
+                                        <p:tav tm="100000">
+                                          <p:val>
+                                            <p:fltVal val="1"/>
+                                          </p:val>
+                                        </p:tav>
+                                      </p:tavLst>
+                                    </p:anim>
+                                    <p:anim calcmode="lin" valueType="num">
+                                      <p:cBhvr>
+                                        <p:cTn id="12" dur="164" tmFilter="0, 0; 0.125,0.2665; 0.25,0.4; 0.375,0.465; 0.5,0.5;  0.625,0.535; 0.75,0.6; 0.875,0.7335; 1,1">
+                                          <p:stCondLst>
+                                            <p:cond delay="1656"/>
+                                          </p:stCondLst>
+                                        </p:cTn>
+                                        <p:tgtEl>
+                                          <p:spTgt spid="3">
+                                            <p:txEl>
+                                              <p:pRg st="1" end="1"/>
+                                            </p:txEl>
+                                          </p:spTgt>
+                                        </p:tgtEl>
+                                        <p:attrNameLst>
+                                          <p:attrName>ppt_y</p:attrName>
+                                        </p:attrNameLst>
+                                      </p:cBhvr>
+                                      <p:tavLst>
+                                        <p:tav tm="0" fmla="#ppt_y-sin(pi*$)/81">
+                                          <p:val>
+                                            <p:fltVal val="0"/>
+                                          </p:val>
+                                        </p:tav>
+                                        <p:tav tm="100000">
+                                          <p:val>
+                                            <p:fltVal val="1"/>
+                                          </p:val>
+                                        </p:tav>
+                                      </p:tavLst>
+                                    </p:anim>
+                                    <p:animScale>
+                                      <p:cBhvr>
+                                        <p:cTn id="13" dur="26">
+                                          <p:stCondLst>
+                                            <p:cond delay="650"/>
+                                          </p:stCondLst>
+                                        </p:cTn>
+                                        <p:tgtEl>
+                                          <p:spTgt spid="3">
+                                            <p:txEl>
+                                              <p:pRg st="1" end="1"/>
+                                            </p:txEl>
+                                          </p:spTgt>
+                                        </p:tgtEl>
+                                      </p:cBhvr>
+                                      <p:to x="100000" y="60000"/>
+                                    </p:animScale>
+                                    <p:animScale>
+                                      <p:cBhvr>
+                                        <p:cTn id="14" dur="166" decel="50000">
+                                          <p:stCondLst>
+                                            <p:cond delay="676"/>
+                                          </p:stCondLst>
+                                        </p:cTn>
+                                        <p:tgtEl>
+                                          <p:spTgt spid="3">
+                                            <p:txEl>
+                                              <p:pRg st="1" end="1"/>
+                                            </p:txEl>
+                                          </p:spTgt>
+                                        </p:tgtEl>
+                                      </p:cBhvr>
+                                      <p:to x="100000" y="100000"/>
+                                    </p:animScale>
+                                    <p:animScale>
+                                      <p:cBhvr>
+                                        <p:cTn id="15" dur="26">
+                                          <p:stCondLst>
+                                            <p:cond delay="1312"/>
+                                          </p:stCondLst>
+                                        </p:cTn>
+                                        <p:tgtEl>
+                                          <p:spTgt spid="3">
+                                            <p:txEl>
+                                              <p:pRg st="1" end="1"/>
+                                            </p:txEl>
+                                          </p:spTgt>
+                                        </p:tgtEl>
+                                      </p:cBhvr>
+                                      <p:to x="100000" y="80000"/>
+                                    </p:animScale>
+                                    <p:animScale>
+                                      <p:cBhvr>
+                                        <p:cTn id="16" dur="166" decel="50000">
+                                          <p:stCondLst>
+                                            <p:cond delay="1338"/>
+                                          </p:stCondLst>
+                                        </p:cTn>
+                                        <p:tgtEl>
+                                          <p:spTgt spid="3">
+                                            <p:txEl>
+                                              <p:pRg st="1" end="1"/>
+                                            </p:txEl>
+                                          </p:spTgt>
+                                        </p:tgtEl>
+                                      </p:cBhvr>
+                                      <p:to x="100000" y="100000"/>
+                                    </p:animScale>
+                                    <p:animScale>
+                                      <p:cBhvr>
+                                        <p:cTn id="17" dur="26">
+                                          <p:stCondLst>
+                                            <p:cond delay="1642"/>
+                                          </p:stCondLst>
+                                        </p:cTn>
+                                        <p:tgtEl>
+                                          <p:spTgt spid="3">
+                                            <p:txEl>
+                                              <p:pRg st="1" end="1"/>
+                                            </p:txEl>
+                                          </p:spTgt>
+                                        </p:tgtEl>
+                                      </p:cBhvr>
+                                      <p:to x="100000" y="90000"/>
+                                    </p:animScale>
+                                    <p:animScale>
+                                      <p:cBhvr>
+                                        <p:cTn id="18" dur="166" decel="50000">
+                                          <p:stCondLst>
+                                            <p:cond delay="1668"/>
+                                          </p:stCondLst>
+                                        </p:cTn>
+                                        <p:tgtEl>
+                                          <p:spTgt spid="3">
+                                            <p:txEl>
+                                              <p:pRg st="1" end="1"/>
+                                            </p:txEl>
+                                          </p:spTgt>
+                                        </p:tgtEl>
+                                      </p:cBhvr>
+                                      <p:to x="100000" y="100000"/>
+                                    </p:animScale>
+                                    <p:animScale>
+                                      <p:cBhvr>
+                                        <p:cTn id="19" dur="26">
+                                          <p:stCondLst>
+                                            <p:cond delay="1808"/>
+                                          </p:stCondLst>
+                                        </p:cTn>
+                                        <p:tgtEl>
+                                          <p:spTgt spid="3">
+                                            <p:txEl>
+                                              <p:pRg st="1" end="1"/>
+                                            </p:txEl>
+                                          </p:spTgt>
+                                        </p:tgtEl>
+                                      </p:cBhvr>
+                                      <p:to x="100000" y="95000"/>
+                                    </p:animScale>
+                                    <p:animScale>
+                                      <p:cBhvr>
+                                        <p:cTn id="20" dur="166" decel="50000">
+                                          <p:stCondLst>
+                                            <p:cond delay="1834"/>
+                                          </p:stCondLst>
+                                        </p:cTn>
+                                        <p:tgtEl>
+                                          <p:spTgt spid="3">
+                                            <p:txEl>
+                                              <p:pRg st="1" end="1"/>
+                                            </p:txEl>
+                                          </p:spTgt>
+                                        </p:tgtEl>
+                                      </p:cBhvr>
+                                      <p:to x="100000" y="100000"/>
+                                    </p:animScale>
+                                  </p:childTnLst>
+                                </p:cTn>
+                              </p:par>
+                            </p:childTnLst>
+                          </p:cTn>
+                        </p:par>
+                      </p:childTnLst>
+                    </p:cTn>
+                  </p:par>
+                </p:childTnLst>
+              </p:cTn>
+              <p:prevCondLst>
+                <p:cond evt="onPrev" delay="0">
+                  <p:tgtEl>
+                    <p:sldTgt/>
+                  </p:tgtEl>
+                </p:cond>
+              </p:prevCondLst>
+              <p:nextCondLst>
+                <p:cond evt="onNext" delay="0">
+                  <p:tgtEl>
+                    <p:sldTgt/>
+                  </p:tgtEl>
+                </p:cond>
+              </p:nextCondLst>
+            </p:seq>
+          </p:childTnLst>
+        </p:cTn>
+      </p:par>
+    </p:tnLst>
+  </p:timing>
+</p:sld>
+</file>
+
+<file path=ppt/slides/slide10.xml><?xml version="1.0" encoding="utf-8"?>
+<p:sld xmlns:a="http://schemas.openxmlformats.org/drawingml/2006/main" xmlns:r="http://schemas.openxmlformats.org/officeDocument/2006/relationships" xmlns:p="http://schemas.openxmlformats.org/presentationml/2006/main">
+  <p:cSld>
+    <p:spTree>
+      <p:nvGrpSpPr>
+        <p:cNvPr id="1" name=""/>
+        <p:cNvGrpSpPr/>
+        <p:nvPr/>
+      </p:nvGrpSpPr>
+      <p:grpSpPr>
+        <a:xfrm>
+          <a:off x="0" y="0"/>
+          <a:ext cx="0" cy="0"/>
+          <a:chOff x="0" y="0"/>
+          <a:chExt cx="0" cy="0"/>
+        </a:xfrm>
+      </p:grpSpPr>
+      <p:sp>
+        <p:nvSpPr>
+          <p:cNvPr id="2" name="Title 1"/>
+          <p:cNvSpPr>
+            <a:spLocks noGrp="1"/>
+          </p:cNvSpPr>
+          <p:nvPr>
+            <p:ph type="title"/>
+          </p:nvPr>
+        </p:nvSpPr>
+        <p:spPr/>
+        <p:txBody>
+          <a:bodyPr>
+            <a:normAutofit fontScale="90000"/>
+          </a:bodyPr>
+          <a:lstStyle/>
+          <a:p>
+            <a:r>
+              <a:t>Managing Dynamic Frontend Content (Hero Section)</a:t>
+            </a:r>
+          </a:p>
+        </p:txBody>
+      </p:sp>
+      <p:pic>
+        <p:nvPicPr>
+          <p:cNvPr id="5" name="Picture 4">
+            <a:extLst>
+              <a:ext uri="{FF2B5EF4-FFF2-40B4-BE49-F238E27FC236}">
+                <a16:creationId xmlns:a16="http://schemas.microsoft.com/office/drawing/2014/main" id="{FCDFA312-74E4-2274-72CE-6308BCC2A1E9}"/>
+              </a:ext>
+            </a:extLst>
+          </p:cNvPr>
+          <p:cNvPicPr>
+            <a:picLocks noChangeAspect="1"/>
+          </p:cNvPicPr>
+          <p:nvPr/>
+        </p:nvPicPr>
+        <p:blipFill>
+          <a:blip r:embed="rId2"/>
+          <a:stretch>
+            <a:fillRect/>
+          </a:stretch>
+        </p:blipFill>
+        <p:spPr>
+          <a:xfrm>
+            <a:off x="200025" y="2550595"/>
+            <a:ext cx="8549640" cy="3926405"/>
+          </a:xfrm>
+          <a:prstGeom prst="rect">
+            <a:avLst/>
+          </a:prstGeom>
+        </p:spPr>
+      </p:pic>
+    </p:spTree>
+  </p:cSld>
+  <p:clrMapOvr>
+    <a:masterClrMapping/>
+  </p:clrMapOvr>
+</p:sld>
+</file>
+
+<file path=ppt/slides/slide11.xml><?xml version="1.0" encoding="utf-8"?>
+<p:sld xmlns:a="http://schemas.openxmlformats.org/drawingml/2006/main" xmlns:r="http://schemas.openxmlformats.org/officeDocument/2006/relationships" xmlns:p="http://schemas.openxmlformats.org/presentationml/2006/main">
+  <p:cSld>
+    <p:spTree>
+      <p:nvGrpSpPr>
+        <p:cNvPr id="1" name=""/>
+        <p:cNvGrpSpPr/>
+        <p:nvPr/>
+      </p:nvGrpSpPr>
+      <p:grpSpPr>
+        <a:xfrm>
+          <a:off x="0" y="0"/>
+          <a:ext cx="0" cy="0"/>
+          <a:chOff x="0" y="0"/>
+          <a:chExt cx="0" cy="0"/>
+        </a:xfrm>
+      </p:grpSpPr>
+      <p:sp>
+        <p:nvSpPr>
+          <p:cNvPr id="2" name="Title 1">
+            <a:extLst>
+              <a:ext uri="{FF2B5EF4-FFF2-40B4-BE49-F238E27FC236}">
+                <a16:creationId xmlns:a16="http://schemas.microsoft.com/office/drawing/2014/main" id="{03C9FB09-3BAA-2FB3-2C9F-4582DC67143E}"/>
+              </a:ext>
+            </a:extLst>
+          </p:cNvPr>
+          <p:cNvSpPr>
+            <a:spLocks noGrp="1"/>
+          </p:cNvSpPr>
+          <p:nvPr>
+            <p:ph type="title"/>
+          </p:nvPr>
+        </p:nvSpPr>
+        <p:spPr/>
+        <p:txBody>
+          <a:bodyPr/>
+          <a:lstStyle/>
+          <a:p>
+            <a:endParaRPr lang="en-IN"/>
+          </a:p>
+        </p:txBody>
+      </p:sp>
+      <p:pic>
+        <p:nvPicPr>
+          <p:cNvPr id="4" name="Picture 3">
+            <a:extLst>
+              <a:ext uri="{FF2B5EF4-FFF2-40B4-BE49-F238E27FC236}">
+                <a16:creationId xmlns:a16="http://schemas.microsoft.com/office/drawing/2014/main" id="{CAF13B3C-3214-00A8-EE62-93AC323CDF1A}"/>
+              </a:ext>
+            </a:extLst>
+          </p:cNvPr>
+          <p:cNvPicPr>
+            <a:picLocks noChangeAspect="1"/>
+          </p:cNvPicPr>
+          <p:nvPr/>
+        </p:nvPicPr>
+        <p:blipFill>
+          <a:blip r:embed="rId2"/>
+          <a:stretch>
+            <a:fillRect/>
+          </a:stretch>
+        </p:blipFill>
+        <p:spPr>
+          <a:xfrm>
+            <a:off x="0" y="990600"/>
+            <a:ext cx="9143999" cy="5867400"/>
+          </a:xfrm>
+          <a:prstGeom prst="rect">
+            <a:avLst/>
+          </a:prstGeom>
+        </p:spPr>
+      </p:pic>
+    </p:spTree>
+    <p:extLst>
+      <p:ext uri="{BB962C8B-B14F-4D97-AF65-F5344CB8AC3E}">
+        <p14:creationId xmlns:p14="http://schemas.microsoft.com/office/powerpoint/2010/main" val="2883019699"/>
+      </p:ext>
+    </p:extLst>
+  </p:cSld>
+  <p:clrMapOvr>
+    <a:masterClrMapping/>
+  </p:clrMapOvr>
+</p:sld>
+</file>
+
+<file path=ppt/slides/slide12.xml><?xml version="1.0" encoding="utf-8"?>
+<p:sld xmlns:a="http://schemas.openxmlformats.org/drawingml/2006/main" xmlns:r="http://schemas.openxmlformats.org/officeDocument/2006/relationships" xmlns:p="http://schemas.openxmlformats.org/presentationml/2006/main">
+  <p:cSld>
+    <p:spTree>
+      <p:nvGrpSpPr>
+        <p:cNvPr id="1" name=""/>
+        <p:cNvGrpSpPr/>
+        <p:nvPr/>
+      </p:nvGrpSpPr>
+      <p:grpSpPr>
+        <a:xfrm>
+          <a:off x="0" y="0"/>
+          <a:ext cx="0" cy="0"/>
+          <a:chOff x="0" y="0"/>
+          <a:chExt cx="0" cy="0"/>
+        </a:xfrm>
+      </p:grpSpPr>
+      <p:sp>
+        <p:nvSpPr>
+          <p:cNvPr id="2" name="Title 1"/>
+          <p:cNvSpPr>
+            <a:spLocks noGrp="1"/>
+          </p:cNvSpPr>
+          <p:nvPr>
+            <p:ph type="title"/>
+          </p:nvPr>
+        </p:nvSpPr>
+        <p:spPr/>
+        <p:txBody>
+          <a:bodyPr/>
+          <a:lstStyle/>
+          <a:p>
+            <a:r>
+              <a:t>Database Models &amp; Architecture</a:t>
+            </a:r>
+          </a:p>
+        </p:txBody>
+      </p:sp>
+      <p:sp>
+        <p:nvSpPr>
+          <p:cNvPr id="3" name="Content Placeholder 2"/>
+          <p:cNvSpPr>
+            <a:spLocks noGrp="1"/>
+          </p:cNvSpPr>
+          <p:nvPr>
+            <p:ph idx="1"/>
+          </p:nvPr>
+        </p:nvSpPr>
+        <p:spPr/>
+        <p:txBody>
+          <a:bodyPr>
+            <a:normAutofit lnSpcReduction="10000"/>
+          </a:bodyPr>
+          <a:lstStyle/>
+          <a:p>
+            <a:r>
+              <a:rPr dirty="0"/>
+              <a:t>The system uses an ORM-based relational database design. Key models include</a:t>
+            </a:r>
+          </a:p>
+          <a:p>
+            <a:r>
+              <a:rPr dirty="0"/>
+              <a:t>Admission</a:t>
+            </a:r>
+            <a:r>
+              <a:rPr lang="en-US" dirty="0"/>
+              <a:t> </a:t>
+            </a:r>
+            <a:r>
+              <a:rPr dirty="0"/>
+              <a:t>Application: Handles student enrollments, docs, and academic data</a:t>
+            </a:r>
+          </a:p>
+          <a:p>
+            <a:r>
+              <a:rPr dirty="0"/>
+              <a:t>Faculty</a:t>
+            </a:r>
+            <a:r>
+              <a:rPr lang="en-US" dirty="0"/>
+              <a:t> </a:t>
+            </a:r>
+            <a:r>
+              <a:rPr dirty="0"/>
+              <a:t>Member &amp; Course: Manages academic programs and staff profiles</a:t>
+            </a:r>
+          </a:p>
+          <a:p>
+            <a:r>
+              <a:rPr dirty="0"/>
+              <a:t>Announcement &amp; Gallery</a:t>
+            </a:r>
+            <a:r>
+              <a:rPr lang="en-US" dirty="0"/>
+              <a:t> </a:t>
+            </a:r>
+            <a:r>
+              <a:rPr dirty="0"/>
+              <a:t>Media: Powers dynamic updates and multimedia displays</a:t>
+            </a:r>
+          </a:p>
+          <a:p>
+            <a:r>
+              <a:rPr dirty="0"/>
+              <a:t>Hero</a:t>
+            </a:r>
+            <a:r>
+              <a:rPr lang="en-US" dirty="0"/>
+              <a:t> </a:t>
+            </a:r>
+            <a:r>
+              <a:rPr dirty="0"/>
+              <a:t>Section: Controls the homepage video and text configuration</a:t>
+            </a:r>
+          </a:p>
+          <a:p>
+            <a:r>
+              <a:rPr dirty="0"/>
+              <a:t>Contact</a:t>
+            </a:r>
+            <a:r>
+              <a:rPr lang="en-US" dirty="0"/>
+              <a:t> </a:t>
+            </a:r>
+            <a:r>
+              <a:rPr dirty="0"/>
+              <a:t>Message: Stores user inquiries from the frontend</a:t>
+            </a:r>
+          </a:p>
+        </p:txBody>
+      </p:sp>
+    </p:spTree>
+  </p:cSld>
+  <p:clrMapOvr>
+    <a:masterClrMapping/>
+  </p:clrMapOvr>
+</p:sld>
+</file>
+
+<file path=ppt/slides/slide13.xml><?xml version="1.0" encoding="utf-8"?>
+<p:sld xmlns:a="http://schemas.openxmlformats.org/drawingml/2006/main" xmlns:r="http://schemas.openxmlformats.org/officeDocument/2006/relationships" xmlns:p="http://schemas.openxmlformats.org/presentationml/2006/main">
+  <p:cSld>
+    <p:spTree>
+      <p:nvGrpSpPr>
+        <p:cNvPr id="1" name=""/>
+        <p:cNvGrpSpPr/>
+        <p:nvPr/>
+      </p:nvGrpSpPr>
+      <p:grpSpPr>
+        <a:xfrm>
+          <a:off x="0" y="0"/>
+          <a:ext cx="0" cy="0"/>
+          <a:chOff x="0" y="0"/>
+          <a:chExt cx="0" cy="0"/>
+        </a:xfrm>
+      </p:grpSpPr>
+      <p:sp>
+        <p:nvSpPr>
+          <p:cNvPr id="2" name="Title 1"/>
+          <p:cNvSpPr>
+            <a:spLocks noGrp="1"/>
+          </p:cNvSpPr>
+          <p:nvPr>
+            <p:ph type="title"/>
+          </p:nvPr>
+        </p:nvSpPr>
+        <p:spPr/>
+        <p:txBody>
+          <a:bodyPr/>
+          <a:lstStyle/>
+          <a:p>
+            <a:r>
+              <a:t>Backend Technologies</a:t>
+            </a:r>
+          </a:p>
+        </p:txBody>
+      </p:sp>
+      <p:sp>
+        <p:nvSpPr>
+          <p:cNvPr id="3" name="Content Placeholder 2"/>
+          <p:cNvSpPr>
+            <a:spLocks noGrp="1"/>
+          </p:cNvSpPr>
+          <p:nvPr>
+            <p:ph idx="1"/>
+          </p:nvPr>
+        </p:nvSpPr>
+        <p:spPr>
+          <a:xfrm>
+            <a:off x="594360" y="2914650"/>
+            <a:ext cx="7955280" cy="3348990"/>
+          </a:xfrm>
+        </p:spPr>
+        <p:txBody>
+          <a:bodyPr/>
+          <a:lstStyle/>
+          <a:p>
+            <a:r>
+              <a:rPr dirty="0"/>
+              <a:t>Our technology stack ensures security, scalability</a:t>
+            </a:r>
+            <a:r>
+              <a:rPr lang="en-US" dirty="0"/>
+              <a:t>.</a:t>
+            </a:r>
+            <a:endParaRPr dirty="0"/>
+          </a:p>
+          <a:p>
+            <a:r>
+              <a:rPr dirty="0"/>
+              <a:t>Framework: Django (Python)</a:t>
+            </a:r>
+          </a:p>
+          <a:p>
+            <a:r>
+              <a:rPr dirty="0"/>
+              <a:t>Database: SQLite (Local) / PostgreSQL (Production)</a:t>
+            </a:r>
+          </a:p>
+          <a:p>
+            <a:r>
+              <a:rPr dirty="0"/>
+              <a:t>File Storage: </a:t>
+            </a:r>
+            <a:r>
+              <a:rPr dirty="0" err="1"/>
+              <a:t>Cloudinary</a:t>
+            </a:r>
+            <a:r>
+              <a:rPr dirty="0"/>
+              <a:t> / Local Media</a:t>
+            </a:r>
+          </a:p>
+          <a:p>
+            <a:r>
+              <a:rPr dirty="0"/>
+              <a:t>Deployment: Render.com</a:t>
+            </a:r>
+          </a:p>
+        </p:txBody>
+      </p:sp>
+    </p:spTree>
+  </p:cSld>
+  <p:clrMapOvr>
+    <a:masterClrMapping/>
+  </p:clrMapOvr>
+  <mc:AlternateContent xmlns:mc="http://schemas.openxmlformats.org/markup-compatibility/2006" xmlns:p15="http://schemas.microsoft.com/office/powerpoint/2012/main">
+    <mc:Choice Requires="p15">
+      <p:transition xmlns:p14="http://schemas.microsoft.com/office/powerpoint/2010/main" spd="slow" p14:dur="1250">
+        <p15:prstTrans prst="airplane"/>
+      </p:transition>
+    </mc:Choice>
+    <mc:Fallback xmlns="">
+      <p:transition spd="slow">
+        <p:fade/>
+      </p:transition>
+    </mc:Fallback>
+  </mc:AlternateContent>
+</p:sld>
+</file>
+
+<file path=ppt/slides/slide14.xml><?xml version="1.0" encoding="utf-8"?>
+<p:sld xmlns:a="http://schemas.openxmlformats.org/drawingml/2006/main" xmlns:r="http://schemas.openxmlformats.org/officeDocument/2006/relationships" xmlns:p="http://schemas.openxmlformats.org/presentationml/2006/main">
+  <p:cSld>
+    <p:spTree>
+      <p:nvGrpSpPr>
+        <p:cNvPr id="1" name=""/>
+        <p:cNvGrpSpPr/>
+        <p:nvPr/>
+      </p:nvGrpSpPr>
+      <p:grpSpPr>
+        <a:xfrm>
+          <a:off x="0" y="0"/>
+          <a:ext cx="0" cy="0"/>
+          <a:chOff x="0" y="0"/>
+          <a:chExt cx="0" cy="0"/>
+        </a:xfrm>
+      </p:grpSpPr>
+      <p:sp>
+        <p:nvSpPr>
+          <p:cNvPr id="2" name="Title 1">
+            <a:extLst>
+              <a:ext uri="{FF2B5EF4-FFF2-40B4-BE49-F238E27FC236}">
+                <a16:creationId xmlns:a16="http://schemas.microsoft.com/office/drawing/2014/main" id="{60EC6B40-6E5D-2DAF-3B6D-595FC2D4D5B6}"/>
+              </a:ext>
+            </a:extLst>
+          </p:cNvPr>
+          <p:cNvSpPr>
+            <a:spLocks noGrp="1"/>
+          </p:cNvSpPr>
+          <p:nvPr>
+            <p:ph type="title"/>
+          </p:nvPr>
+        </p:nvSpPr>
+        <p:spPr/>
+        <p:txBody>
+          <a:bodyPr/>
+          <a:lstStyle/>
+          <a:p>
+            <a:pPr algn="ctr"/>
+            <a:endParaRPr lang="en-IN" dirty="0"/>
+          </a:p>
+        </p:txBody>
+      </p:sp>
+      <p:sp>
+        <p:nvSpPr>
+          <p:cNvPr id="3" name="Content Placeholder 2">
+            <a:extLst>
+              <a:ext uri="{FF2B5EF4-FFF2-40B4-BE49-F238E27FC236}">
+                <a16:creationId xmlns:a16="http://schemas.microsoft.com/office/drawing/2014/main" id="{595E3383-FA2D-7699-C8A4-1E1451299949}"/>
+              </a:ext>
+            </a:extLst>
+          </p:cNvPr>
+          <p:cNvSpPr>
+            <a:spLocks noGrp="1"/>
+          </p:cNvSpPr>
+          <p:nvPr>
+            <p:ph idx="1"/>
+          </p:nvPr>
+        </p:nvSpPr>
+        <p:spPr/>
+        <p:txBody>
+          <a:bodyPr/>
+          <a:lstStyle/>
+          <a:p>
+            <a:endParaRPr lang="en-IN" dirty="0"/>
+          </a:p>
+        </p:txBody>
+      </p:sp>
+      <p:sp>
+        <p:nvSpPr>
+          <p:cNvPr id="4" name="Rectangle 3">
+            <a:extLst>
+              <a:ext uri="{FF2B5EF4-FFF2-40B4-BE49-F238E27FC236}">
+                <a16:creationId xmlns:a16="http://schemas.microsoft.com/office/drawing/2014/main" id="{061E8EE4-61F4-13C0-75C9-C542A94BDBAE}"/>
+              </a:ext>
+            </a:extLst>
+          </p:cNvPr>
+          <p:cNvSpPr/>
+          <p:nvPr/>
+        </p:nvSpPr>
+        <p:spPr>
+          <a:xfrm>
+            <a:off x="1048439" y="2967335"/>
+            <a:ext cx="7047121" cy="1569660"/>
+          </a:xfrm>
+          <a:prstGeom prst="rect">
+            <a:avLst/>
+          </a:prstGeom>
+          <a:noFill/>
+        </p:spPr>
+        <p:txBody>
+          <a:bodyPr wrap="none" lIns="91440" tIns="45720" rIns="91440" bIns="45720">
+            <a:spAutoFit/>
+          </a:bodyPr>
+          <a:lstStyle/>
+          <a:p>
+            <a:pPr algn="ctr"/>
+            <a:r>
+              <a:rPr lang="en-US" sz="9600" dirty="0"/>
+              <a:t>THANK YOU</a:t>
+            </a:r>
+          </a:p>
+        </p:txBody>
+      </p:sp>
+    </p:spTree>
+    <p:extLst>
+      <p:ext uri="{BB962C8B-B14F-4D97-AF65-F5344CB8AC3E}">
+        <p14:creationId xmlns:p14="http://schemas.microsoft.com/office/powerpoint/2010/main" val="4200641919"/>
+      </p:ext>
+    </p:extLst>
+  </p:cSld>
+  <p:clrMapOvr>
+    <a:masterClrMapping/>
+  </p:clrMapOvr>
+  <p:timing>
+    <p:tnLst>
+      <p:par>
+        <p:cTn id="1" dur="indefinite" restart="never" nodeType="tmRoot">
+          <p:childTnLst>
+            <p:seq concurrent="1" nextAc="seek">
+              <p:cTn id="2" dur="indefinite" nodeType="mainSeq">
+                <p:childTnLst>
+                  <p:par>
+                    <p:cTn id="3" fill="hold">
+                      <p:stCondLst>
+                        <p:cond delay="indefinite"/>
+                      </p:stCondLst>
+                      <p:childTnLst>
+                        <p:par>
+                          <p:cTn id="4" fill="hold">
+                            <p:stCondLst>
+                              <p:cond delay="0"/>
+                            </p:stCondLst>
+                            <p:childTnLst>
+                              <p:par>
+                                <p:cTn id="5" presetID="34" presetClass="emph" presetSubtype="0" fill="hold" grpId="0" nodeType="clickEffect">
+                                  <p:stCondLst>
+                                    <p:cond delay="0"/>
+                                  </p:stCondLst>
+                                  <p:iterate type="lt">
+                                    <p:tmPct val="10000"/>
+                                  </p:iterate>
+                                  <p:childTnLst>
+                                    <p:animMotion origin="layout" path="M 0.0 0.0 L 0.0 -0.07213" pathEditMode="relative" ptsTypes="">
+                                      <p:cBhvr>
+                                        <p:cTn id="6" dur="1500" accel="50000" decel="50000" autoRev="1" fill="hold">
+                                          <p:stCondLst>
+                                            <p:cond delay="0"/>
+                                          </p:stCondLst>
+                                        </p:cTn>
+                                        <p:tgtEl>
+                                          <p:spTgt spid="4"/>
+                                        </p:tgtEl>
+                                        <p:attrNameLst>
+                                          <p:attrName>ppt_x</p:attrName>
+                                          <p:attrName>ppt_y</p:attrName>
+                                        </p:attrNameLst>
+                                      </p:cBhvr>
+                                    </p:animMotion>
+                                    <p:animRot by="1500000">
+                                      <p:cBhvr>
+                                        <p:cTn id="7" dur="750" fill="hold">
+                                          <p:stCondLst>
+                                            <p:cond delay="0"/>
+                                          </p:stCondLst>
+                                        </p:cTn>
+                                        <p:tgtEl>
+                                          <p:spTgt spid="4"/>
+                                        </p:tgtEl>
+                                        <p:attrNameLst>
+                                          <p:attrName>r</p:attrName>
+                                        </p:attrNameLst>
+                                      </p:cBhvr>
+                                    </p:animRot>
+                                    <p:animRot by="-1500000">
+                                      <p:cBhvr>
+                                        <p:cTn id="8" dur="750" fill="hold">
+                                          <p:stCondLst>
+                                            <p:cond delay="750"/>
+                                          </p:stCondLst>
+                                        </p:cTn>
+                                        <p:tgtEl>
+                                          <p:spTgt spid="4"/>
+                                        </p:tgtEl>
+                                        <p:attrNameLst>
+                                          <p:attrName>r</p:attrName>
+                                        </p:attrNameLst>
+                                      </p:cBhvr>
+                                    </p:animRot>
+                                    <p:animRot by="-1500000">
+                                      <p:cBhvr>
+                                        <p:cTn id="9" dur="750" fill="hold">
+                                          <p:stCondLst>
+                                            <p:cond delay="1500"/>
+                                          </p:stCondLst>
+                                        </p:cTn>
+                                        <p:tgtEl>
+                                          <p:spTgt spid="4"/>
+                                        </p:tgtEl>
+                                        <p:attrNameLst>
+                                          <p:attrName>r</p:attrName>
+                                        </p:attrNameLst>
+                                      </p:cBhvr>
+                                    </p:animRot>
+                                    <p:animRot by="1500000">
+                                      <p:cBhvr>
+                                        <p:cTn id="10" dur="750" fill="hold">
+                                          <p:stCondLst>
+                                            <p:cond delay="2250"/>
+                                          </p:stCondLst>
+                                        </p:cTn>
+                                        <p:tgtEl>
+                                          <p:spTgt spid="4"/>
+                                        </p:tgtEl>
+                                        <p:attrNameLst>
+                                          <p:attrName>r</p:attrName>
+                                        </p:attrNameLst>
+                                      </p:cBhvr>
+                                    </p:animRot>
+                                  </p:childTnLst>
+                                </p:cTn>
+                              </p:par>
+                            </p:childTnLst>
+                          </p:cTn>
+                        </p:par>
+                      </p:childTnLst>
+                    </p:cTn>
+                  </p:par>
+                </p:childTnLst>
+              </p:cTn>
+              <p:prevCondLst>
+                <p:cond evt="onPrev" delay="0">
+                  <p:tgtEl>
+                    <p:sldTgt/>
+                  </p:tgtEl>
+                </p:cond>
+              </p:prevCondLst>
+              <p:nextCondLst>
+                <p:cond evt="onNext" delay="0">
+                  <p:tgtEl>
+                    <p:sldTgt/>
+                  </p:tgtEl>
+                </p:cond>
+              </p:nextCondLst>
+            </p:seq>
+          </p:childTnLst>
+        </p:cTn>
+      </p:par>
+    </p:tnLst>
+    <p:bldLst>
+      <p:bldP spid="4" grpId="0"/>
+    </p:bldLst>
+  </p:timing>
 </p:sld>
 </file>
 
@@ -3063,7 +7030,13 @@
       </p:grpSpPr>
       <p:sp>
         <p:nvSpPr>
-          <p:cNvPr id="2" name="Title 1"/>
+          <p:cNvPr id="2" name="Title 1">
+            <a:extLst>
+              <a:ext uri="{FF2B5EF4-FFF2-40B4-BE49-F238E27FC236}">
+                <a16:creationId xmlns:a16="http://schemas.microsoft.com/office/drawing/2014/main" id="{D4385919-49CF-CE3D-0883-4939E6A6780C}"/>
+              </a:ext>
+            </a:extLst>
+          </p:cNvPr>
           <p:cNvSpPr>
             <a:spLocks noGrp="1"/>
           </p:cNvSpPr>
@@ -3077,36 +7050,106 @@
           <a:lstStyle/>
           <a:p>
             <a:r>
-              <a:t>Secure Administration Login</a:t>
-            </a:r>
-          </a:p>
-        </p:txBody>
-      </p:sp>
-      <p:pic>
-        <p:nvPicPr>
-          <p:cNvPr id="3" name="Picture 2" descr="login.png"/>
-          <p:cNvPicPr>
-            <a:picLocks noChangeAspect="1"/>
-          </p:cNvPicPr>
-          <p:nvPr/>
-        </p:nvPicPr>
-        <p:blipFill>
-          <a:blip r:embed="rId2"/>
-          <a:stretch>
-            <a:fillRect/>
-          </a:stretch>
-        </p:blipFill>
-        <p:spPr>
-          <a:xfrm>
-            <a:off x="914400" y="1690689"/>
-            <a:ext cx="7315200" cy="4572000"/>
-          </a:xfrm>
-          <a:prstGeom prst="rect">
-            <a:avLst/>
-          </a:prstGeom>
-        </p:spPr>
-      </p:pic>
+              <a:rPr lang="en-US" b="1" dirty="0"/>
+              <a:t>Objectives</a:t>
+            </a:r>
+            <a:br>
+              <a:rPr lang="en-US" b="1" dirty="0"/>
+            </a:br>
+            <a:endParaRPr lang="en-IN" dirty="0"/>
+          </a:p>
+        </p:txBody>
+      </p:sp>
+      <p:sp>
+        <p:nvSpPr>
+          <p:cNvPr id="3" name="Content Placeholder 2">
+            <a:extLst>
+              <a:ext uri="{FF2B5EF4-FFF2-40B4-BE49-F238E27FC236}">
+                <a16:creationId xmlns:a16="http://schemas.microsoft.com/office/drawing/2014/main" id="{61F7D4B6-29F4-AC12-7863-457C45BF9000}"/>
+              </a:ext>
+            </a:extLst>
+          </p:cNvPr>
+          <p:cNvSpPr>
+            <a:spLocks noGrp="1"/>
+          </p:cNvSpPr>
+          <p:nvPr>
+            <p:ph idx="1"/>
+          </p:nvPr>
+        </p:nvSpPr>
+        <p:spPr/>
+        <p:txBody>
+          <a:bodyPr/>
+          <a:lstStyle/>
+          <a:p>
+            <a:pPr marL="0" indent="0">
+              <a:buNone/>
+            </a:pPr>
+            <a:endParaRPr lang="en-US" dirty="0"/>
+          </a:p>
+          <a:p>
+            <a:pPr marL="0" indent="0">
+              <a:buNone/>
+            </a:pPr>
+            <a:endParaRPr lang="en-US" dirty="0"/>
+          </a:p>
+          <a:p>
+            <a:r>
+              <a:rPr lang="en-US" dirty="0"/>
+              <a:t>Manage faculty records.</a:t>
+            </a:r>
+            <a:endParaRPr lang="en-US" b="1" dirty="0"/>
+          </a:p>
+          <a:p>
+            <a:pPr>
+              <a:buFont typeface="Arial" panose="020B0604020202020204" pitchFamily="34" charset="0"/>
+              <a:buChar char="•"/>
+            </a:pPr>
+            <a:r>
+              <a:rPr lang="en-US" dirty="0"/>
+              <a:t>Provide secure login system. </a:t>
+            </a:r>
+          </a:p>
+          <a:p>
+            <a:pPr>
+              <a:buFont typeface="Arial" panose="020B0604020202020204" pitchFamily="34" charset="0"/>
+              <a:buChar char="•"/>
+            </a:pPr>
+            <a:r>
+              <a:rPr lang="en-US" dirty="0"/>
+              <a:t>Store data efficiently using database. </a:t>
+            </a:r>
+          </a:p>
+          <a:p>
+            <a:pPr>
+              <a:buFont typeface="Arial" panose="020B0604020202020204" pitchFamily="34" charset="0"/>
+              <a:buChar char="•"/>
+            </a:pPr>
+            <a:r>
+              <a:rPr lang="en-US" dirty="0"/>
+              <a:t>Create scalable backend APIs </a:t>
+            </a:r>
+          </a:p>
+          <a:p>
+            <a:pPr>
+              <a:buFont typeface="Arial" panose="020B0604020202020204" pitchFamily="34" charset="0"/>
+              <a:buChar char="•"/>
+            </a:pPr>
+            <a:r>
+              <a:rPr lang="en-US" dirty="0"/>
+              <a:t>Reduce manual work in administration </a:t>
+            </a:r>
+          </a:p>
+          <a:p>
+            <a:endParaRPr lang="en-IN" dirty="0"/>
+          </a:p>
+        </p:txBody>
+      </p:sp>
     </p:spTree>
+    <p:extLst>
+      <p:ext uri="{BB962C8B-B14F-4D97-AF65-F5344CB8AC3E}">
+        <p14:creationId xmlns:p14="http://schemas.microsoft.com/office/powerpoint/2010/main" val="3586815368"/>
+      </p:ext>
+    </p:extLst>
   </p:cSld>
   <p:clrMapOvr>
     <a:masterClrMapping/>
@@ -3133,7 +7176,13 @@
       </p:grpSpPr>
       <p:sp>
         <p:nvSpPr>
-          <p:cNvPr id="2" name="Title 1"/>
+          <p:cNvPr id="2" name="Title 1">
+            <a:extLst>
+              <a:ext uri="{FF2B5EF4-FFF2-40B4-BE49-F238E27FC236}">
+                <a16:creationId xmlns:a16="http://schemas.microsoft.com/office/drawing/2014/main" id="{1A7316ED-6CFC-E5BA-3A2F-A98181B30DBB}"/>
+              </a:ext>
+            </a:extLst>
+          </p:cNvPr>
           <p:cNvSpPr>
             <a:spLocks noGrp="1"/>
           </p:cNvSpPr>
@@ -3143,40 +7192,127 @@
         </p:nvSpPr>
         <p:spPr/>
         <p:txBody>
-          <a:bodyPr/>
-          <a:lstStyle/>
-          <a:p>
-            <a:r>
-              <a:t>Admin Dashboard Overview</a:t>
-            </a:r>
-          </a:p>
-        </p:txBody>
-      </p:sp>
-      <p:pic>
-        <p:nvPicPr>
-          <p:cNvPr id="3" name="Picture 2" descr="dashboard.png"/>
-          <p:cNvPicPr>
-            <a:picLocks noChangeAspect="1"/>
-          </p:cNvPicPr>
-          <p:nvPr/>
-        </p:nvPicPr>
-        <p:blipFill>
-          <a:blip r:embed="rId2"/>
-          <a:stretch>
-            <a:fillRect/>
-          </a:stretch>
-        </p:blipFill>
-        <p:spPr>
-          <a:xfrm>
-            <a:off x="914400" y="1562100"/>
-            <a:ext cx="7315200" cy="4572000"/>
-          </a:xfrm>
-          <a:prstGeom prst="rect">
-            <a:avLst/>
-          </a:prstGeom>
-        </p:spPr>
-      </p:pic>
+          <a:bodyPr>
+            <a:normAutofit fontScale="90000"/>
+          </a:bodyPr>
+          <a:lstStyle/>
+          <a:p>
+            <a:r>
+              <a:rPr lang="en-US" b="1" dirty="0"/>
+              <a:t>Introduction to Django</a:t>
+            </a:r>
+            <a:br>
+              <a:rPr lang="en-US" b="1" dirty="0"/>
+            </a:br>
+            <a:endParaRPr lang="en-IN" dirty="0"/>
+          </a:p>
+        </p:txBody>
+      </p:sp>
+      <p:sp>
+        <p:nvSpPr>
+          <p:cNvPr id="3" name="Content Placeholder 2">
+            <a:extLst>
+              <a:ext uri="{FF2B5EF4-FFF2-40B4-BE49-F238E27FC236}">
+                <a16:creationId xmlns:a16="http://schemas.microsoft.com/office/drawing/2014/main" id="{55787099-D77A-9F4B-9CFB-1EE9B87194FD}"/>
+              </a:ext>
+            </a:extLst>
+          </p:cNvPr>
+          <p:cNvSpPr>
+            <a:spLocks noGrp="1"/>
+          </p:cNvSpPr>
+          <p:nvPr>
+            <p:ph idx="1"/>
+          </p:nvPr>
+        </p:nvSpPr>
+        <p:spPr>
+          <a:xfrm>
+            <a:off x="594360" y="1857375"/>
+            <a:ext cx="7955280" cy="4406265"/>
+          </a:xfrm>
+        </p:spPr>
+        <p:txBody>
+          <a:bodyPr/>
+          <a:lstStyle/>
+          <a:p>
+            <a:pPr marL="0" indent="0">
+              <a:buNone/>
+            </a:pPr>
+            <a:r>
+              <a:rPr lang="en-US" b="1" dirty="0"/>
+              <a:t>   </a:t>
+            </a:r>
+            <a:r>
+              <a:rPr lang="en-US" sz="2800" b="1" dirty="0"/>
+              <a:t>What is Django?</a:t>
+            </a:r>
+          </a:p>
+          <a:p>
+            <a:pPr marL="0" indent="0">
+              <a:buNone/>
+            </a:pPr>
+            <a:endParaRPr lang="en-US" sz="2800" b="1" dirty="0"/>
+          </a:p>
+          <a:p>
+            <a:pPr>
+              <a:buFont typeface="Arial" panose="020B0604020202020204" pitchFamily="34" charset="0"/>
+              <a:buChar char="•"/>
+            </a:pPr>
+            <a:r>
+              <a:rPr lang="en-US" dirty="0"/>
+              <a:t>Django is a high-level Python web framework.</a:t>
+            </a:r>
+          </a:p>
+          <a:p>
+            <a:pPr>
+              <a:buFont typeface="Arial" panose="020B0604020202020204" pitchFamily="34" charset="0"/>
+              <a:buChar char="•"/>
+            </a:pPr>
+            <a:r>
+              <a:rPr lang="en-US" dirty="0"/>
+              <a:t>It helps developers build secure and scalable web applications.</a:t>
+            </a:r>
+          </a:p>
+          <a:p>
+            <a:pPr>
+              <a:buFont typeface="Arial" panose="020B0604020202020204" pitchFamily="34" charset="0"/>
+              <a:buChar char="•"/>
+            </a:pPr>
+            <a:r>
+              <a:rPr lang="en-US" dirty="0"/>
+              <a:t>Follows the MVT (Model-View-Template) architecture.</a:t>
+            </a:r>
+          </a:p>
+          <a:p>
+            <a:pPr>
+              <a:buFont typeface="Arial" panose="020B0604020202020204" pitchFamily="34" charset="0"/>
+              <a:buChar char="•"/>
+            </a:pPr>
+            <a:r>
+              <a:rPr lang="en-US" dirty="0"/>
+              <a:t>Used for fast development and clean design.</a:t>
+            </a:r>
+          </a:p>
+          <a:p>
+            <a:pPr>
+              <a:buFont typeface="Arial" panose="020B0604020202020204" pitchFamily="34" charset="0"/>
+              <a:buChar char="•"/>
+            </a:pPr>
+            <a:r>
+              <a:rPr lang="en-US" dirty="0"/>
+              <a:t>Open-source and widely used in web development.</a:t>
+            </a:r>
+          </a:p>
+          <a:p>
+            <a:endParaRPr lang="en-IN" dirty="0"/>
+          </a:p>
+        </p:txBody>
+      </p:sp>
     </p:spTree>
+    <p:extLst>
+      <p:ext uri="{BB962C8B-B14F-4D97-AF65-F5344CB8AC3E}">
+        <p14:creationId xmlns:p14="http://schemas.microsoft.com/office/powerpoint/2010/main" val="2251223280"/>
+      </p:ext>
+    </p:extLst>
   </p:cSld>
   <p:clrMapOvr>
     <a:masterClrMapping/>
@@ -3203,7 +7339,13 @@
       </p:grpSpPr>
       <p:sp>
         <p:nvSpPr>
-          <p:cNvPr id="2" name="Title 1"/>
+          <p:cNvPr id="2" name="Title 1">
+            <a:extLst>
+              <a:ext uri="{FF2B5EF4-FFF2-40B4-BE49-F238E27FC236}">
+                <a16:creationId xmlns:a16="http://schemas.microsoft.com/office/drawing/2014/main" id="{CF83294C-22A3-32DA-417A-904B91AA47F8}"/>
+              </a:ext>
+            </a:extLst>
+          </p:cNvPr>
           <p:cNvSpPr>
             <a:spLocks noGrp="1"/>
           </p:cNvSpPr>
@@ -3211,42 +7353,126 @@
             <p:ph type="title"/>
           </p:nvPr>
         </p:nvSpPr>
+        <p:spPr>
+          <a:xfrm>
+            <a:off x="3219450" y="664845"/>
+            <a:ext cx="5330190" cy="1529715"/>
+          </a:xfrm>
+        </p:spPr>
+        <p:txBody>
+          <a:bodyPr>
+            <a:normAutofit fontScale="90000"/>
+          </a:bodyPr>
+          <a:lstStyle/>
+          <a:p>
+            <a:r>
+              <a:rPr lang="en-US" b="1" dirty="0"/>
+              <a:t>Why Django for College Website?</a:t>
+            </a:r>
+            <a:br>
+              <a:rPr lang="en-US" b="1" dirty="0"/>
+            </a:br>
+            <a:endParaRPr lang="en-IN" dirty="0"/>
+          </a:p>
+        </p:txBody>
+      </p:sp>
+      <p:sp>
+        <p:nvSpPr>
+          <p:cNvPr id="3" name="Content Placeholder 2">
+            <a:extLst>
+              <a:ext uri="{FF2B5EF4-FFF2-40B4-BE49-F238E27FC236}">
+                <a16:creationId xmlns:a16="http://schemas.microsoft.com/office/drawing/2014/main" id="{118D3392-BD93-580A-7507-49F4F5FF71B6}"/>
+              </a:ext>
+            </a:extLst>
+          </p:cNvPr>
+          <p:cNvSpPr>
+            <a:spLocks noGrp="1"/>
+          </p:cNvSpPr>
+          <p:nvPr>
+            <p:ph idx="1"/>
+          </p:nvPr>
+        </p:nvSpPr>
         <p:spPr/>
         <p:txBody>
           <a:bodyPr/>
           <a:lstStyle/>
           <a:p>
-            <a:r>
-              <a:t>Managing Admission Applications Data</a:t>
-            </a:r>
-          </a:p>
-        </p:txBody>
-      </p:sp>
-      <p:pic>
-        <p:nvPicPr>
-          <p:cNvPr id="3" name="Picture 2" descr="admissions.png"/>
-          <p:cNvPicPr>
-            <a:picLocks noChangeAspect="1"/>
-          </p:cNvPicPr>
-          <p:nvPr/>
-        </p:nvPicPr>
-        <p:blipFill>
-          <a:blip r:embed="rId2"/>
-          <a:stretch>
-            <a:fillRect/>
-          </a:stretch>
-        </p:blipFill>
-        <p:spPr>
-          <a:xfrm>
-            <a:off x="914400" y="1843088"/>
-            <a:ext cx="7315200" cy="4538662"/>
-          </a:xfrm>
-          <a:prstGeom prst="rect">
-            <a:avLst/>
-          </a:prstGeom>
-        </p:spPr>
-      </p:pic>
+            <a:pPr marL="0" indent="0">
+              <a:buNone/>
+            </a:pPr>
+            <a:endParaRPr lang="en-US" b="1" dirty="0"/>
+          </a:p>
+          <a:p>
+            <a:pPr>
+              <a:buFont typeface="Arial" panose="020B0604020202020204" pitchFamily="34" charset="0"/>
+              <a:buChar char="•"/>
+            </a:pPr>
+            <a:r>
+              <a:rPr lang="en-US" sz="2400" dirty="0"/>
+              <a:t>Fast backend development</a:t>
+            </a:r>
+          </a:p>
+          <a:p>
+            <a:pPr>
+              <a:buFont typeface="Arial" panose="020B0604020202020204" pitchFamily="34" charset="0"/>
+              <a:buChar char="•"/>
+            </a:pPr>
+            <a:r>
+              <a:rPr lang="en-US" sz="2400" dirty="0"/>
+              <a:t>Built-in admin panel</a:t>
+            </a:r>
+          </a:p>
+          <a:p>
+            <a:pPr>
+              <a:buFont typeface="Arial" panose="020B0604020202020204" pitchFamily="34" charset="0"/>
+              <a:buChar char="•"/>
+            </a:pPr>
+            <a:r>
+              <a:rPr lang="en-US" sz="2400" dirty="0"/>
+              <a:t>Secure authentication system</a:t>
+            </a:r>
+          </a:p>
+          <a:p>
+            <a:pPr>
+              <a:buFont typeface="Arial" panose="020B0604020202020204" pitchFamily="34" charset="0"/>
+              <a:buChar char="•"/>
+            </a:pPr>
+            <a:r>
+              <a:rPr lang="en-US" sz="2400" dirty="0"/>
+              <a:t>Easy database handling</a:t>
+            </a:r>
+          </a:p>
+          <a:p>
+            <a:pPr>
+              <a:buFont typeface="Arial" panose="020B0604020202020204" pitchFamily="34" charset="0"/>
+              <a:buChar char="•"/>
+            </a:pPr>
+            <a:r>
+              <a:rPr lang="en-US" sz="2400" dirty="0"/>
+              <a:t>Scalable for future features</a:t>
+            </a:r>
+          </a:p>
+          <a:p>
+            <a:pPr>
+              <a:buFont typeface="Arial" panose="020B0604020202020204" pitchFamily="34" charset="0"/>
+              <a:buChar char="•"/>
+            </a:pPr>
+            <a:r>
+              <a:rPr lang="en-US" sz="2400" dirty="0"/>
+              <a:t>Supports REST APIs and integrations</a:t>
+            </a:r>
+          </a:p>
+          <a:p>
+            <a:endParaRPr lang="en-IN" dirty="0"/>
+          </a:p>
+        </p:txBody>
+      </p:sp>
     </p:spTree>
+    <p:extLst>
+      <p:ext uri="{BB962C8B-B14F-4D97-AF65-F5344CB8AC3E}">
+        <p14:creationId xmlns:p14="http://schemas.microsoft.com/office/powerpoint/2010/main" val="1566958624"/>
+      </p:ext>
+    </p:extLst>
   </p:cSld>
   <p:clrMapOvr>
     <a:masterClrMapping/>
@@ -3281,20 +7507,25 @@
             <p:ph type="title"/>
           </p:nvPr>
         </p:nvSpPr>
-        <p:spPr/>
-        <p:txBody>
-          <a:bodyPr/>
-          <a:lstStyle/>
-          <a:p>
-            <a:r>
-              <a:t>Managing Dynamic Frontend Content (Hero Section)</a:t>
+        <p:spPr>
+          <a:xfrm>
+            <a:off x="762000" y="697698"/>
+            <a:ext cx="7797165" cy="1293028"/>
+          </a:xfrm>
+        </p:spPr>
+        <p:txBody>
+          <a:bodyPr/>
+          <a:lstStyle/>
+          <a:p>
+            <a:r>
+              <a:t>Secure Administration Login</a:t>
             </a:r>
           </a:p>
         </p:txBody>
       </p:sp>
       <p:pic>
         <p:nvPicPr>
-          <p:cNvPr id="3" name="Picture 2" descr="hero.png"/>
+          <p:cNvPr id="3" name="Picture 2" descr="login.png"/>
           <p:cNvPicPr>
             <a:picLocks noChangeAspect="1"/>
           </p:cNvPicPr>
@@ -3308,8 +7539,8 @@
         </p:blipFill>
         <p:spPr>
           <a:xfrm>
-            <a:off x="790575" y="1828800"/>
-            <a:ext cx="7315200" cy="4572000"/>
+            <a:off x="76200" y="1914525"/>
+            <a:ext cx="8915400" cy="4838700"/>
           </a:xfrm>
           <a:prstGeom prst="rect">
             <a:avLst/>
@@ -3357,86 +7588,42 @@
           <a:lstStyle/>
           <a:p>
             <a:r>
-              <a:t>Backend Technologies</a:t>
-            </a:r>
-          </a:p>
-        </p:txBody>
-      </p:sp>
-      <p:sp>
-        <p:nvSpPr>
-          <p:cNvPr id="3" name="Content Placeholder 2"/>
-          <p:cNvSpPr>
-            <a:spLocks noGrp="1"/>
-          </p:cNvSpPr>
-          <p:nvPr>
-            <p:ph idx="1"/>
-          </p:nvPr>
-        </p:nvSpPr>
-        <p:spPr/>
-        <p:txBody>
-          <a:bodyPr>
-            <a:normAutofit lnSpcReduction="10000"/>
-          </a:bodyPr>
-          <a:lstStyle/>
-          <a:p>
-            <a:r>
               <a:rPr dirty="0"/>
-              <a:t>Our technology stack ensures security, scalability, and ease of management:</a:t>
-            </a:r>
-          </a:p>
-          <a:p>
-            <a:r>
-              <a:rPr dirty="0"/>
-              <a:t>• Framework: Django (Python)</a:t>
-            </a:r>
-          </a:p>
-          <a:p>
-            <a:r>
-              <a:rPr dirty="0"/>
-              <a:t>• Database: SQLite (Local) / PostgreSQL (Production)</a:t>
-            </a:r>
-          </a:p>
-          <a:p>
-            <a:r>
-              <a:rPr dirty="0"/>
-              <a:t>• File Storage: </a:t>
-            </a:r>
-            <a:r>
-              <a:rPr dirty="0" err="1"/>
-              <a:t>Cloudinary</a:t>
-            </a:r>
-            <a:r>
-              <a:rPr dirty="0"/>
-              <a:t> / Local Media</a:t>
-            </a:r>
-          </a:p>
-          <a:p>
-            <a:r>
-              <a:rPr dirty="0"/>
-              <a:t>• Deployment: Render.com with </a:t>
-            </a:r>
-            <a:r>
-              <a:rPr dirty="0" err="1"/>
-              <a:t>Gunicorn</a:t>
-            </a:r>
-            <a:r>
-              <a:rPr dirty="0"/>
-              <a:t> &amp; </a:t>
-            </a:r>
-            <a:r>
-              <a:rPr dirty="0" err="1"/>
-              <a:t>WhiteNoise</a:t>
-            </a:r>
-            <a:endParaRPr dirty="0"/>
-          </a:p>
-          <a:p>
-            <a:r>
-              <a:rPr dirty="0"/>
-              <a:t>• Frontend Integration: Django Templates &amp; Context Processors</a:t>
-            </a:r>
-          </a:p>
-        </p:txBody>
-      </p:sp>
+              <a:t>Admin Dashboard Overview</a:t>
+            </a:r>
+          </a:p>
+        </p:txBody>
+      </p:sp>
+      <p:pic>
+        <p:nvPicPr>
+          <p:cNvPr id="5" name="Picture 4">
+            <a:extLst>
+              <a:ext uri="{FF2B5EF4-FFF2-40B4-BE49-F238E27FC236}">
+                <a16:creationId xmlns:a16="http://schemas.microsoft.com/office/drawing/2014/main" id="{EC173276-3C4A-43EC-63E6-4995AB029DFA}"/>
+              </a:ext>
+            </a:extLst>
+          </p:cNvPr>
+          <p:cNvPicPr>
+            <a:picLocks noChangeAspect="1"/>
+          </p:cNvPicPr>
+          <p:nvPr/>
+        </p:nvPicPr>
+        <p:blipFill>
+          <a:blip r:embed="rId2"/>
+          <a:stretch>
+            <a:fillRect/>
+          </a:stretch>
+        </p:blipFill>
+        <p:spPr>
+          <a:xfrm>
+            <a:off x="171450" y="2140484"/>
+            <a:ext cx="8648700" cy="4249124"/>
+          </a:xfrm>
+          <a:prstGeom prst="rect">
+            <a:avLst/>
+          </a:prstGeom>
+        </p:spPr>
+      </p:pic>
     </p:spTree>
   </p:cSld>
   <p:clrMapOvr>
@@ -3445,10 +7632,289 @@
 </p:sld>
 </file>
 
+<file path=ppt/slides/slide7.xml><?xml version="1.0" encoding="utf-8"?>
+<p:sld xmlns:a="http://schemas.openxmlformats.org/drawingml/2006/main" xmlns:r="http://schemas.openxmlformats.org/officeDocument/2006/relationships" xmlns:p="http://schemas.openxmlformats.org/presentationml/2006/main">
+  <p:cSld>
+    <p:spTree>
+      <p:nvGrpSpPr>
+        <p:cNvPr id="1" name=""/>
+        <p:cNvGrpSpPr/>
+        <p:nvPr/>
+      </p:nvGrpSpPr>
+      <p:grpSpPr>
+        <a:xfrm>
+          <a:off x="0" y="0"/>
+          <a:ext cx="0" cy="0"/>
+          <a:chOff x="0" y="0"/>
+          <a:chExt cx="0" cy="0"/>
+        </a:xfrm>
+      </p:grpSpPr>
+      <p:sp>
+        <p:nvSpPr>
+          <p:cNvPr id="2" name="Title 1">
+            <a:extLst>
+              <a:ext uri="{FF2B5EF4-FFF2-40B4-BE49-F238E27FC236}">
+                <a16:creationId xmlns:a16="http://schemas.microsoft.com/office/drawing/2014/main" id="{6789537D-1E93-DE8C-8FF9-95CF38F04A3B}"/>
+              </a:ext>
+            </a:extLst>
+          </p:cNvPr>
+          <p:cNvSpPr>
+            <a:spLocks noGrp="1"/>
+          </p:cNvSpPr>
+          <p:nvPr>
+            <p:ph type="title"/>
+          </p:nvPr>
+        </p:nvSpPr>
+        <p:spPr/>
+        <p:txBody>
+          <a:bodyPr/>
+          <a:lstStyle/>
+          <a:p>
+            <a:r>
+              <a:rPr lang="en-IN" dirty="0"/>
+              <a:t>Admin Dashboard</a:t>
+            </a:r>
+          </a:p>
+        </p:txBody>
+      </p:sp>
+      <p:pic>
+        <p:nvPicPr>
+          <p:cNvPr id="3" name="Picture 2">
+            <a:extLst>
+              <a:ext uri="{FF2B5EF4-FFF2-40B4-BE49-F238E27FC236}">
+                <a16:creationId xmlns:a16="http://schemas.microsoft.com/office/drawing/2014/main" id="{4277CB07-19A6-2739-DD58-481F26A6AB32}"/>
+              </a:ext>
+            </a:extLst>
+          </p:cNvPr>
+          <p:cNvPicPr>
+            <a:picLocks noChangeAspect="1"/>
+          </p:cNvPicPr>
+          <p:nvPr/>
+        </p:nvPicPr>
+        <p:blipFill>
+          <a:blip r:embed="rId2"/>
+          <a:stretch>
+            <a:fillRect/>
+          </a:stretch>
+        </p:blipFill>
+        <p:spPr>
+          <a:xfrm>
+            <a:off x="152400" y="2324099"/>
+            <a:ext cx="4064687" cy="4143375"/>
+          </a:xfrm>
+          <a:prstGeom prst="rect">
+            <a:avLst/>
+          </a:prstGeom>
+        </p:spPr>
+      </p:pic>
+      <p:pic>
+        <p:nvPicPr>
+          <p:cNvPr id="4" name="Picture 3">
+            <a:extLst>
+              <a:ext uri="{FF2B5EF4-FFF2-40B4-BE49-F238E27FC236}">
+                <a16:creationId xmlns:a16="http://schemas.microsoft.com/office/drawing/2014/main" id="{E161F737-F6AB-ED86-DBFC-E276FB1E6154}"/>
+              </a:ext>
+            </a:extLst>
+          </p:cNvPr>
+          <p:cNvPicPr>
+            <a:picLocks noChangeAspect="1"/>
+          </p:cNvPicPr>
+          <p:nvPr/>
+        </p:nvPicPr>
+        <p:blipFill>
+          <a:blip r:embed="rId3"/>
+          <a:stretch>
+            <a:fillRect/>
+          </a:stretch>
+        </p:blipFill>
+        <p:spPr>
+          <a:xfrm>
+            <a:off x="4421300" y="2345737"/>
+            <a:ext cx="4570300" cy="4143375"/>
+          </a:xfrm>
+          <a:prstGeom prst="rect">
+            <a:avLst/>
+          </a:prstGeom>
+        </p:spPr>
+      </p:pic>
+    </p:spTree>
+    <p:extLst>
+      <p:ext uri="{BB962C8B-B14F-4D97-AF65-F5344CB8AC3E}">
+        <p14:creationId xmlns:p14="http://schemas.microsoft.com/office/powerpoint/2010/main" val="138796545"/>
+      </p:ext>
+    </p:extLst>
+  </p:cSld>
+  <p:clrMapOvr>
+    <a:masterClrMapping/>
+  </p:clrMapOvr>
+</p:sld>
+</file>
+
+<file path=ppt/slides/slide8.xml><?xml version="1.0" encoding="utf-8"?>
+<p:sld xmlns:a="http://schemas.openxmlformats.org/drawingml/2006/main" xmlns:r="http://schemas.openxmlformats.org/officeDocument/2006/relationships" xmlns:p="http://schemas.openxmlformats.org/presentationml/2006/main">
+  <p:cSld>
+    <p:spTree>
+      <p:nvGrpSpPr>
+        <p:cNvPr id="1" name=""/>
+        <p:cNvGrpSpPr/>
+        <p:nvPr/>
+      </p:nvGrpSpPr>
+      <p:grpSpPr>
+        <a:xfrm>
+          <a:off x="0" y="0"/>
+          <a:ext cx="0" cy="0"/>
+          <a:chOff x="0" y="0"/>
+          <a:chExt cx="0" cy="0"/>
+        </a:xfrm>
+      </p:grpSpPr>
+      <p:sp>
+        <p:nvSpPr>
+          <p:cNvPr id="2" name="Title 1"/>
+          <p:cNvSpPr>
+            <a:spLocks noGrp="1"/>
+          </p:cNvSpPr>
+          <p:nvPr>
+            <p:ph type="title"/>
+          </p:nvPr>
+        </p:nvSpPr>
+        <p:spPr/>
+        <p:txBody>
+          <a:bodyPr/>
+          <a:lstStyle/>
+          <a:p>
+            <a:r>
+              <a:t>Managing Admission Applications Data</a:t>
+            </a:r>
+          </a:p>
+        </p:txBody>
+      </p:sp>
+      <p:pic>
+        <p:nvPicPr>
+          <p:cNvPr id="7" name="Picture 6">
+            <a:extLst>
+              <a:ext uri="{FF2B5EF4-FFF2-40B4-BE49-F238E27FC236}">
+                <a16:creationId xmlns:a16="http://schemas.microsoft.com/office/drawing/2014/main" id="{69E9B9F1-F84B-8FF4-AACD-517459F61995}"/>
+              </a:ext>
+            </a:extLst>
+          </p:cNvPr>
+          <p:cNvPicPr>
+            <a:picLocks noChangeAspect="1"/>
+          </p:cNvPicPr>
+          <p:nvPr/>
+        </p:nvPicPr>
+        <p:blipFill>
+          <a:blip r:embed="rId2"/>
+          <a:stretch>
+            <a:fillRect/>
+          </a:stretch>
+        </p:blipFill>
+        <p:spPr>
+          <a:xfrm>
+            <a:off x="297180" y="2170269"/>
+            <a:ext cx="8549640" cy="4179623"/>
+          </a:xfrm>
+          <a:prstGeom prst="rect">
+            <a:avLst/>
+          </a:prstGeom>
+        </p:spPr>
+      </p:pic>
+    </p:spTree>
+  </p:cSld>
+  <p:clrMapOvr>
+    <a:masterClrMapping/>
+  </p:clrMapOvr>
+</p:sld>
+</file>
+
+<file path=ppt/slides/slide9.xml><?xml version="1.0" encoding="utf-8"?>
+<p:sld xmlns:a="http://schemas.openxmlformats.org/drawingml/2006/main" xmlns:r="http://schemas.openxmlformats.org/officeDocument/2006/relationships" xmlns:p="http://schemas.openxmlformats.org/presentationml/2006/main">
+  <p:cSld>
+    <p:spTree>
+      <p:nvGrpSpPr>
+        <p:cNvPr id="1" name=""/>
+        <p:cNvGrpSpPr/>
+        <p:nvPr/>
+      </p:nvGrpSpPr>
+      <p:grpSpPr>
+        <a:xfrm>
+          <a:off x="0" y="0"/>
+          <a:ext cx="0" cy="0"/>
+          <a:chOff x="0" y="0"/>
+          <a:chExt cx="0" cy="0"/>
+        </a:xfrm>
+      </p:grpSpPr>
+      <p:sp>
+        <p:nvSpPr>
+          <p:cNvPr id="2" name="Title 1">
+            <a:extLst>
+              <a:ext uri="{FF2B5EF4-FFF2-40B4-BE49-F238E27FC236}">
+                <a16:creationId xmlns:a16="http://schemas.microsoft.com/office/drawing/2014/main" id="{08DE722F-DB6F-A87B-1EE4-6F912C1DF4CF}"/>
+              </a:ext>
+            </a:extLst>
+          </p:cNvPr>
+          <p:cNvSpPr>
+            <a:spLocks noGrp="1"/>
+          </p:cNvSpPr>
+          <p:nvPr>
+            <p:ph type="title"/>
+          </p:nvPr>
+        </p:nvSpPr>
+        <p:spPr/>
+        <p:txBody>
+          <a:bodyPr/>
+          <a:lstStyle/>
+          <a:p>
+            <a:endParaRPr lang="en-IN"/>
+          </a:p>
+        </p:txBody>
+      </p:sp>
+      <p:pic>
+        <p:nvPicPr>
+          <p:cNvPr id="4" name="Picture 3">
+            <a:extLst>
+              <a:ext uri="{FF2B5EF4-FFF2-40B4-BE49-F238E27FC236}">
+                <a16:creationId xmlns:a16="http://schemas.microsoft.com/office/drawing/2014/main" id="{C1D8B013-976F-4F84-4A33-3815A56C9324}"/>
+              </a:ext>
+            </a:extLst>
+          </p:cNvPr>
+          <p:cNvPicPr>
+            <a:picLocks noChangeAspect="1"/>
+          </p:cNvPicPr>
+          <p:nvPr/>
+        </p:nvPicPr>
+        <p:blipFill>
+          <a:blip r:embed="rId2"/>
+          <a:stretch>
+            <a:fillRect/>
+          </a:stretch>
+        </p:blipFill>
+        <p:spPr>
+          <a:xfrm>
+            <a:off x="171068" y="924560"/>
+            <a:ext cx="8801863" cy="5842000"/>
+          </a:xfrm>
+          <a:prstGeom prst="rect">
+            <a:avLst/>
+          </a:prstGeom>
+        </p:spPr>
+      </p:pic>
+    </p:spTree>
+    <p:extLst>
+      <p:ext uri="{BB962C8B-B14F-4D97-AF65-F5344CB8AC3E}">
+        <p14:creationId xmlns:p14="http://schemas.microsoft.com/office/powerpoint/2010/main" val="1773619770"/>
+      </p:ext>
+    </p:extLst>
+  </p:cSld>
+  <p:clrMapOvr>
+    <a:masterClrMapping/>
+  </p:clrMapOvr>
+</p:sld>
+</file>
+
 <file path=ppt/theme/theme1.xml><?xml version="1.0" encoding="utf-8"?>
-<a:theme xmlns:a="http://schemas.openxmlformats.org/drawingml/2006/main" name="Office Theme">
+<a:theme xmlns:a="http://schemas.openxmlformats.org/drawingml/2006/main" name="Vapor Trail">
   <a:themeElements>
-    <a:clrScheme name="Office Theme">
+    <a:clrScheme name="Vapor Trail">
       <a:dk1>
         <a:sysClr val="windowText" lastClr="000000"/>
       </a:dk1>
@@ -3456,44 +7922,44 @@
         <a:sysClr val="window" lastClr="FFFFFF"/>
       </a:lt1>
       <a:dk2>
-        <a:srgbClr val="44546A"/>
+        <a:srgbClr val="454545"/>
       </a:dk2>
       <a:lt2>
-        <a:srgbClr val="E7E6E6"/>
+        <a:srgbClr val="DADADA"/>
       </a:lt2>
       <a:accent1>
-        <a:srgbClr val="4472C4"/>
+        <a:srgbClr val="E5224E"/>
       </a:accent1>
       <a:accent2>
-        <a:srgbClr val="ED7D31"/>
+        <a:srgbClr val="9D074E"/>
       </a:accent2>
       <a:accent3>
-        <a:srgbClr val="A5A5A5"/>
+        <a:srgbClr val="7F2294"/>
       </a:accent3>
       <a:accent4>
-        <a:srgbClr val="FFC000"/>
+        <a:srgbClr val="8D65EA"/>
       </a:accent4>
       <a:accent5>
-        <a:srgbClr val="5B9BD5"/>
+        <a:srgbClr val="588FE2"/>
       </a:accent5>
       <a:accent6>
-        <a:srgbClr val="70AD47"/>
+        <a:srgbClr val="127CA4"/>
       </a:accent6>
       <a:hlink>
-        <a:srgbClr val="0563C1"/>
+        <a:srgbClr val="FB4AB6"/>
       </a:hlink>
       <a:folHlink>
-        <a:srgbClr val="954F72"/>
+        <a:srgbClr val="F98FE9"/>
       </a:folHlink>
     </a:clrScheme>
-    <a:fontScheme name="Office Theme">
+    <a:fontScheme name="Vapor Trail">
       <a:majorFont>
-        <a:latin typeface="Calibri Light" panose="020F0302020204030204"/>
+        <a:latin typeface="Century Gothic" panose="020B0502020202020204"/>
         <a:ea typeface=""/>
         <a:cs typeface=""/>
-        <a:font script="Jpan" typeface="游ゴシック Light"/>
+        <a:font script="Jpan" typeface="ＭＳ Ｐゴシック"/>
         <a:font script="Hang" typeface="맑은 고딕"/>
-        <a:font script="Hans" typeface="等线 Light"/>
+        <a:font script="Hans" typeface="宋体"/>
         <a:font script="Hant" typeface="新細明體"/>
         <a:font script="Arab" typeface="Times New Roman"/>
         <a:font script="Hebr" typeface="Times New Roman"/>
@@ -3523,12 +7989,12 @@
         <a:font script="Geor" typeface="Sylfaen"/>
       </a:majorFont>
       <a:minorFont>
-        <a:latin typeface="Calibri" panose="020F0502020204030204"/>
+        <a:latin typeface="Century Gothic" panose="020B0502020202020204"/>
         <a:ea typeface=""/>
         <a:cs typeface=""/>
-        <a:font script="Jpan" typeface="游ゴシック"/>
+        <a:font script="Jpan" typeface="ＭＳ Ｐゴシック"/>
         <a:font script="Hang" typeface="맑은 고딕"/>
-        <a:font script="Hans" typeface="等线"/>
+        <a:font script="Hans" typeface="宋体"/>
         <a:font script="Hant" typeface="新細明體"/>
         <a:font script="Arab" typeface="Arial"/>
         <a:font script="Hebr" typeface="Arial"/>
@@ -3558,7 +8024,7 @@
         <a:font script="Geor" typeface="Sylfaen"/>
       </a:minorFont>
     </a:fontScheme>
-    <a:fmtScheme name="Office Theme">
+    <a:fmtScheme name="Vapor Trail">
       <a:fillStyleLst>
         <a:solidFill>
           <a:schemeClr val="phClr"/>
@@ -3567,23 +8033,24 @@
           <a:gsLst>
             <a:gs pos="0">
               <a:schemeClr val="phClr">
+                <a:tint val="69000"/>
+                <a:alpha val="100000"/>
+                <a:satMod val="109000"/>
                 <a:lumMod val="110000"/>
-                <a:satMod val="105000"/>
-                <a:tint val="67000"/>
               </a:schemeClr>
             </a:gs>
-            <a:gs pos="50000">
+            <a:gs pos="52000">
               <a:schemeClr val="phClr">
-                <a:lumMod val="105000"/>
-                <a:satMod val="103000"/>
-                <a:tint val="73000"/>
+                <a:tint val="74000"/>
+                <a:satMod val="100000"/>
+                <a:lumMod val="104000"/>
               </a:schemeClr>
             </a:gs>
             <a:gs pos="100000">
               <a:schemeClr val="phClr">
-                <a:lumMod val="105000"/>
-                <a:satMod val="109000"/>
-                <a:tint val="81000"/>
+                <a:tint val="78000"/>
+                <a:satMod val="100000"/>
+                <a:lumMod val="100000"/>
               </a:schemeClr>
             </a:gs>
           </a:gsLst>
@@ -3593,23 +8060,16 @@
           <a:gsLst>
             <a:gs pos="0">
               <a:schemeClr val="phClr">
-                <a:satMod val="103000"/>
-                <a:lumMod val="102000"/>
-                <a:tint val="94000"/>
+                <a:tint val="96000"/>
+                <a:satMod val="100000"/>
+                <a:lumMod val="104000"/>
               </a:schemeClr>
             </a:gs>
-            <a:gs pos="50000">
+            <a:gs pos="78000">
               <a:schemeClr val="phClr">
+                <a:shade val="100000"/>
                 <a:satMod val="110000"/>
                 <a:lumMod val="100000"/>
-                <a:shade val="100000"/>
-              </a:schemeClr>
-            </a:gs>
-            <a:gs pos="100000">
-              <a:schemeClr val="phClr">
-                <a:lumMod val="99000"/>
-                <a:satMod val="120000"/>
-                <a:shade val="78000"/>
               </a:schemeClr>
             </a:gs>
           </a:gsLst>
@@ -3617,26 +8077,23 @@
         </a:gradFill>
       </a:fillStyleLst>
       <a:lnStyleLst>
-        <a:ln w="6350" cap="flat" cmpd="sng" algn="ctr">
+        <a:ln w="9525" cap="flat" cmpd="sng" algn="ctr">
           <a:solidFill>
             <a:schemeClr val="phClr"/>
           </a:solidFill>
           <a:prstDash val="solid"/>
-          <a:miter lim="800000"/>
         </a:ln>
         <a:ln w="12700" cap="flat" cmpd="sng" algn="ctr">
           <a:solidFill>
             <a:schemeClr val="phClr"/>
           </a:solidFill>
           <a:prstDash val="solid"/>
-          <a:miter lim="800000"/>
         </a:ln>
         <a:ln w="19050" cap="flat" cmpd="sng" algn="ctr">
           <a:solidFill>
             <a:schemeClr val="phClr"/>
           </a:solidFill>
           <a:prstDash val="solid"/>
-          <a:miter lim="800000"/>
         </a:ln>
       </a:lnStyleLst>
       <a:effectStyleLst>
@@ -3645,15 +8102,33 @@
         </a:effectStyle>
         <a:effectStyle>
           <a:effectLst/>
+          <a:scene3d>
+            <a:camera prst="orthographicFront">
+              <a:rot lat="0" lon="0" rev="0"/>
+            </a:camera>
+            <a:lightRig rig="threePt" dir="t"/>
+          </a:scene3d>
+          <a:sp3d>
+            <a:bevelT w="25400" h="12700"/>
+          </a:sp3d>
         </a:effectStyle>
         <a:effectStyle>
           <a:effectLst>
             <a:outerShdw blurRad="57150" dist="19050" dir="5400000" algn="ctr" rotWithShape="0">
               <a:srgbClr val="000000">
-                <a:alpha val="63000"/>
+                <a:alpha val="48000"/>
               </a:srgbClr>
             </a:outerShdw>
           </a:effectLst>
+          <a:scene3d>
+            <a:camera prst="orthographicFront">
+              <a:rot lat="0" lon="0" rev="0"/>
+            </a:camera>
+            <a:lightRig rig="threePt" dir="t"/>
+          </a:scene3d>
+          <a:sp3d>
+            <a:bevelT w="50800" h="25400"/>
+          </a:sp3d>
         </a:effectStyle>
       </a:effectStyleLst>
       <a:bgFillStyleLst>
@@ -3671,16 +8146,16 @@
             <a:gs pos="0">
               <a:schemeClr val="phClr">
                 <a:tint val="93000"/>
+                <a:shade val="98000"/>
                 <a:satMod val="150000"/>
-                <a:shade val="98000"/>
                 <a:lumMod val="102000"/>
               </a:schemeClr>
             </a:gs>
             <a:gs pos="50000">
               <a:schemeClr val="phClr">
                 <a:tint val="98000"/>
+                <a:shade val="90000"/>
                 <a:satMod val="130000"/>
-                <a:shade val="90000"/>
                 <a:lumMod val="103000"/>
               </a:schemeClr>
             </a:gs>
@@ -3700,7 +8175,7 @@
   <a:extraClrSchemeLst/>
   <a:extLst>
     <a:ext uri="{05A4C25C-085E-4340-85A3-A5531E510DB2}">
-      <thm15:themeFamily xmlns:thm15="http://schemas.microsoft.com/office/thememl/2012/main" name="Office 2013 - 2022 Theme" id="{62F939B6-93AF-4DB8-9C6B-D6C7DFDC589F}" vid="{4F46216B-77A9-411A-B9D3-5023FCB70208}"/>
+      <thm15:themeFamily xmlns:thm15="http://schemas.microsoft.com/office/thememl/2012/main" name="Vapor Trail" id="{4FDF2955-7D9C-493C-B9F9-C205151B46CD}" vid="{6DB8EB18-3657-4051-A897-2ED38832359E}"/>
     </a:ext>
   </a:extLst>
 </a:theme>
